--- a/presentation/CY376-Blue-Team-Presentation.pptx
+++ b/presentation/CY376-Blue-Team-Presentation.pptx
@@ -1,26 +1,26 @@
 
 <file path=ppt/presentation.xml><?xml version="1.0" encoding="utf-8"?>
-<p:presentation xmlns:a="http://schemas.openxmlformats.org/drawingml/2006/main" xmlns:r="http://schemas.openxmlformats.org/officeDocument/2006/relationships" xmlns:p="http://schemas.openxmlformats.org/presentationml/2006/main" saveSubsetFonts="1" autoCompressPictures="0">
+<p:presentation xmlns:a="http://schemas.openxmlformats.org/drawingml/2006/main" xmlns:r="http://schemas.openxmlformats.org/officeDocument/2006/relationships" xmlns:p="http://schemas.openxmlformats.org/presentationml/2006/main" saveSubsetFonts="1">
   <p:sldMasterIdLst>
     <p:sldMasterId id="2147483648" r:id="rId1"/>
   </p:sldMasterIdLst>
   <p:sldIdLst>
-    <p:sldId id="256" r:id="rId7"/>
-    <p:sldId id="257" r:id="rId8"/>
-    <p:sldId id="258" r:id="rId9"/>
-    <p:sldId id="259" r:id="rId10"/>
-    <p:sldId id="260" r:id="rId11"/>
-    <p:sldId id="261" r:id="rId12"/>
-    <p:sldId id="262" r:id="rId13"/>
-    <p:sldId id="263" r:id="rId14"/>
+    <p:sldId id="256" r:id="rId2"/>
+    <p:sldId id="257" r:id="rId3"/>
+    <p:sldId id="258" r:id="rId4"/>
+    <p:sldId id="259" r:id="rId5"/>
+    <p:sldId id="260" r:id="rId6"/>
+    <p:sldId id="261" r:id="rId7"/>
+    <p:sldId id="262" r:id="rId8"/>
+    <p:sldId id="263" r:id="rId9"/>
   </p:sldIdLst>
-  <p:sldSz cx="12191695" cy="6858000" type="screen4x3"/>
+  <p:sldSz cx="914400" cy="914400"/>
   <p:notesSz cx="6858000" cy="9144000"/>
   <p:defaultTextStyle>
     <a:defPPr>
       <a:defRPr lang="en-US"/>
     </a:defPPr>
-    <a:lvl1pPr marL="0" algn="l" defTabSz="457200" rtl="0" eaLnBrk="1" latinLnBrk="0" hangingPunct="1">
+    <a:lvl1pPr marL="0" algn="l" defTabSz="914400" rtl="0" eaLnBrk="1" latinLnBrk="0" hangingPunct="1">
       <a:defRPr sz="1800" kern="1200">
         <a:solidFill>
           <a:schemeClr val="tx1"/>
@@ -30,7 +30,7 @@
         <a:cs typeface="+mn-cs"/>
       </a:defRPr>
     </a:lvl1pPr>
-    <a:lvl2pPr marL="457200" algn="l" defTabSz="457200" rtl="0" eaLnBrk="1" latinLnBrk="0" hangingPunct="1">
+    <a:lvl2pPr marL="457200" algn="l" defTabSz="914400" rtl="0" eaLnBrk="1" latinLnBrk="0" hangingPunct="1">
       <a:defRPr sz="1800" kern="1200">
         <a:solidFill>
           <a:schemeClr val="tx1"/>
@@ -40,7 +40,7 @@
         <a:cs typeface="+mn-cs"/>
       </a:defRPr>
     </a:lvl2pPr>
-    <a:lvl3pPr marL="914400" algn="l" defTabSz="457200" rtl="0" eaLnBrk="1" latinLnBrk="0" hangingPunct="1">
+    <a:lvl3pPr marL="914400" algn="l" defTabSz="914400" rtl="0" eaLnBrk="1" latinLnBrk="0" hangingPunct="1">
       <a:defRPr sz="1800" kern="1200">
         <a:solidFill>
           <a:schemeClr val="tx1"/>
@@ -50,7 +50,7 @@
         <a:cs typeface="+mn-cs"/>
       </a:defRPr>
     </a:lvl3pPr>
-    <a:lvl4pPr marL="1371600" algn="l" defTabSz="457200" rtl="0" eaLnBrk="1" latinLnBrk="0" hangingPunct="1">
+    <a:lvl4pPr marL="1371600" algn="l" defTabSz="914400" rtl="0" eaLnBrk="1" latinLnBrk="0" hangingPunct="1">
       <a:defRPr sz="1800" kern="1200">
         <a:solidFill>
           <a:schemeClr val="tx1"/>
@@ -60,7 +60,7 @@
         <a:cs typeface="+mn-cs"/>
       </a:defRPr>
     </a:lvl4pPr>
-    <a:lvl5pPr marL="1828800" algn="l" defTabSz="457200" rtl="0" eaLnBrk="1" latinLnBrk="0" hangingPunct="1">
+    <a:lvl5pPr marL="1828800" algn="l" defTabSz="914400" rtl="0" eaLnBrk="1" latinLnBrk="0" hangingPunct="1">
       <a:defRPr sz="1800" kern="1200">
         <a:solidFill>
           <a:schemeClr val="tx1"/>
@@ -70,7 +70,7 @@
         <a:cs typeface="+mn-cs"/>
       </a:defRPr>
     </a:lvl5pPr>
-    <a:lvl6pPr marL="2286000" algn="l" defTabSz="457200" rtl="0" eaLnBrk="1" latinLnBrk="0" hangingPunct="1">
+    <a:lvl6pPr marL="2286000" algn="l" defTabSz="914400" rtl="0" eaLnBrk="1" latinLnBrk="0" hangingPunct="1">
       <a:defRPr sz="1800" kern="1200">
         <a:solidFill>
           <a:schemeClr val="tx1"/>
@@ -80,7 +80,7 @@
         <a:cs typeface="+mn-cs"/>
       </a:defRPr>
     </a:lvl6pPr>
-    <a:lvl7pPr marL="2743200" algn="l" defTabSz="457200" rtl="0" eaLnBrk="1" latinLnBrk="0" hangingPunct="1">
+    <a:lvl7pPr marL="2743200" algn="l" defTabSz="914400" rtl="0" eaLnBrk="1" latinLnBrk="0" hangingPunct="1">
       <a:defRPr sz="1800" kern="1200">
         <a:solidFill>
           <a:schemeClr val="tx1"/>
@@ -90,7 +90,7 @@
         <a:cs typeface="+mn-cs"/>
       </a:defRPr>
     </a:lvl7pPr>
-    <a:lvl8pPr marL="3200400" algn="l" defTabSz="457200" rtl="0" eaLnBrk="1" latinLnBrk="0" hangingPunct="1">
+    <a:lvl8pPr marL="3200400" algn="l" defTabSz="914400" rtl="0" eaLnBrk="1" latinLnBrk="0" hangingPunct="1">
       <a:defRPr sz="1800" kern="1200">
         <a:solidFill>
           <a:schemeClr val="tx1"/>
@@ -100,7 +100,7 @@
         <a:cs typeface="+mn-cs"/>
       </a:defRPr>
     </a:lvl8pPr>
-    <a:lvl9pPr marL="3657600" algn="l" defTabSz="457200" rtl="0" eaLnBrk="1" latinLnBrk="0" hangingPunct="1">
+    <a:lvl9pPr marL="3657600" algn="l" defTabSz="914400" rtl="0" eaLnBrk="1" latinLnBrk="0" hangingPunct="1">
       <a:defRPr sz="1800" kern="1200">
         <a:solidFill>
           <a:schemeClr val="tx1"/>
@@ -133,7 +133,13 @@
       </p:grpSpPr>
       <p:sp>
         <p:nvSpPr>
-          <p:cNvPr id="2" name="Title 1"/>
+          <p:cNvPr id="2" name="Title 1">
+            <a:extLst>
+              <a:ext uri="{FF2B5EF4-FFF2-40B4-BE49-F238E27FC236}">
+                <a16:creationId xmlns:a16="http://schemas.microsoft.com/office/drawing/2014/main" id="{51B7D1DB-1E06-9DD4-AE21-36BCBDA9EB2E}"/>
+              </a:ext>
+            </a:extLst>
+          </p:cNvPr>
           <p:cNvSpPr>
             <a:spLocks noGrp="1"/>
           </p:cNvSpPr>
@@ -143,25 +149,34 @@
         </p:nvSpPr>
         <p:spPr>
           <a:xfrm>
-            <a:off x="685800" y="2130425"/>
-            <a:ext cx="7772400" cy="1470025"/>
+            <a:off x="114300" y="149648"/>
+            <a:ext cx="685800" cy="318347"/>
           </a:xfrm>
         </p:spPr>
         <p:txBody>
-          <a:bodyPr/>
-          <a:lstStyle/>
-          <a:p>
-            <a:r>
-              <a:rPr lang="en-US" smtClean="0"/>
+          <a:bodyPr anchor="b"/>
+          <a:lstStyle>
+            <a:lvl1pPr algn="ctr">
+              <a:defRPr sz="100"/>
+            </a:lvl1pPr>
+          </a:lstStyle>
+          <a:p>
+            <a:r>
+              <a:rPr lang="en-US"/>
               <a:t>Click to edit Master title style</a:t>
             </a:r>
-            <a:endParaRPr lang="en-US"/>
-          </a:p>
-        </p:txBody>
-      </p:sp>
-      <p:sp>
-        <p:nvSpPr>
-          <p:cNvPr id="3" name="Subtitle 2"/>
+          </a:p>
+        </p:txBody>
+      </p:sp>
+      <p:sp>
+        <p:nvSpPr>
+          <p:cNvPr id="3" name="Subtitle 2">
+            <a:extLst>
+              <a:ext uri="{FF2B5EF4-FFF2-40B4-BE49-F238E27FC236}">
+                <a16:creationId xmlns:a16="http://schemas.microsoft.com/office/drawing/2014/main" id="{16C1C337-C728-D300-D390-0ECEEFDF12BD}"/>
+              </a:ext>
+            </a:extLst>
+          </p:cNvPr>
           <p:cNvSpPr>
             <a:spLocks noGrp="1"/>
           </p:cNvSpPr>
@@ -171,8 +186,8 @@
         </p:nvSpPr>
         <p:spPr>
           <a:xfrm>
-            <a:off x="1371600" y="3886200"/>
-            <a:ext cx="6400800" cy="1752600"/>
+            <a:off x="114300" y="480272"/>
+            <a:ext cx="685800" cy="220768"/>
           </a:xfrm>
         </p:spPr>
         <p:txBody>
@@ -180,122 +195,73 @@
           <a:lstStyle>
             <a:lvl1pPr marL="0" indent="0" algn="ctr">
               <a:buNone/>
-              <a:defRPr>
-                <a:solidFill>
-                  <a:schemeClr val="tx1">
-                    <a:tint val="75000"/>
-                  </a:schemeClr>
-                </a:solidFill>
-              </a:defRPr>
+              <a:defRPr sz="100"/>
             </a:lvl1pPr>
-            <a:lvl2pPr marL="457200" indent="0" algn="ctr">
-              <a:buNone/>
-              <a:defRPr>
-                <a:solidFill>
-                  <a:schemeClr val="tx1">
-                    <a:tint val="75000"/>
-                  </a:schemeClr>
-                </a:solidFill>
-              </a:defRPr>
+            <a:lvl2pPr marL="4571" indent="0" algn="ctr">
+              <a:buNone/>
+              <a:defRPr sz="100"/>
             </a:lvl2pPr>
-            <a:lvl3pPr marL="914400" indent="0" algn="ctr">
-              <a:buNone/>
-              <a:defRPr>
-                <a:solidFill>
-                  <a:schemeClr val="tx1">
-                    <a:tint val="75000"/>
-                  </a:schemeClr>
-                </a:solidFill>
-              </a:defRPr>
+            <a:lvl3pPr marL="9142" indent="0" algn="ctr">
+              <a:buNone/>
+              <a:defRPr sz="100"/>
             </a:lvl3pPr>
-            <a:lvl4pPr marL="1371600" indent="0" algn="ctr">
-              <a:buNone/>
-              <a:defRPr>
-                <a:solidFill>
-                  <a:schemeClr val="tx1">
-                    <a:tint val="75000"/>
-                  </a:schemeClr>
-                </a:solidFill>
-              </a:defRPr>
+            <a:lvl4pPr marL="13713" indent="0" algn="ctr">
+              <a:buNone/>
+              <a:defRPr sz="100"/>
             </a:lvl4pPr>
-            <a:lvl5pPr marL="1828800" indent="0" algn="ctr">
-              <a:buNone/>
-              <a:defRPr>
-                <a:solidFill>
-                  <a:schemeClr val="tx1">
-                    <a:tint val="75000"/>
-                  </a:schemeClr>
-                </a:solidFill>
-              </a:defRPr>
+            <a:lvl5pPr marL="18283" indent="0" algn="ctr">
+              <a:buNone/>
+              <a:defRPr sz="100"/>
             </a:lvl5pPr>
-            <a:lvl6pPr marL="2286000" indent="0" algn="ctr">
-              <a:buNone/>
-              <a:defRPr>
-                <a:solidFill>
-                  <a:schemeClr val="tx1">
-                    <a:tint val="75000"/>
-                  </a:schemeClr>
-                </a:solidFill>
-              </a:defRPr>
+            <a:lvl6pPr marL="22854" indent="0" algn="ctr">
+              <a:buNone/>
+              <a:defRPr sz="100"/>
             </a:lvl6pPr>
-            <a:lvl7pPr marL="2743200" indent="0" algn="ctr">
-              <a:buNone/>
-              <a:defRPr>
-                <a:solidFill>
-                  <a:schemeClr val="tx1">
-                    <a:tint val="75000"/>
-                  </a:schemeClr>
-                </a:solidFill>
-              </a:defRPr>
+            <a:lvl7pPr marL="27425" indent="0" algn="ctr">
+              <a:buNone/>
+              <a:defRPr sz="100"/>
             </a:lvl7pPr>
-            <a:lvl8pPr marL="3200400" indent="0" algn="ctr">
-              <a:buNone/>
-              <a:defRPr>
-                <a:solidFill>
-                  <a:schemeClr val="tx1">
-                    <a:tint val="75000"/>
-                  </a:schemeClr>
-                </a:solidFill>
-              </a:defRPr>
+            <a:lvl8pPr marL="31996" indent="0" algn="ctr">
+              <a:buNone/>
+              <a:defRPr sz="100"/>
             </a:lvl8pPr>
-            <a:lvl9pPr marL="3657600" indent="0" algn="ctr">
-              <a:buNone/>
-              <a:defRPr>
-                <a:solidFill>
-                  <a:schemeClr val="tx1">
-                    <a:tint val="75000"/>
-                  </a:schemeClr>
-                </a:solidFill>
-              </a:defRPr>
+            <a:lvl9pPr marL="36567" indent="0" algn="ctr">
+              <a:buNone/>
+              <a:defRPr sz="100"/>
             </a:lvl9pPr>
           </a:lstStyle>
           <a:p>
             <a:r>
+              <a:rPr lang="en-US"/>
+              <a:t>Click to edit Master subtitle style</a:t>
+            </a:r>
+          </a:p>
+        </p:txBody>
+      </p:sp>
+      <p:sp>
+        <p:nvSpPr>
+          <p:cNvPr id="4" name="Date Placeholder 3">
+            <a:extLst>
+              <a:ext uri="{FF2B5EF4-FFF2-40B4-BE49-F238E27FC236}">
+                <a16:creationId xmlns:a16="http://schemas.microsoft.com/office/drawing/2014/main" id="{63312FED-E86B-B651-CEF5-2A38579D9EE0}"/>
+              </a:ext>
+            </a:extLst>
+          </p:cNvPr>
+          <p:cNvSpPr>
+            <a:spLocks noGrp="1"/>
+          </p:cNvSpPr>
+          <p:nvPr>
+            <p:ph type="dt" sz="half" idx="10"/>
+          </p:nvPr>
+        </p:nvSpPr>
+        <p:spPr/>
+        <p:txBody>
+          <a:bodyPr/>
+          <a:lstStyle/>
+          <a:p>
+            <a:fld id="{8B95E3DC-E37F-4B4D-991A-1190A7C7BBE5}" type="datetimeFigureOut">
               <a:rPr lang="en-US" smtClean="0"/>
-              <a:t>Click to edit Master subtitle style</a:t>
-            </a:r>
-            <a:endParaRPr lang="en-US"/>
-          </a:p>
-        </p:txBody>
-      </p:sp>
-      <p:sp>
-        <p:nvSpPr>
-          <p:cNvPr id="4" name="Date Placeholder 3"/>
-          <p:cNvSpPr>
-            <a:spLocks noGrp="1"/>
-          </p:cNvSpPr>
-          <p:nvPr>
-            <p:ph type="dt" sz="half" idx="10"/>
-          </p:nvPr>
-        </p:nvSpPr>
-        <p:spPr/>
-        <p:txBody>
-          <a:bodyPr/>
-          <a:lstStyle/>
-          <a:p>
-            <a:fld id="{5BCAD085-E8A6-8845-BD4E-CB4CCA059FC4}" type="datetimeFigureOut">
-              <a:rPr lang="en-US" smtClean="0"/>
-              <a:t>1/27/13</a:t>
+              <a:t>8/2/2026</a:t>
             </a:fld>
             <a:endParaRPr lang="en-US"/>
           </a:p>
@@ -303,7 +269,13 @@
       </p:sp>
       <p:sp>
         <p:nvSpPr>
-          <p:cNvPr id="5" name="Footer Placeholder 4"/>
+          <p:cNvPr id="5" name="Footer Placeholder 4">
+            <a:extLst>
+              <a:ext uri="{FF2B5EF4-FFF2-40B4-BE49-F238E27FC236}">
+                <a16:creationId xmlns:a16="http://schemas.microsoft.com/office/drawing/2014/main" id="{5FB8463E-2A8A-4FEE-55BB-90F52DA6B02E}"/>
+              </a:ext>
+            </a:extLst>
+          </p:cNvPr>
           <p:cNvSpPr>
             <a:spLocks noGrp="1"/>
           </p:cNvSpPr>
@@ -322,7 +294,13 @@
       </p:sp>
       <p:sp>
         <p:nvSpPr>
-          <p:cNvPr id="6" name="Slide Number Placeholder 5"/>
+          <p:cNvPr id="6" name="Slide Number Placeholder 5">
+            <a:extLst>
+              <a:ext uri="{FF2B5EF4-FFF2-40B4-BE49-F238E27FC236}">
+                <a16:creationId xmlns:a16="http://schemas.microsoft.com/office/drawing/2014/main" id="{F6C919C4-8D85-C327-BB21-BD421E243A3D}"/>
+              </a:ext>
+            </a:extLst>
+          </p:cNvPr>
           <p:cNvSpPr>
             <a:spLocks noGrp="1"/>
           </p:cNvSpPr>
@@ -335,7 +313,7 @@
           <a:bodyPr/>
           <a:lstStyle/>
           <a:p>
-            <a:fld id="{C1FF6DA9-008F-8B48-92A6-B652298478BF}" type="slidenum">
+            <a:fld id="{41FEF42D-5A65-4029-9F78-408BF3F9B145}" type="slidenum">
               <a:rPr lang="en-US" smtClean="0"/>
               <a:t>‹#›</a:t>
             </a:fld>
@@ -346,7 +324,7 @@
     </p:spTree>
     <p:extLst>
       <p:ext uri="{BB962C8B-B14F-4D97-AF65-F5344CB8AC3E}">
-        <p14:creationId xmlns:p14="http://schemas.microsoft.com/office/powerpoint/2010/main" val="3168075583"/>
+        <p14:creationId xmlns:p14="http://schemas.microsoft.com/office/powerpoint/2010/main" val="175696059"/>
       </p:ext>
     </p:extLst>
   </p:cSld>
@@ -375,7 +353,13 @@
       </p:grpSpPr>
       <p:sp>
         <p:nvSpPr>
-          <p:cNvPr id="2" name="Title 1"/>
+          <p:cNvPr id="2" name="Title 1">
+            <a:extLst>
+              <a:ext uri="{FF2B5EF4-FFF2-40B4-BE49-F238E27FC236}">
+                <a16:creationId xmlns:a16="http://schemas.microsoft.com/office/drawing/2014/main" id="{1817A622-6032-00D0-5693-3763EAD7D495}"/>
+              </a:ext>
+            </a:extLst>
+          </p:cNvPr>
           <p:cNvSpPr>
             <a:spLocks noGrp="1"/>
           </p:cNvSpPr>
@@ -389,83 +373,93 @@
           <a:lstStyle/>
           <a:p>
             <a:r>
+              <a:rPr lang="en-US"/>
+              <a:t>Click to edit Master title style</a:t>
+            </a:r>
+          </a:p>
+        </p:txBody>
+      </p:sp>
+      <p:sp>
+        <p:nvSpPr>
+          <p:cNvPr id="3" name="Vertical Text Placeholder 2">
+            <a:extLst>
+              <a:ext uri="{FF2B5EF4-FFF2-40B4-BE49-F238E27FC236}">
+                <a16:creationId xmlns:a16="http://schemas.microsoft.com/office/drawing/2014/main" id="{1C5B895B-BE0E-7B4D-A0B5-A8D4D2053816}"/>
+              </a:ext>
+            </a:extLst>
+          </p:cNvPr>
+          <p:cNvSpPr>
+            <a:spLocks noGrp="1"/>
+          </p:cNvSpPr>
+          <p:nvPr>
+            <p:ph type="body" orient="vert" idx="1"/>
+          </p:nvPr>
+        </p:nvSpPr>
+        <p:spPr/>
+        <p:txBody>
+          <a:bodyPr vert="eaVert"/>
+          <a:lstStyle/>
+          <a:p>
+            <a:pPr lvl="0"/>
+            <a:r>
+              <a:rPr lang="en-US"/>
+              <a:t>Click to edit Master text styles</a:t>
+            </a:r>
+          </a:p>
+          <a:p>
+            <a:pPr lvl="1"/>
+            <a:r>
+              <a:rPr lang="en-US"/>
+              <a:t>Second level</a:t>
+            </a:r>
+          </a:p>
+          <a:p>
+            <a:pPr lvl="2"/>
+            <a:r>
+              <a:rPr lang="en-US"/>
+              <a:t>Third level</a:t>
+            </a:r>
+          </a:p>
+          <a:p>
+            <a:pPr lvl="3"/>
+            <a:r>
+              <a:rPr lang="en-US"/>
+              <a:t>Fourth level</a:t>
+            </a:r>
+          </a:p>
+          <a:p>
+            <a:pPr lvl="4"/>
+            <a:r>
+              <a:rPr lang="en-US"/>
+              <a:t>Fifth level</a:t>
+            </a:r>
+          </a:p>
+        </p:txBody>
+      </p:sp>
+      <p:sp>
+        <p:nvSpPr>
+          <p:cNvPr id="4" name="Date Placeholder 3">
+            <a:extLst>
+              <a:ext uri="{FF2B5EF4-FFF2-40B4-BE49-F238E27FC236}">
+                <a16:creationId xmlns:a16="http://schemas.microsoft.com/office/drawing/2014/main" id="{98A7280F-191C-69C6-6725-DFFE954288E6}"/>
+              </a:ext>
+            </a:extLst>
+          </p:cNvPr>
+          <p:cNvSpPr>
+            <a:spLocks noGrp="1"/>
+          </p:cNvSpPr>
+          <p:nvPr>
+            <p:ph type="dt" sz="half" idx="10"/>
+          </p:nvPr>
+        </p:nvSpPr>
+        <p:spPr/>
+        <p:txBody>
+          <a:bodyPr/>
+          <a:lstStyle/>
+          <a:p>
+            <a:fld id="{8B95E3DC-E37F-4B4D-991A-1190A7C7BBE5}" type="datetimeFigureOut">
               <a:rPr lang="en-US" smtClean="0"/>
-              <a:t>Click to edit Master title style</a:t>
-            </a:r>
-            <a:endParaRPr lang="en-US"/>
-          </a:p>
-        </p:txBody>
-      </p:sp>
-      <p:sp>
-        <p:nvSpPr>
-          <p:cNvPr id="3" name="Vertical Text Placeholder 2"/>
-          <p:cNvSpPr>
-            <a:spLocks noGrp="1"/>
-          </p:cNvSpPr>
-          <p:nvPr>
-            <p:ph type="body" orient="vert" idx="1"/>
-          </p:nvPr>
-        </p:nvSpPr>
-        <p:spPr/>
-        <p:txBody>
-          <a:bodyPr vert="eaVert"/>
-          <a:lstStyle/>
-          <a:p>
-            <a:pPr lvl="0"/>
-            <a:r>
-              <a:rPr lang="en-US" smtClean="0"/>
-              <a:t>Click to edit Master text styles</a:t>
-            </a:r>
-          </a:p>
-          <a:p>
-            <a:pPr lvl="1"/>
-            <a:r>
-              <a:rPr lang="en-US" smtClean="0"/>
-              <a:t>Second level</a:t>
-            </a:r>
-          </a:p>
-          <a:p>
-            <a:pPr lvl="2"/>
-            <a:r>
-              <a:rPr lang="en-US" smtClean="0"/>
-              <a:t>Third level</a:t>
-            </a:r>
-          </a:p>
-          <a:p>
-            <a:pPr lvl="3"/>
-            <a:r>
-              <a:rPr lang="en-US" smtClean="0"/>
-              <a:t>Fourth level</a:t>
-            </a:r>
-          </a:p>
-          <a:p>
-            <a:pPr lvl="4"/>
-            <a:r>
-              <a:rPr lang="en-US" smtClean="0"/>
-              <a:t>Fifth level</a:t>
-            </a:r>
-            <a:endParaRPr lang="en-US"/>
-          </a:p>
-        </p:txBody>
-      </p:sp>
-      <p:sp>
-        <p:nvSpPr>
-          <p:cNvPr id="4" name="Date Placeholder 3"/>
-          <p:cNvSpPr>
-            <a:spLocks noGrp="1"/>
-          </p:cNvSpPr>
-          <p:nvPr>
-            <p:ph type="dt" sz="half" idx="10"/>
-          </p:nvPr>
-        </p:nvSpPr>
-        <p:spPr/>
-        <p:txBody>
-          <a:bodyPr/>
-          <a:lstStyle/>
-          <a:p>
-            <a:fld id="{5BCAD085-E8A6-8845-BD4E-CB4CCA059FC4}" type="datetimeFigureOut">
-              <a:rPr lang="en-US" smtClean="0"/>
-              <a:t>1/27/13</a:t>
+              <a:t>8/2/2026</a:t>
             </a:fld>
             <a:endParaRPr lang="en-US"/>
           </a:p>
@@ -473,7 +467,13 @@
       </p:sp>
       <p:sp>
         <p:nvSpPr>
-          <p:cNvPr id="5" name="Footer Placeholder 4"/>
+          <p:cNvPr id="5" name="Footer Placeholder 4">
+            <a:extLst>
+              <a:ext uri="{FF2B5EF4-FFF2-40B4-BE49-F238E27FC236}">
+                <a16:creationId xmlns:a16="http://schemas.microsoft.com/office/drawing/2014/main" id="{6CB0F8F4-3CF8-4A61-C645-26841A7C78FE}"/>
+              </a:ext>
+            </a:extLst>
+          </p:cNvPr>
           <p:cNvSpPr>
             <a:spLocks noGrp="1"/>
           </p:cNvSpPr>
@@ -492,7 +492,13 @@
       </p:sp>
       <p:sp>
         <p:nvSpPr>
-          <p:cNvPr id="6" name="Slide Number Placeholder 5"/>
+          <p:cNvPr id="6" name="Slide Number Placeholder 5">
+            <a:extLst>
+              <a:ext uri="{FF2B5EF4-FFF2-40B4-BE49-F238E27FC236}">
+                <a16:creationId xmlns:a16="http://schemas.microsoft.com/office/drawing/2014/main" id="{1BAF3CBE-6C1A-A8CD-DF56-930F17B17E0A}"/>
+              </a:ext>
+            </a:extLst>
+          </p:cNvPr>
           <p:cNvSpPr>
             <a:spLocks noGrp="1"/>
           </p:cNvSpPr>
@@ -505,7 +511,7 @@
           <a:bodyPr/>
           <a:lstStyle/>
           <a:p>
-            <a:fld id="{C1FF6DA9-008F-8B48-92A6-B652298478BF}" type="slidenum">
+            <a:fld id="{41FEF42D-5A65-4029-9F78-408BF3F9B145}" type="slidenum">
               <a:rPr lang="en-US" smtClean="0"/>
               <a:t>‹#›</a:t>
             </a:fld>
@@ -516,7 +522,7 @@
     </p:spTree>
     <p:extLst>
       <p:ext uri="{BB962C8B-B14F-4D97-AF65-F5344CB8AC3E}">
-        <p14:creationId xmlns:p14="http://schemas.microsoft.com/office/powerpoint/2010/main" val="2910927964"/>
+        <p14:creationId xmlns:p14="http://schemas.microsoft.com/office/powerpoint/2010/main" val="472710157"/>
       </p:ext>
     </p:extLst>
   </p:cSld>
@@ -545,7 +551,13 @@
       </p:grpSpPr>
       <p:sp>
         <p:nvSpPr>
-          <p:cNvPr id="2" name="Vertical Title 1"/>
+          <p:cNvPr id="2" name="Vertical Title 1">
+            <a:extLst>
+              <a:ext uri="{FF2B5EF4-FFF2-40B4-BE49-F238E27FC236}">
+                <a16:creationId xmlns:a16="http://schemas.microsoft.com/office/drawing/2014/main" id="{07CAE9D9-8EB2-13A2-FA0A-5A8436A3C591}"/>
+              </a:ext>
+            </a:extLst>
+          </p:cNvPr>
           <p:cNvSpPr>
             <a:spLocks noGrp="1"/>
           </p:cNvSpPr>
@@ -555,8 +567,8 @@
         </p:nvSpPr>
         <p:spPr>
           <a:xfrm>
-            <a:off x="6629400" y="274638"/>
-            <a:ext cx="2057400" cy="5851525"/>
+            <a:off x="654367" y="48683"/>
+            <a:ext cx="197168" cy="774912"/>
           </a:xfrm>
         </p:spPr>
         <p:txBody>
@@ -564,16 +576,21 @@
           <a:lstStyle/>
           <a:p>
             <a:r>
-              <a:rPr lang="en-US" smtClean="0"/>
+              <a:rPr lang="en-US"/>
               <a:t>Click to edit Master title style</a:t>
             </a:r>
-            <a:endParaRPr lang="en-US"/>
-          </a:p>
-        </p:txBody>
-      </p:sp>
-      <p:sp>
-        <p:nvSpPr>
-          <p:cNvPr id="3" name="Vertical Text Placeholder 2"/>
+          </a:p>
+        </p:txBody>
+      </p:sp>
+      <p:sp>
+        <p:nvSpPr>
+          <p:cNvPr id="3" name="Vertical Text Placeholder 2">
+            <a:extLst>
+              <a:ext uri="{FF2B5EF4-FFF2-40B4-BE49-F238E27FC236}">
+                <a16:creationId xmlns:a16="http://schemas.microsoft.com/office/drawing/2014/main" id="{3FCE0012-DD58-C531-8839-5825895F2050}"/>
+              </a:ext>
+            </a:extLst>
+          </p:cNvPr>
           <p:cNvSpPr>
             <a:spLocks noGrp="1"/>
           </p:cNvSpPr>
@@ -583,8 +600,8 @@
         </p:nvSpPr>
         <p:spPr>
           <a:xfrm>
-            <a:off x="457200" y="274638"/>
-            <a:ext cx="6019800" cy="5851525"/>
+            <a:off x="62866" y="48683"/>
+            <a:ext cx="580073" cy="774912"/>
           </a:xfrm>
         </p:spPr>
         <p:txBody>
@@ -593,59 +610,64 @@
           <a:p>
             <a:pPr lvl="0"/>
             <a:r>
+              <a:rPr lang="en-US"/>
+              <a:t>Click to edit Master text styles</a:t>
+            </a:r>
+          </a:p>
+          <a:p>
+            <a:pPr lvl="1"/>
+            <a:r>
+              <a:rPr lang="en-US"/>
+              <a:t>Second level</a:t>
+            </a:r>
+          </a:p>
+          <a:p>
+            <a:pPr lvl="2"/>
+            <a:r>
+              <a:rPr lang="en-US"/>
+              <a:t>Third level</a:t>
+            </a:r>
+          </a:p>
+          <a:p>
+            <a:pPr lvl="3"/>
+            <a:r>
+              <a:rPr lang="en-US"/>
+              <a:t>Fourth level</a:t>
+            </a:r>
+          </a:p>
+          <a:p>
+            <a:pPr lvl="4"/>
+            <a:r>
+              <a:rPr lang="en-US"/>
+              <a:t>Fifth level</a:t>
+            </a:r>
+          </a:p>
+        </p:txBody>
+      </p:sp>
+      <p:sp>
+        <p:nvSpPr>
+          <p:cNvPr id="4" name="Date Placeholder 3">
+            <a:extLst>
+              <a:ext uri="{FF2B5EF4-FFF2-40B4-BE49-F238E27FC236}">
+                <a16:creationId xmlns:a16="http://schemas.microsoft.com/office/drawing/2014/main" id="{D4E064FD-F918-97E5-6079-565B5F8636FC}"/>
+              </a:ext>
+            </a:extLst>
+          </p:cNvPr>
+          <p:cNvSpPr>
+            <a:spLocks noGrp="1"/>
+          </p:cNvSpPr>
+          <p:nvPr>
+            <p:ph type="dt" sz="half" idx="10"/>
+          </p:nvPr>
+        </p:nvSpPr>
+        <p:spPr/>
+        <p:txBody>
+          <a:bodyPr/>
+          <a:lstStyle/>
+          <a:p>
+            <a:fld id="{8B95E3DC-E37F-4B4D-991A-1190A7C7BBE5}" type="datetimeFigureOut">
               <a:rPr lang="en-US" smtClean="0"/>
-              <a:t>Click to edit Master text styles</a:t>
-            </a:r>
-          </a:p>
-          <a:p>
-            <a:pPr lvl="1"/>
-            <a:r>
-              <a:rPr lang="en-US" smtClean="0"/>
-              <a:t>Second level</a:t>
-            </a:r>
-          </a:p>
-          <a:p>
-            <a:pPr lvl="2"/>
-            <a:r>
-              <a:rPr lang="en-US" smtClean="0"/>
-              <a:t>Third level</a:t>
-            </a:r>
-          </a:p>
-          <a:p>
-            <a:pPr lvl="3"/>
-            <a:r>
-              <a:rPr lang="en-US" smtClean="0"/>
-              <a:t>Fourth level</a:t>
-            </a:r>
-          </a:p>
-          <a:p>
-            <a:pPr lvl="4"/>
-            <a:r>
-              <a:rPr lang="en-US" smtClean="0"/>
-              <a:t>Fifth level</a:t>
-            </a:r>
-            <a:endParaRPr lang="en-US"/>
-          </a:p>
-        </p:txBody>
-      </p:sp>
-      <p:sp>
-        <p:nvSpPr>
-          <p:cNvPr id="4" name="Date Placeholder 3"/>
-          <p:cNvSpPr>
-            <a:spLocks noGrp="1"/>
-          </p:cNvSpPr>
-          <p:nvPr>
-            <p:ph type="dt" sz="half" idx="10"/>
-          </p:nvPr>
-        </p:nvSpPr>
-        <p:spPr/>
-        <p:txBody>
-          <a:bodyPr/>
-          <a:lstStyle/>
-          <a:p>
-            <a:fld id="{5BCAD085-E8A6-8845-BD4E-CB4CCA059FC4}" type="datetimeFigureOut">
-              <a:rPr lang="en-US" smtClean="0"/>
-              <a:t>1/27/13</a:t>
+              <a:t>8/2/2026</a:t>
             </a:fld>
             <a:endParaRPr lang="en-US"/>
           </a:p>
@@ -653,7 +675,13 @@
       </p:sp>
       <p:sp>
         <p:nvSpPr>
-          <p:cNvPr id="5" name="Footer Placeholder 4"/>
+          <p:cNvPr id="5" name="Footer Placeholder 4">
+            <a:extLst>
+              <a:ext uri="{FF2B5EF4-FFF2-40B4-BE49-F238E27FC236}">
+                <a16:creationId xmlns:a16="http://schemas.microsoft.com/office/drawing/2014/main" id="{BFD39450-E87D-E39D-CD70-8112F6ABCB2C}"/>
+              </a:ext>
+            </a:extLst>
+          </p:cNvPr>
           <p:cNvSpPr>
             <a:spLocks noGrp="1"/>
           </p:cNvSpPr>
@@ -672,7 +700,13 @@
       </p:sp>
       <p:sp>
         <p:nvSpPr>
-          <p:cNvPr id="6" name="Slide Number Placeholder 5"/>
+          <p:cNvPr id="6" name="Slide Number Placeholder 5">
+            <a:extLst>
+              <a:ext uri="{FF2B5EF4-FFF2-40B4-BE49-F238E27FC236}">
+                <a16:creationId xmlns:a16="http://schemas.microsoft.com/office/drawing/2014/main" id="{7841E740-4BDC-B12E-8322-37EF38A08284}"/>
+              </a:ext>
+            </a:extLst>
+          </p:cNvPr>
           <p:cNvSpPr>
             <a:spLocks noGrp="1"/>
           </p:cNvSpPr>
@@ -685,7 +719,7 @@
           <a:bodyPr/>
           <a:lstStyle/>
           <a:p>
-            <a:fld id="{C1FF6DA9-008F-8B48-92A6-B652298478BF}" type="slidenum">
+            <a:fld id="{41FEF42D-5A65-4029-9F78-408BF3F9B145}" type="slidenum">
               <a:rPr lang="en-US" smtClean="0"/>
               <a:t>‹#›</a:t>
             </a:fld>
@@ -696,7 +730,205 @@
     </p:spTree>
     <p:extLst>
       <p:ext uri="{BB962C8B-B14F-4D97-AF65-F5344CB8AC3E}">
-        <p14:creationId xmlns:p14="http://schemas.microsoft.com/office/powerpoint/2010/main" val="3612223792"/>
+        <p14:creationId xmlns:p14="http://schemas.microsoft.com/office/powerpoint/2010/main" val="3774530308"/>
+      </p:ext>
+    </p:extLst>
+  </p:cSld>
+  <p:clrMapOvr>
+    <a:masterClrMapping/>
+  </p:clrMapOvr>
+</p:sldLayout>
+</file>
+
+<file path=ppt/slideLayouts/slideLayout12.xml><?xml version="1.0" encoding="utf-8"?>
+<p:sldLayout xmlns:a="http://schemas.openxmlformats.org/drawingml/2006/main" xmlns:r="http://schemas.openxmlformats.org/officeDocument/2006/relationships" xmlns:p="http://schemas.openxmlformats.org/presentationml/2006/main" type="tx" preserve="1">
+  <p:cSld name="Title and Text">
+    <p:spTree>
+      <p:nvGrpSpPr>
+        <p:cNvPr id="1" name=""/>
+        <p:cNvGrpSpPr/>
+        <p:nvPr/>
+      </p:nvGrpSpPr>
+      <p:grpSpPr>
+        <a:xfrm>
+          <a:off x="0" y="0"/>
+          <a:ext cx="0" cy="0"/>
+          <a:chOff x="0" y="0"/>
+          <a:chExt cx="0" cy="0"/>
+        </a:xfrm>
+      </p:grpSpPr>
+      <p:sp>
+        <p:nvSpPr>
+          <p:cNvPr id="2" name="Title 1">
+            <a:extLst>
+              <a:ext uri="{FF2B5EF4-FFF2-40B4-BE49-F238E27FC236}">
+                <a16:creationId xmlns:a16="http://schemas.microsoft.com/office/drawing/2014/main" id="{9D5D78DF-4471-5DEB-5AF5-823752F7D03E}"/>
+              </a:ext>
+            </a:extLst>
+          </p:cNvPr>
+          <p:cNvSpPr>
+            <a:spLocks noGrp="1"/>
+          </p:cNvSpPr>
+          <p:nvPr>
+            <p:ph type="title"/>
+          </p:nvPr>
+        </p:nvSpPr>
+        <p:spPr/>
+        <p:txBody>
+          <a:bodyPr/>
+          <a:lstStyle/>
+          <a:p>
+            <a:r>
+              <a:rPr lang="en-US"/>
+              <a:t>Click to edit Master title style</a:t>
+            </a:r>
+          </a:p>
+        </p:txBody>
+      </p:sp>
+      <p:sp>
+        <p:nvSpPr>
+          <p:cNvPr id="3" name="Text Placeholder 2">
+            <a:extLst>
+              <a:ext uri="{FF2B5EF4-FFF2-40B4-BE49-F238E27FC236}">
+                <a16:creationId xmlns:a16="http://schemas.microsoft.com/office/drawing/2014/main" id="{577B8DFC-BD03-B172-0A30-99DD829AEC27}"/>
+              </a:ext>
+            </a:extLst>
+          </p:cNvPr>
+          <p:cNvSpPr>
+            <a:spLocks noGrp="1"/>
+          </p:cNvSpPr>
+          <p:nvPr>
+            <p:ph type="body" idx="1"/>
+          </p:nvPr>
+        </p:nvSpPr>
+        <p:spPr/>
+        <p:txBody>
+          <a:bodyPr/>
+          <a:lstStyle/>
+          <a:p>
+            <a:pPr lvl="0"/>
+            <a:r>
+              <a:rPr lang="en-US"/>
+              <a:t>Click to edit Master text styles</a:t>
+            </a:r>
+          </a:p>
+          <a:p>
+            <a:pPr lvl="1"/>
+            <a:r>
+              <a:rPr lang="en-US"/>
+              <a:t>Second level</a:t>
+            </a:r>
+          </a:p>
+          <a:p>
+            <a:pPr lvl="2"/>
+            <a:r>
+              <a:rPr lang="en-US"/>
+              <a:t>Third level</a:t>
+            </a:r>
+          </a:p>
+          <a:p>
+            <a:pPr lvl="3"/>
+            <a:r>
+              <a:rPr lang="en-US"/>
+              <a:t>Fourth level</a:t>
+            </a:r>
+          </a:p>
+          <a:p>
+            <a:pPr lvl="4"/>
+            <a:r>
+              <a:rPr lang="en-US"/>
+              <a:t>Fifth level</a:t>
+            </a:r>
+          </a:p>
+        </p:txBody>
+      </p:sp>
+      <p:sp>
+        <p:nvSpPr>
+          <p:cNvPr id="4" name="Date Placeholder 3">
+            <a:extLst>
+              <a:ext uri="{FF2B5EF4-FFF2-40B4-BE49-F238E27FC236}">
+                <a16:creationId xmlns:a16="http://schemas.microsoft.com/office/drawing/2014/main" id="{B6201073-FB33-287F-3056-31D484D50EF2}"/>
+              </a:ext>
+            </a:extLst>
+          </p:cNvPr>
+          <p:cNvSpPr>
+            <a:spLocks noGrp="1"/>
+          </p:cNvSpPr>
+          <p:nvPr>
+            <p:ph type="dt" sz="half" idx="10"/>
+          </p:nvPr>
+        </p:nvSpPr>
+        <p:spPr/>
+        <p:txBody>
+          <a:bodyPr/>
+          <a:lstStyle/>
+          <a:p>
+            <a:fld id="{8B95E3DC-E37F-4B4D-991A-1190A7C7BBE5}" type="datetimeFigureOut">
+              <a:rPr lang="en-US" smtClean="0"/>
+              <a:t>8/2/2026</a:t>
+            </a:fld>
+            <a:endParaRPr lang="en-US"/>
+          </a:p>
+        </p:txBody>
+      </p:sp>
+      <p:sp>
+        <p:nvSpPr>
+          <p:cNvPr id="5" name="Footer Placeholder 4">
+            <a:extLst>
+              <a:ext uri="{FF2B5EF4-FFF2-40B4-BE49-F238E27FC236}">
+                <a16:creationId xmlns:a16="http://schemas.microsoft.com/office/drawing/2014/main" id="{9A72A2A7-EB40-5A95-8DAE-AF4E90CCECE2}"/>
+              </a:ext>
+            </a:extLst>
+          </p:cNvPr>
+          <p:cNvSpPr>
+            <a:spLocks noGrp="1"/>
+          </p:cNvSpPr>
+          <p:nvPr>
+            <p:ph type="ftr" sz="quarter" idx="11"/>
+          </p:nvPr>
+        </p:nvSpPr>
+        <p:spPr/>
+        <p:txBody>
+          <a:bodyPr/>
+          <a:lstStyle/>
+          <a:p>
+            <a:endParaRPr lang="en-US"/>
+          </a:p>
+        </p:txBody>
+      </p:sp>
+      <p:sp>
+        <p:nvSpPr>
+          <p:cNvPr id="6" name="Slide Number Placeholder 5">
+            <a:extLst>
+              <a:ext uri="{FF2B5EF4-FFF2-40B4-BE49-F238E27FC236}">
+                <a16:creationId xmlns:a16="http://schemas.microsoft.com/office/drawing/2014/main" id="{393D1EFB-39FF-1DC9-6C9E-E41FC92FE97F}"/>
+              </a:ext>
+            </a:extLst>
+          </p:cNvPr>
+          <p:cNvSpPr>
+            <a:spLocks noGrp="1"/>
+          </p:cNvSpPr>
+          <p:nvPr>
+            <p:ph type="sldNum" sz="quarter" idx="12"/>
+          </p:nvPr>
+        </p:nvSpPr>
+        <p:spPr/>
+        <p:txBody>
+          <a:bodyPr/>
+          <a:lstStyle/>
+          <a:p>
+            <a:fld id="{41FEF42D-5A65-4029-9F78-408BF3F9B145}" type="slidenum">
+              <a:rPr lang="en-US" smtClean="0"/>
+              <a:t>‹#›</a:t>
+            </a:fld>
+            <a:endParaRPr lang="en-US"/>
+          </a:p>
+        </p:txBody>
+      </p:sp>
+    </p:spTree>
+    <p:extLst>
+      <p:ext uri="{BB962C8B-B14F-4D97-AF65-F5344CB8AC3E}">
+        <p14:creationId xmlns:p14="http://schemas.microsoft.com/office/powerpoint/2010/main" val="3786541129"/>
       </p:ext>
     </p:extLst>
   </p:cSld>
@@ -725,7 +957,13 @@
       </p:grpSpPr>
       <p:sp>
         <p:nvSpPr>
-          <p:cNvPr id="2" name="Title 1"/>
+          <p:cNvPr id="2" name="Title 1">
+            <a:extLst>
+              <a:ext uri="{FF2B5EF4-FFF2-40B4-BE49-F238E27FC236}">
+                <a16:creationId xmlns:a16="http://schemas.microsoft.com/office/drawing/2014/main" id="{9BA89D92-7559-0861-9817-E974E0A72D6B}"/>
+              </a:ext>
+            </a:extLst>
+          </p:cNvPr>
           <p:cNvSpPr>
             <a:spLocks noGrp="1"/>
           </p:cNvSpPr>
@@ -739,83 +977,93 @@
           <a:lstStyle/>
           <a:p>
             <a:r>
+              <a:rPr lang="en-US"/>
+              <a:t>Click to edit Master title style</a:t>
+            </a:r>
+          </a:p>
+        </p:txBody>
+      </p:sp>
+      <p:sp>
+        <p:nvSpPr>
+          <p:cNvPr id="3" name="Content Placeholder 2">
+            <a:extLst>
+              <a:ext uri="{FF2B5EF4-FFF2-40B4-BE49-F238E27FC236}">
+                <a16:creationId xmlns:a16="http://schemas.microsoft.com/office/drawing/2014/main" id="{C08C567C-44D4-882D-8281-E8A6DFEF9B37}"/>
+              </a:ext>
+            </a:extLst>
+          </p:cNvPr>
+          <p:cNvSpPr>
+            <a:spLocks noGrp="1"/>
+          </p:cNvSpPr>
+          <p:nvPr>
+            <p:ph idx="1"/>
+          </p:nvPr>
+        </p:nvSpPr>
+        <p:spPr/>
+        <p:txBody>
+          <a:bodyPr/>
+          <a:lstStyle/>
+          <a:p>
+            <a:pPr lvl="0"/>
+            <a:r>
+              <a:rPr lang="en-US"/>
+              <a:t>Click to edit Master text styles</a:t>
+            </a:r>
+          </a:p>
+          <a:p>
+            <a:pPr lvl="1"/>
+            <a:r>
+              <a:rPr lang="en-US"/>
+              <a:t>Second level</a:t>
+            </a:r>
+          </a:p>
+          <a:p>
+            <a:pPr lvl="2"/>
+            <a:r>
+              <a:rPr lang="en-US"/>
+              <a:t>Third level</a:t>
+            </a:r>
+          </a:p>
+          <a:p>
+            <a:pPr lvl="3"/>
+            <a:r>
+              <a:rPr lang="en-US"/>
+              <a:t>Fourth level</a:t>
+            </a:r>
+          </a:p>
+          <a:p>
+            <a:pPr lvl="4"/>
+            <a:r>
+              <a:rPr lang="en-US"/>
+              <a:t>Fifth level</a:t>
+            </a:r>
+          </a:p>
+        </p:txBody>
+      </p:sp>
+      <p:sp>
+        <p:nvSpPr>
+          <p:cNvPr id="4" name="Date Placeholder 3">
+            <a:extLst>
+              <a:ext uri="{FF2B5EF4-FFF2-40B4-BE49-F238E27FC236}">
+                <a16:creationId xmlns:a16="http://schemas.microsoft.com/office/drawing/2014/main" id="{C0948810-6305-FFC0-197B-D4C0FE1054EA}"/>
+              </a:ext>
+            </a:extLst>
+          </p:cNvPr>
+          <p:cNvSpPr>
+            <a:spLocks noGrp="1"/>
+          </p:cNvSpPr>
+          <p:nvPr>
+            <p:ph type="dt" sz="half" idx="10"/>
+          </p:nvPr>
+        </p:nvSpPr>
+        <p:spPr/>
+        <p:txBody>
+          <a:bodyPr/>
+          <a:lstStyle/>
+          <a:p>
+            <a:fld id="{8B95E3DC-E37F-4B4D-991A-1190A7C7BBE5}" type="datetimeFigureOut">
               <a:rPr lang="en-US" smtClean="0"/>
-              <a:t>Click to edit Master title style</a:t>
-            </a:r>
-            <a:endParaRPr lang="en-US"/>
-          </a:p>
-        </p:txBody>
-      </p:sp>
-      <p:sp>
-        <p:nvSpPr>
-          <p:cNvPr id="3" name="Content Placeholder 2"/>
-          <p:cNvSpPr>
-            <a:spLocks noGrp="1"/>
-          </p:cNvSpPr>
-          <p:nvPr>
-            <p:ph idx="1"/>
-          </p:nvPr>
-        </p:nvSpPr>
-        <p:spPr/>
-        <p:txBody>
-          <a:bodyPr/>
-          <a:lstStyle/>
-          <a:p>
-            <a:pPr lvl="0"/>
-            <a:r>
-              <a:rPr lang="en-US" smtClean="0"/>
-              <a:t>Click to edit Master text styles</a:t>
-            </a:r>
-          </a:p>
-          <a:p>
-            <a:pPr lvl="1"/>
-            <a:r>
-              <a:rPr lang="en-US" smtClean="0"/>
-              <a:t>Second level</a:t>
-            </a:r>
-          </a:p>
-          <a:p>
-            <a:pPr lvl="2"/>
-            <a:r>
-              <a:rPr lang="en-US" smtClean="0"/>
-              <a:t>Third level</a:t>
-            </a:r>
-          </a:p>
-          <a:p>
-            <a:pPr lvl="3"/>
-            <a:r>
-              <a:rPr lang="en-US" smtClean="0"/>
-              <a:t>Fourth level</a:t>
-            </a:r>
-          </a:p>
-          <a:p>
-            <a:pPr lvl="4"/>
-            <a:r>
-              <a:rPr lang="en-US" smtClean="0"/>
-              <a:t>Fifth level</a:t>
-            </a:r>
-            <a:endParaRPr lang="en-US"/>
-          </a:p>
-        </p:txBody>
-      </p:sp>
-      <p:sp>
-        <p:nvSpPr>
-          <p:cNvPr id="4" name="Date Placeholder 3"/>
-          <p:cNvSpPr>
-            <a:spLocks noGrp="1"/>
-          </p:cNvSpPr>
-          <p:nvPr>
-            <p:ph type="dt" sz="half" idx="10"/>
-          </p:nvPr>
-        </p:nvSpPr>
-        <p:spPr/>
-        <p:txBody>
-          <a:bodyPr/>
-          <a:lstStyle/>
-          <a:p>
-            <a:fld id="{5BCAD085-E8A6-8845-BD4E-CB4CCA059FC4}" type="datetimeFigureOut">
-              <a:rPr lang="en-US" smtClean="0"/>
-              <a:t>1/27/13</a:t>
+              <a:t>8/2/2026</a:t>
             </a:fld>
             <a:endParaRPr lang="en-US"/>
           </a:p>
@@ -823,7 +1071,13 @@
       </p:sp>
       <p:sp>
         <p:nvSpPr>
-          <p:cNvPr id="5" name="Footer Placeholder 4"/>
+          <p:cNvPr id="5" name="Footer Placeholder 4">
+            <a:extLst>
+              <a:ext uri="{FF2B5EF4-FFF2-40B4-BE49-F238E27FC236}">
+                <a16:creationId xmlns:a16="http://schemas.microsoft.com/office/drawing/2014/main" id="{F06AE7C6-6A35-62C1-29E5-98AC561D40AD}"/>
+              </a:ext>
+            </a:extLst>
+          </p:cNvPr>
           <p:cNvSpPr>
             <a:spLocks noGrp="1"/>
           </p:cNvSpPr>
@@ -842,7 +1096,13 @@
       </p:sp>
       <p:sp>
         <p:nvSpPr>
-          <p:cNvPr id="6" name="Slide Number Placeholder 5"/>
+          <p:cNvPr id="6" name="Slide Number Placeholder 5">
+            <a:extLst>
+              <a:ext uri="{FF2B5EF4-FFF2-40B4-BE49-F238E27FC236}">
+                <a16:creationId xmlns:a16="http://schemas.microsoft.com/office/drawing/2014/main" id="{7CF3E1F3-33AB-E18A-E8EA-473D59934FD1}"/>
+              </a:ext>
+            </a:extLst>
+          </p:cNvPr>
           <p:cNvSpPr>
             <a:spLocks noGrp="1"/>
           </p:cNvSpPr>
@@ -855,7 +1115,7 @@
           <a:bodyPr/>
           <a:lstStyle/>
           <a:p>
-            <a:fld id="{C1FF6DA9-008F-8B48-92A6-B652298478BF}" type="slidenum">
+            <a:fld id="{41FEF42D-5A65-4029-9F78-408BF3F9B145}" type="slidenum">
               <a:rPr lang="en-US" smtClean="0"/>
               <a:t>‹#›</a:t>
             </a:fld>
@@ -866,7 +1126,7 @@
     </p:spTree>
     <p:extLst>
       <p:ext uri="{BB962C8B-B14F-4D97-AF65-F5344CB8AC3E}">
-        <p14:creationId xmlns:p14="http://schemas.microsoft.com/office/powerpoint/2010/main" val="2614314258"/>
+        <p14:creationId xmlns:p14="http://schemas.microsoft.com/office/powerpoint/2010/main" val="2078044711"/>
       </p:ext>
     </p:extLst>
   </p:cSld>
@@ -895,7 +1155,13 @@
       </p:grpSpPr>
       <p:sp>
         <p:nvSpPr>
-          <p:cNvPr id="2" name="Title 1"/>
+          <p:cNvPr id="2" name="Title 1">
+            <a:extLst>
+              <a:ext uri="{FF2B5EF4-FFF2-40B4-BE49-F238E27FC236}">
+                <a16:creationId xmlns:a16="http://schemas.microsoft.com/office/drawing/2014/main" id="{1AA586BB-24C7-57BB-5A75-126172EF64EB}"/>
+              </a:ext>
+            </a:extLst>
+          </p:cNvPr>
           <p:cNvSpPr>
             <a:spLocks noGrp="1"/>
           </p:cNvSpPr>
@@ -905,29 +1171,34 @@
         </p:nvSpPr>
         <p:spPr>
           <a:xfrm>
-            <a:off x="722313" y="4406900"/>
-            <a:ext cx="7772400" cy="1362075"/>
+            <a:off x="62389" y="227965"/>
+            <a:ext cx="788670" cy="380365"/>
           </a:xfrm>
         </p:spPr>
         <p:txBody>
-          <a:bodyPr anchor="t"/>
+          <a:bodyPr anchor="b"/>
           <a:lstStyle>
-            <a:lvl1pPr algn="l">
-              <a:defRPr sz="4000" b="1" cap="all"/>
+            <a:lvl1pPr>
+              <a:defRPr sz="100"/>
             </a:lvl1pPr>
           </a:lstStyle>
           <a:p>
             <a:r>
-              <a:rPr lang="en-US" smtClean="0"/>
+              <a:rPr lang="en-US"/>
               <a:t>Click to edit Master title style</a:t>
             </a:r>
-            <a:endParaRPr lang="en-US"/>
-          </a:p>
-        </p:txBody>
-      </p:sp>
-      <p:sp>
-        <p:nvSpPr>
-          <p:cNvPr id="3" name="Text Placeholder 2"/>
+          </a:p>
+        </p:txBody>
+      </p:sp>
+      <p:sp>
+        <p:nvSpPr>
+          <p:cNvPr id="3" name="Text Placeholder 2">
+            <a:extLst>
+              <a:ext uri="{FF2B5EF4-FFF2-40B4-BE49-F238E27FC236}">
+                <a16:creationId xmlns:a16="http://schemas.microsoft.com/office/drawing/2014/main" id="{967D993D-DCF2-E9A8-05C5-2060DC5A190F}"/>
+              </a:ext>
+            </a:extLst>
+          </p:cNvPr>
           <p:cNvSpPr>
             <a:spLocks noGrp="1"/>
           </p:cNvSpPr>
@@ -937,99 +1208,99 @@
         </p:nvSpPr>
         <p:spPr>
           <a:xfrm>
-            <a:off x="722313" y="2906713"/>
-            <a:ext cx="7772400" cy="1500187"/>
+            <a:off x="62389" y="611929"/>
+            <a:ext cx="788670" cy="200025"/>
           </a:xfrm>
         </p:spPr>
         <p:txBody>
-          <a:bodyPr anchor="b"/>
+          <a:bodyPr/>
           <a:lstStyle>
             <a:lvl1pPr marL="0" indent="0">
               <a:buNone/>
-              <a:defRPr sz="2000">
+              <a:defRPr sz="100">
                 <a:solidFill>
                   <a:schemeClr val="tx1">
-                    <a:tint val="75000"/>
+                    <a:tint val="82000"/>
                   </a:schemeClr>
                 </a:solidFill>
               </a:defRPr>
             </a:lvl1pPr>
-            <a:lvl2pPr marL="457200" indent="0">
-              <a:buNone/>
-              <a:defRPr sz="1800">
+            <a:lvl2pPr marL="4571" indent="0">
+              <a:buNone/>
+              <a:defRPr sz="100">
                 <a:solidFill>
                   <a:schemeClr val="tx1">
-                    <a:tint val="75000"/>
+                    <a:tint val="82000"/>
                   </a:schemeClr>
                 </a:solidFill>
               </a:defRPr>
             </a:lvl2pPr>
-            <a:lvl3pPr marL="914400" indent="0">
-              <a:buNone/>
-              <a:defRPr sz="1600">
+            <a:lvl3pPr marL="9142" indent="0">
+              <a:buNone/>
+              <a:defRPr sz="100">
                 <a:solidFill>
                   <a:schemeClr val="tx1">
-                    <a:tint val="75000"/>
+                    <a:tint val="82000"/>
                   </a:schemeClr>
                 </a:solidFill>
               </a:defRPr>
             </a:lvl3pPr>
-            <a:lvl4pPr marL="1371600" indent="0">
-              <a:buNone/>
-              <a:defRPr sz="1400">
+            <a:lvl4pPr marL="13713" indent="0">
+              <a:buNone/>
+              <a:defRPr sz="100">
                 <a:solidFill>
                   <a:schemeClr val="tx1">
-                    <a:tint val="75000"/>
+                    <a:tint val="82000"/>
                   </a:schemeClr>
                 </a:solidFill>
               </a:defRPr>
             </a:lvl4pPr>
-            <a:lvl5pPr marL="1828800" indent="0">
-              <a:buNone/>
-              <a:defRPr sz="1400">
+            <a:lvl5pPr marL="18283" indent="0">
+              <a:buNone/>
+              <a:defRPr sz="100">
                 <a:solidFill>
                   <a:schemeClr val="tx1">
-                    <a:tint val="75000"/>
+                    <a:tint val="82000"/>
                   </a:schemeClr>
                 </a:solidFill>
               </a:defRPr>
             </a:lvl5pPr>
-            <a:lvl6pPr marL="2286000" indent="0">
-              <a:buNone/>
-              <a:defRPr sz="1400">
+            <a:lvl6pPr marL="22854" indent="0">
+              <a:buNone/>
+              <a:defRPr sz="100">
                 <a:solidFill>
                   <a:schemeClr val="tx1">
-                    <a:tint val="75000"/>
+                    <a:tint val="82000"/>
                   </a:schemeClr>
                 </a:solidFill>
               </a:defRPr>
             </a:lvl6pPr>
-            <a:lvl7pPr marL="2743200" indent="0">
-              <a:buNone/>
-              <a:defRPr sz="1400">
+            <a:lvl7pPr marL="27425" indent="0">
+              <a:buNone/>
+              <a:defRPr sz="100">
                 <a:solidFill>
                   <a:schemeClr val="tx1">
-                    <a:tint val="75000"/>
+                    <a:tint val="82000"/>
                   </a:schemeClr>
                 </a:solidFill>
               </a:defRPr>
             </a:lvl7pPr>
-            <a:lvl8pPr marL="3200400" indent="0">
-              <a:buNone/>
-              <a:defRPr sz="1400">
+            <a:lvl8pPr marL="31996" indent="0">
+              <a:buNone/>
+              <a:defRPr sz="100">
                 <a:solidFill>
                   <a:schemeClr val="tx1">
-                    <a:tint val="75000"/>
+                    <a:tint val="82000"/>
                   </a:schemeClr>
                 </a:solidFill>
               </a:defRPr>
             </a:lvl8pPr>
-            <a:lvl9pPr marL="3657600" indent="0">
-              <a:buNone/>
-              <a:defRPr sz="1400">
+            <a:lvl9pPr marL="36567" indent="0">
+              <a:buNone/>
+              <a:defRPr sz="100">
                 <a:solidFill>
                   <a:schemeClr val="tx1">
-                    <a:tint val="75000"/>
+                    <a:tint val="82000"/>
                   </a:schemeClr>
                 </a:solidFill>
               </a:defRPr>
@@ -1038,30 +1309,36 @@
           <a:p>
             <a:pPr lvl="0"/>
             <a:r>
+              <a:rPr lang="en-US"/>
+              <a:t>Click to edit Master text styles</a:t>
+            </a:r>
+          </a:p>
+        </p:txBody>
+      </p:sp>
+      <p:sp>
+        <p:nvSpPr>
+          <p:cNvPr id="4" name="Date Placeholder 3">
+            <a:extLst>
+              <a:ext uri="{FF2B5EF4-FFF2-40B4-BE49-F238E27FC236}">
+                <a16:creationId xmlns:a16="http://schemas.microsoft.com/office/drawing/2014/main" id="{0F10741D-BBAD-D13F-2AA7-382F12FF9662}"/>
+              </a:ext>
+            </a:extLst>
+          </p:cNvPr>
+          <p:cNvSpPr>
+            <a:spLocks noGrp="1"/>
+          </p:cNvSpPr>
+          <p:nvPr>
+            <p:ph type="dt" sz="half" idx="10"/>
+          </p:nvPr>
+        </p:nvSpPr>
+        <p:spPr/>
+        <p:txBody>
+          <a:bodyPr/>
+          <a:lstStyle/>
+          <a:p>
+            <a:fld id="{8B95E3DC-E37F-4B4D-991A-1190A7C7BBE5}" type="datetimeFigureOut">
               <a:rPr lang="en-US" smtClean="0"/>
-              <a:t>Click to edit Master text styles</a:t>
-            </a:r>
-          </a:p>
-        </p:txBody>
-      </p:sp>
-      <p:sp>
-        <p:nvSpPr>
-          <p:cNvPr id="4" name="Date Placeholder 3"/>
-          <p:cNvSpPr>
-            <a:spLocks noGrp="1"/>
-          </p:cNvSpPr>
-          <p:nvPr>
-            <p:ph type="dt" sz="half" idx="10"/>
-          </p:nvPr>
-        </p:nvSpPr>
-        <p:spPr/>
-        <p:txBody>
-          <a:bodyPr/>
-          <a:lstStyle/>
-          <a:p>
-            <a:fld id="{5BCAD085-E8A6-8845-BD4E-CB4CCA059FC4}" type="datetimeFigureOut">
-              <a:rPr lang="en-US" smtClean="0"/>
-              <a:t>1/27/13</a:t>
+              <a:t>8/2/2026</a:t>
             </a:fld>
             <a:endParaRPr lang="en-US"/>
           </a:p>
@@ -1069,7 +1346,13 @@
       </p:sp>
       <p:sp>
         <p:nvSpPr>
-          <p:cNvPr id="5" name="Footer Placeholder 4"/>
+          <p:cNvPr id="5" name="Footer Placeholder 4">
+            <a:extLst>
+              <a:ext uri="{FF2B5EF4-FFF2-40B4-BE49-F238E27FC236}">
+                <a16:creationId xmlns:a16="http://schemas.microsoft.com/office/drawing/2014/main" id="{D7AF5F23-D8F2-D4C8-2440-817DB961DB48}"/>
+              </a:ext>
+            </a:extLst>
+          </p:cNvPr>
           <p:cNvSpPr>
             <a:spLocks noGrp="1"/>
           </p:cNvSpPr>
@@ -1088,7 +1371,13 @@
       </p:sp>
       <p:sp>
         <p:nvSpPr>
-          <p:cNvPr id="6" name="Slide Number Placeholder 5"/>
+          <p:cNvPr id="6" name="Slide Number Placeholder 5">
+            <a:extLst>
+              <a:ext uri="{FF2B5EF4-FFF2-40B4-BE49-F238E27FC236}">
+                <a16:creationId xmlns:a16="http://schemas.microsoft.com/office/drawing/2014/main" id="{037897DC-7893-82DC-F5B5-0DE823DEDD78}"/>
+              </a:ext>
+            </a:extLst>
+          </p:cNvPr>
           <p:cNvSpPr>
             <a:spLocks noGrp="1"/>
           </p:cNvSpPr>
@@ -1101,7 +1390,7 @@
           <a:bodyPr/>
           <a:lstStyle/>
           <a:p>
-            <a:fld id="{C1FF6DA9-008F-8B48-92A6-B652298478BF}" type="slidenum">
+            <a:fld id="{41FEF42D-5A65-4029-9F78-408BF3F9B145}" type="slidenum">
               <a:rPr lang="en-US" smtClean="0"/>
               <a:t>‹#›</a:t>
             </a:fld>
@@ -1112,7 +1401,7 @@
     </p:spTree>
     <p:extLst>
       <p:ext uri="{BB962C8B-B14F-4D97-AF65-F5344CB8AC3E}">
-        <p14:creationId xmlns:p14="http://schemas.microsoft.com/office/powerpoint/2010/main" val="960648375"/>
+        <p14:creationId xmlns:p14="http://schemas.microsoft.com/office/powerpoint/2010/main" val="252248141"/>
       </p:ext>
     </p:extLst>
   </p:cSld>
@@ -1141,7 +1430,13 @@
       </p:grpSpPr>
       <p:sp>
         <p:nvSpPr>
-          <p:cNvPr id="2" name="Title 1"/>
+          <p:cNvPr id="2" name="Title 1">
+            <a:extLst>
+              <a:ext uri="{FF2B5EF4-FFF2-40B4-BE49-F238E27FC236}">
+                <a16:creationId xmlns:a16="http://schemas.microsoft.com/office/drawing/2014/main" id="{D4280B68-5F98-2107-464E-5BBB32652CF3}"/>
+              </a:ext>
+            </a:extLst>
+          </p:cNvPr>
           <p:cNvSpPr>
             <a:spLocks noGrp="1"/>
           </p:cNvSpPr>
@@ -1155,16 +1450,21 @@
           <a:lstStyle/>
           <a:p>
             <a:r>
-              <a:rPr lang="en-US" smtClean="0"/>
+              <a:rPr lang="en-US"/>
               <a:t>Click to edit Master title style</a:t>
             </a:r>
-            <a:endParaRPr lang="en-US"/>
-          </a:p>
-        </p:txBody>
-      </p:sp>
-      <p:sp>
-        <p:nvSpPr>
-          <p:cNvPr id="3" name="Content Placeholder 2"/>
+          </a:p>
+        </p:txBody>
+      </p:sp>
+      <p:sp>
+        <p:nvSpPr>
+          <p:cNvPr id="3" name="Content Placeholder 2">
+            <a:extLst>
+              <a:ext uri="{FF2B5EF4-FFF2-40B4-BE49-F238E27FC236}">
+                <a16:creationId xmlns:a16="http://schemas.microsoft.com/office/drawing/2014/main" id="{74CB8CB7-6326-CE09-C5C2-0518C06ADF0D}"/>
+              </a:ext>
+            </a:extLst>
+          </p:cNvPr>
           <p:cNvSpPr>
             <a:spLocks noGrp="1"/>
           </p:cNvSpPr>
@@ -1174,82 +1474,59 @@
         </p:nvSpPr>
         <p:spPr>
           <a:xfrm>
-            <a:off x="457200" y="1600200"/>
-            <a:ext cx="4038600" cy="4525963"/>
+            <a:off x="62865" y="243417"/>
+            <a:ext cx="388620" cy="580178"/>
           </a:xfrm>
         </p:spPr>
         <p:txBody>
           <a:bodyPr/>
-          <a:lstStyle>
-            <a:lvl1pPr>
-              <a:defRPr sz="2800"/>
-            </a:lvl1pPr>
-            <a:lvl2pPr>
-              <a:defRPr sz="2400"/>
-            </a:lvl2pPr>
-            <a:lvl3pPr>
-              <a:defRPr sz="2000"/>
-            </a:lvl3pPr>
-            <a:lvl4pPr>
-              <a:defRPr sz="1800"/>
-            </a:lvl4pPr>
-            <a:lvl5pPr>
-              <a:defRPr sz="1800"/>
-            </a:lvl5pPr>
-            <a:lvl6pPr>
-              <a:defRPr sz="1800"/>
-            </a:lvl6pPr>
-            <a:lvl7pPr>
-              <a:defRPr sz="1800"/>
-            </a:lvl7pPr>
-            <a:lvl8pPr>
-              <a:defRPr sz="1800"/>
-            </a:lvl8pPr>
-            <a:lvl9pPr>
-              <a:defRPr sz="1800"/>
-            </a:lvl9pPr>
-          </a:lstStyle>
+          <a:lstStyle/>
           <a:p>
             <a:pPr lvl="0"/>
             <a:r>
-              <a:rPr lang="en-US" smtClean="0"/>
+              <a:rPr lang="en-US"/>
               <a:t>Click to edit Master text styles</a:t>
             </a:r>
           </a:p>
           <a:p>
             <a:pPr lvl="1"/>
             <a:r>
-              <a:rPr lang="en-US" smtClean="0"/>
+              <a:rPr lang="en-US"/>
               <a:t>Second level</a:t>
             </a:r>
           </a:p>
           <a:p>
             <a:pPr lvl="2"/>
             <a:r>
-              <a:rPr lang="en-US" smtClean="0"/>
+              <a:rPr lang="en-US"/>
               <a:t>Third level</a:t>
             </a:r>
           </a:p>
           <a:p>
             <a:pPr lvl="3"/>
             <a:r>
-              <a:rPr lang="en-US" smtClean="0"/>
+              <a:rPr lang="en-US"/>
               <a:t>Fourth level</a:t>
             </a:r>
           </a:p>
           <a:p>
             <a:pPr lvl="4"/>
             <a:r>
-              <a:rPr lang="en-US" smtClean="0"/>
+              <a:rPr lang="en-US"/>
               <a:t>Fifth level</a:t>
             </a:r>
-            <a:endParaRPr lang="en-US"/>
-          </a:p>
-        </p:txBody>
-      </p:sp>
-      <p:sp>
-        <p:nvSpPr>
-          <p:cNvPr id="4" name="Content Placeholder 3"/>
+          </a:p>
+        </p:txBody>
+      </p:sp>
+      <p:sp>
+        <p:nvSpPr>
+          <p:cNvPr id="4" name="Content Placeholder 3">
+            <a:extLst>
+              <a:ext uri="{FF2B5EF4-FFF2-40B4-BE49-F238E27FC236}">
+                <a16:creationId xmlns:a16="http://schemas.microsoft.com/office/drawing/2014/main" id="{F388A7C5-782D-EA2B-8A9F-1678E01465D8}"/>
+              </a:ext>
+            </a:extLst>
+          </p:cNvPr>
           <p:cNvSpPr>
             <a:spLocks noGrp="1"/>
           </p:cNvSpPr>
@@ -1259,97 +1536,74 @@
         </p:nvSpPr>
         <p:spPr>
           <a:xfrm>
-            <a:off x="4648200" y="1600200"/>
-            <a:ext cx="4038600" cy="4525963"/>
+            <a:off x="462915" y="243417"/>
+            <a:ext cx="388620" cy="580178"/>
           </a:xfrm>
         </p:spPr>
         <p:txBody>
           <a:bodyPr/>
-          <a:lstStyle>
-            <a:lvl1pPr>
-              <a:defRPr sz="2800"/>
-            </a:lvl1pPr>
-            <a:lvl2pPr>
-              <a:defRPr sz="2400"/>
-            </a:lvl2pPr>
-            <a:lvl3pPr>
-              <a:defRPr sz="2000"/>
-            </a:lvl3pPr>
-            <a:lvl4pPr>
-              <a:defRPr sz="1800"/>
-            </a:lvl4pPr>
-            <a:lvl5pPr>
-              <a:defRPr sz="1800"/>
-            </a:lvl5pPr>
-            <a:lvl6pPr>
-              <a:defRPr sz="1800"/>
-            </a:lvl6pPr>
-            <a:lvl7pPr>
-              <a:defRPr sz="1800"/>
-            </a:lvl7pPr>
-            <a:lvl8pPr>
-              <a:defRPr sz="1800"/>
-            </a:lvl8pPr>
-            <a:lvl9pPr>
-              <a:defRPr sz="1800"/>
-            </a:lvl9pPr>
-          </a:lstStyle>
+          <a:lstStyle/>
           <a:p>
             <a:pPr lvl="0"/>
             <a:r>
+              <a:rPr lang="en-US"/>
+              <a:t>Click to edit Master text styles</a:t>
+            </a:r>
+          </a:p>
+          <a:p>
+            <a:pPr lvl="1"/>
+            <a:r>
+              <a:rPr lang="en-US"/>
+              <a:t>Second level</a:t>
+            </a:r>
+          </a:p>
+          <a:p>
+            <a:pPr lvl="2"/>
+            <a:r>
+              <a:rPr lang="en-US"/>
+              <a:t>Third level</a:t>
+            </a:r>
+          </a:p>
+          <a:p>
+            <a:pPr lvl="3"/>
+            <a:r>
+              <a:rPr lang="en-US"/>
+              <a:t>Fourth level</a:t>
+            </a:r>
+          </a:p>
+          <a:p>
+            <a:pPr lvl="4"/>
+            <a:r>
+              <a:rPr lang="en-US"/>
+              <a:t>Fifth level</a:t>
+            </a:r>
+          </a:p>
+        </p:txBody>
+      </p:sp>
+      <p:sp>
+        <p:nvSpPr>
+          <p:cNvPr id="5" name="Date Placeholder 4">
+            <a:extLst>
+              <a:ext uri="{FF2B5EF4-FFF2-40B4-BE49-F238E27FC236}">
+                <a16:creationId xmlns:a16="http://schemas.microsoft.com/office/drawing/2014/main" id="{CA15F793-B131-8E9D-7BC4-30D3CCE18487}"/>
+              </a:ext>
+            </a:extLst>
+          </p:cNvPr>
+          <p:cNvSpPr>
+            <a:spLocks noGrp="1"/>
+          </p:cNvSpPr>
+          <p:nvPr>
+            <p:ph type="dt" sz="half" idx="10"/>
+          </p:nvPr>
+        </p:nvSpPr>
+        <p:spPr/>
+        <p:txBody>
+          <a:bodyPr/>
+          <a:lstStyle/>
+          <a:p>
+            <a:fld id="{8B95E3DC-E37F-4B4D-991A-1190A7C7BBE5}" type="datetimeFigureOut">
               <a:rPr lang="en-US" smtClean="0"/>
-              <a:t>Click to edit Master text styles</a:t>
-            </a:r>
-          </a:p>
-          <a:p>
-            <a:pPr lvl="1"/>
-            <a:r>
-              <a:rPr lang="en-US" smtClean="0"/>
-              <a:t>Second level</a:t>
-            </a:r>
-          </a:p>
-          <a:p>
-            <a:pPr lvl="2"/>
-            <a:r>
-              <a:rPr lang="en-US" smtClean="0"/>
-              <a:t>Third level</a:t>
-            </a:r>
-          </a:p>
-          <a:p>
-            <a:pPr lvl="3"/>
-            <a:r>
-              <a:rPr lang="en-US" smtClean="0"/>
-              <a:t>Fourth level</a:t>
-            </a:r>
-          </a:p>
-          <a:p>
-            <a:pPr lvl="4"/>
-            <a:r>
-              <a:rPr lang="en-US" smtClean="0"/>
-              <a:t>Fifth level</a:t>
-            </a:r>
-            <a:endParaRPr lang="en-US"/>
-          </a:p>
-        </p:txBody>
-      </p:sp>
-      <p:sp>
-        <p:nvSpPr>
-          <p:cNvPr id="5" name="Date Placeholder 4"/>
-          <p:cNvSpPr>
-            <a:spLocks noGrp="1"/>
-          </p:cNvSpPr>
-          <p:nvPr>
-            <p:ph type="dt" sz="half" idx="10"/>
-          </p:nvPr>
-        </p:nvSpPr>
-        <p:spPr/>
-        <p:txBody>
-          <a:bodyPr/>
-          <a:lstStyle/>
-          <a:p>
-            <a:fld id="{5BCAD085-E8A6-8845-BD4E-CB4CCA059FC4}" type="datetimeFigureOut">
-              <a:rPr lang="en-US" smtClean="0"/>
-              <a:t>1/27/13</a:t>
+              <a:t>8/2/2026</a:t>
             </a:fld>
             <a:endParaRPr lang="en-US"/>
           </a:p>
@@ -1357,7 +1611,13 @@
       </p:sp>
       <p:sp>
         <p:nvSpPr>
-          <p:cNvPr id="6" name="Footer Placeholder 5"/>
+          <p:cNvPr id="6" name="Footer Placeholder 5">
+            <a:extLst>
+              <a:ext uri="{FF2B5EF4-FFF2-40B4-BE49-F238E27FC236}">
+                <a16:creationId xmlns:a16="http://schemas.microsoft.com/office/drawing/2014/main" id="{0F0314C0-5355-D3C8-696C-7FB2DDC53C6C}"/>
+              </a:ext>
+            </a:extLst>
+          </p:cNvPr>
           <p:cNvSpPr>
             <a:spLocks noGrp="1"/>
           </p:cNvSpPr>
@@ -1376,7 +1636,13 @@
       </p:sp>
       <p:sp>
         <p:nvSpPr>
-          <p:cNvPr id="7" name="Slide Number Placeholder 6"/>
+          <p:cNvPr id="7" name="Slide Number Placeholder 6">
+            <a:extLst>
+              <a:ext uri="{FF2B5EF4-FFF2-40B4-BE49-F238E27FC236}">
+                <a16:creationId xmlns:a16="http://schemas.microsoft.com/office/drawing/2014/main" id="{FEB3E252-A77B-08EB-A551-B48BC597D77A}"/>
+              </a:ext>
+            </a:extLst>
+          </p:cNvPr>
           <p:cNvSpPr>
             <a:spLocks noGrp="1"/>
           </p:cNvSpPr>
@@ -1389,7 +1655,7 @@
           <a:bodyPr/>
           <a:lstStyle/>
           <a:p>
-            <a:fld id="{C1FF6DA9-008F-8B48-92A6-B652298478BF}" type="slidenum">
+            <a:fld id="{41FEF42D-5A65-4029-9F78-408BF3F9B145}" type="slidenum">
               <a:rPr lang="en-US" smtClean="0"/>
               <a:t>‹#›</a:t>
             </a:fld>
@@ -1400,7 +1666,7 @@
     </p:spTree>
     <p:extLst>
       <p:ext uri="{BB962C8B-B14F-4D97-AF65-F5344CB8AC3E}">
-        <p14:creationId xmlns:p14="http://schemas.microsoft.com/office/powerpoint/2010/main" val="2782244947"/>
+        <p14:creationId xmlns:p14="http://schemas.microsoft.com/office/powerpoint/2010/main" val="2943130189"/>
       </p:ext>
     </p:extLst>
   </p:cSld>
@@ -1429,45 +1695,57 @@
       </p:grpSpPr>
       <p:sp>
         <p:nvSpPr>
-          <p:cNvPr id="2" name="Title 1"/>
+          <p:cNvPr id="2" name="Title 1">
+            <a:extLst>
+              <a:ext uri="{FF2B5EF4-FFF2-40B4-BE49-F238E27FC236}">
+                <a16:creationId xmlns:a16="http://schemas.microsoft.com/office/drawing/2014/main" id="{84EFA9E0-EECB-0F1E-E0AE-BAD8E4A413BE}"/>
+              </a:ext>
+            </a:extLst>
+          </p:cNvPr>
           <p:cNvSpPr>
             <a:spLocks noGrp="1"/>
           </p:cNvSpPr>
           <p:nvPr>
             <p:ph type="title"/>
-          </p:nvPr>
-        </p:nvSpPr>
-        <p:spPr/>
-        <p:txBody>
-          <a:bodyPr/>
-          <a:lstStyle>
-            <a:lvl1pPr>
-              <a:defRPr/>
-            </a:lvl1pPr>
-          </a:lstStyle>
-          <a:p>
-            <a:r>
-              <a:rPr lang="en-US" smtClean="0"/>
-              <a:t>Click to edit Master title style</a:t>
-            </a:r>
-            <a:endParaRPr lang="en-US"/>
-          </a:p>
-        </p:txBody>
-      </p:sp>
-      <p:sp>
-        <p:nvSpPr>
-          <p:cNvPr id="3" name="Text Placeholder 2"/>
-          <p:cNvSpPr>
-            <a:spLocks noGrp="1"/>
-          </p:cNvSpPr>
-          <p:nvPr>
-            <p:ph type="body" idx="1"/>
           </p:nvPr>
         </p:nvSpPr>
         <p:spPr>
           <a:xfrm>
-            <a:off x="457200" y="1535113"/>
-            <a:ext cx="4040188" cy="639762"/>
+            <a:off x="62984" y="48683"/>
+            <a:ext cx="788670" cy="176742"/>
+          </a:xfrm>
+        </p:spPr>
+        <p:txBody>
+          <a:bodyPr/>
+          <a:lstStyle/>
+          <a:p>
+            <a:r>
+              <a:rPr lang="en-US"/>
+              <a:t>Click to edit Master title style</a:t>
+            </a:r>
+          </a:p>
+        </p:txBody>
+      </p:sp>
+      <p:sp>
+        <p:nvSpPr>
+          <p:cNvPr id="3" name="Text Placeholder 2">
+            <a:extLst>
+              <a:ext uri="{FF2B5EF4-FFF2-40B4-BE49-F238E27FC236}">
+                <a16:creationId xmlns:a16="http://schemas.microsoft.com/office/drawing/2014/main" id="{76EDA53C-7569-357F-5D4D-5A2EAFC4D4CB}"/>
+              </a:ext>
+            </a:extLst>
+          </p:cNvPr>
+          <p:cNvSpPr>
+            <a:spLocks noGrp="1"/>
+          </p:cNvSpPr>
+          <p:nvPr>
+            <p:ph type="body" idx="1"/>
+          </p:nvPr>
+        </p:nvSpPr>
+        <p:spPr>
+          <a:xfrm>
+            <a:off x="62984" y="224155"/>
+            <a:ext cx="386834" cy="109855"/>
           </a:xfrm>
         </p:spPr>
         <p:txBody>
@@ -1475,45 +1753,45 @@
           <a:lstStyle>
             <a:lvl1pPr marL="0" indent="0">
               <a:buNone/>
-              <a:defRPr sz="2400" b="1"/>
+              <a:defRPr sz="100" b="1"/>
             </a:lvl1pPr>
-            <a:lvl2pPr marL="457200" indent="0">
-              <a:buNone/>
-              <a:defRPr sz="2000" b="1"/>
+            <a:lvl2pPr marL="4571" indent="0">
+              <a:buNone/>
+              <a:defRPr sz="100" b="1"/>
             </a:lvl2pPr>
-            <a:lvl3pPr marL="914400" indent="0">
-              <a:buNone/>
-              <a:defRPr sz="1800" b="1"/>
+            <a:lvl3pPr marL="9142" indent="0">
+              <a:buNone/>
+              <a:defRPr sz="100" b="1"/>
             </a:lvl3pPr>
-            <a:lvl4pPr marL="1371600" indent="0">
-              <a:buNone/>
-              <a:defRPr sz="1600" b="1"/>
+            <a:lvl4pPr marL="13713" indent="0">
+              <a:buNone/>
+              <a:defRPr sz="100" b="1"/>
             </a:lvl4pPr>
-            <a:lvl5pPr marL="1828800" indent="0">
-              <a:buNone/>
-              <a:defRPr sz="1600" b="1"/>
+            <a:lvl5pPr marL="18283" indent="0">
+              <a:buNone/>
+              <a:defRPr sz="100" b="1"/>
             </a:lvl5pPr>
-            <a:lvl6pPr marL="2286000" indent="0">
-              <a:buNone/>
-              <a:defRPr sz="1600" b="1"/>
+            <a:lvl6pPr marL="22854" indent="0">
+              <a:buNone/>
+              <a:defRPr sz="100" b="1"/>
             </a:lvl6pPr>
-            <a:lvl7pPr marL="2743200" indent="0">
-              <a:buNone/>
-              <a:defRPr sz="1600" b="1"/>
+            <a:lvl7pPr marL="27425" indent="0">
+              <a:buNone/>
+              <a:defRPr sz="100" b="1"/>
             </a:lvl7pPr>
-            <a:lvl8pPr marL="3200400" indent="0">
-              <a:buNone/>
-              <a:defRPr sz="1600" b="1"/>
+            <a:lvl8pPr marL="31996" indent="0">
+              <a:buNone/>
+              <a:defRPr sz="100" b="1"/>
             </a:lvl8pPr>
-            <a:lvl9pPr marL="3657600" indent="0">
-              <a:buNone/>
-              <a:defRPr sz="1600" b="1"/>
+            <a:lvl9pPr marL="36567" indent="0">
+              <a:buNone/>
+              <a:defRPr sz="100" b="1"/>
             </a:lvl9pPr>
           </a:lstStyle>
           <a:p>
             <a:pPr lvl="0"/>
             <a:r>
-              <a:rPr lang="en-US" smtClean="0"/>
+              <a:rPr lang="en-US"/>
               <a:t>Click to edit Master text styles</a:t>
             </a:r>
           </a:p>
@@ -1521,7 +1799,13 @@
       </p:sp>
       <p:sp>
         <p:nvSpPr>
-          <p:cNvPr id="4" name="Content Placeholder 3"/>
+          <p:cNvPr id="4" name="Content Placeholder 3">
+            <a:extLst>
+              <a:ext uri="{FF2B5EF4-FFF2-40B4-BE49-F238E27FC236}">
+                <a16:creationId xmlns:a16="http://schemas.microsoft.com/office/drawing/2014/main" id="{2D4E5753-1163-8E1E-9DE2-3D4DC986CA65}"/>
+              </a:ext>
+            </a:extLst>
+          </p:cNvPr>
           <p:cNvSpPr>
             <a:spLocks noGrp="1"/>
           </p:cNvSpPr>
@@ -1531,82 +1815,59 @@
         </p:nvSpPr>
         <p:spPr>
           <a:xfrm>
-            <a:off x="457200" y="2174875"/>
-            <a:ext cx="4040188" cy="3951288"/>
+            <a:off x="62984" y="334010"/>
+            <a:ext cx="386834" cy="491278"/>
           </a:xfrm>
         </p:spPr>
         <p:txBody>
           <a:bodyPr/>
-          <a:lstStyle>
-            <a:lvl1pPr>
-              <a:defRPr sz="2400"/>
-            </a:lvl1pPr>
-            <a:lvl2pPr>
-              <a:defRPr sz="2000"/>
-            </a:lvl2pPr>
-            <a:lvl3pPr>
-              <a:defRPr sz="1800"/>
-            </a:lvl3pPr>
-            <a:lvl4pPr>
-              <a:defRPr sz="1600"/>
-            </a:lvl4pPr>
-            <a:lvl5pPr>
-              <a:defRPr sz="1600"/>
-            </a:lvl5pPr>
-            <a:lvl6pPr>
-              <a:defRPr sz="1600"/>
-            </a:lvl6pPr>
-            <a:lvl7pPr>
-              <a:defRPr sz="1600"/>
-            </a:lvl7pPr>
-            <a:lvl8pPr>
-              <a:defRPr sz="1600"/>
-            </a:lvl8pPr>
-            <a:lvl9pPr>
-              <a:defRPr sz="1600"/>
-            </a:lvl9pPr>
-          </a:lstStyle>
+          <a:lstStyle/>
           <a:p>
             <a:pPr lvl="0"/>
             <a:r>
-              <a:rPr lang="en-US" smtClean="0"/>
+              <a:rPr lang="en-US"/>
               <a:t>Click to edit Master text styles</a:t>
             </a:r>
           </a:p>
           <a:p>
             <a:pPr lvl="1"/>
             <a:r>
-              <a:rPr lang="en-US" smtClean="0"/>
+              <a:rPr lang="en-US"/>
               <a:t>Second level</a:t>
             </a:r>
           </a:p>
           <a:p>
             <a:pPr lvl="2"/>
             <a:r>
-              <a:rPr lang="en-US" smtClean="0"/>
+              <a:rPr lang="en-US"/>
               <a:t>Third level</a:t>
             </a:r>
           </a:p>
           <a:p>
             <a:pPr lvl="3"/>
             <a:r>
-              <a:rPr lang="en-US" smtClean="0"/>
+              <a:rPr lang="en-US"/>
               <a:t>Fourth level</a:t>
             </a:r>
           </a:p>
           <a:p>
             <a:pPr lvl="4"/>
             <a:r>
-              <a:rPr lang="en-US" smtClean="0"/>
+              <a:rPr lang="en-US"/>
               <a:t>Fifth level</a:t>
             </a:r>
-            <a:endParaRPr lang="en-US"/>
-          </a:p>
-        </p:txBody>
-      </p:sp>
-      <p:sp>
-        <p:nvSpPr>
-          <p:cNvPr id="5" name="Text Placeholder 4"/>
+          </a:p>
+        </p:txBody>
+      </p:sp>
+      <p:sp>
+        <p:nvSpPr>
+          <p:cNvPr id="5" name="Text Placeholder 4">
+            <a:extLst>
+              <a:ext uri="{FF2B5EF4-FFF2-40B4-BE49-F238E27FC236}">
+                <a16:creationId xmlns:a16="http://schemas.microsoft.com/office/drawing/2014/main" id="{AAB4B440-D13B-40AB-D22A-803630CEFC6D}"/>
+              </a:ext>
+            </a:extLst>
+          </p:cNvPr>
           <p:cNvSpPr>
             <a:spLocks noGrp="1"/>
           </p:cNvSpPr>
@@ -1616,8 +1877,8 @@
         </p:nvSpPr>
         <p:spPr>
           <a:xfrm>
-            <a:off x="4645025" y="1535113"/>
-            <a:ext cx="4041775" cy="639762"/>
+            <a:off x="462916" y="224155"/>
+            <a:ext cx="388739" cy="109855"/>
           </a:xfrm>
         </p:spPr>
         <p:txBody>
@@ -1625,45 +1886,45 @@
           <a:lstStyle>
             <a:lvl1pPr marL="0" indent="0">
               <a:buNone/>
-              <a:defRPr sz="2400" b="1"/>
+              <a:defRPr sz="100" b="1"/>
             </a:lvl1pPr>
-            <a:lvl2pPr marL="457200" indent="0">
-              <a:buNone/>
-              <a:defRPr sz="2000" b="1"/>
+            <a:lvl2pPr marL="4571" indent="0">
+              <a:buNone/>
+              <a:defRPr sz="100" b="1"/>
             </a:lvl2pPr>
-            <a:lvl3pPr marL="914400" indent="0">
-              <a:buNone/>
-              <a:defRPr sz="1800" b="1"/>
+            <a:lvl3pPr marL="9142" indent="0">
+              <a:buNone/>
+              <a:defRPr sz="100" b="1"/>
             </a:lvl3pPr>
-            <a:lvl4pPr marL="1371600" indent="0">
-              <a:buNone/>
-              <a:defRPr sz="1600" b="1"/>
+            <a:lvl4pPr marL="13713" indent="0">
+              <a:buNone/>
+              <a:defRPr sz="100" b="1"/>
             </a:lvl4pPr>
-            <a:lvl5pPr marL="1828800" indent="0">
-              <a:buNone/>
-              <a:defRPr sz="1600" b="1"/>
+            <a:lvl5pPr marL="18283" indent="0">
+              <a:buNone/>
+              <a:defRPr sz="100" b="1"/>
             </a:lvl5pPr>
-            <a:lvl6pPr marL="2286000" indent="0">
-              <a:buNone/>
-              <a:defRPr sz="1600" b="1"/>
+            <a:lvl6pPr marL="22854" indent="0">
+              <a:buNone/>
+              <a:defRPr sz="100" b="1"/>
             </a:lvl6pPr>
-            <a:lvl7pPr marL="2743200" indent="0">
-              <a:buNone/>
-              <a:defRPr sz="1600" b="1"/>
+            <a:lvl7pPr marL="27425" indent="0">
+              <a:buNone/>
+              <a:defRPr sz="100" b="1"/>
             </a:lvl7pPr>
-            <a:lvl8pPr marL="3200400" indent="0">
-              <a:buNone/>
-              <a:defRPr sz="1600" b="1"/>
+            <a:lvl8pPr marL="31996" indent="0">
+              <a:buNone/>
+              <a:defRPr sz="100" b="1"/>
             </a:lvl8pPr>
-            <a:lvl9pPr marL="3657600" indent="0">
-              <a:buNone/>
-              <a:defRPr sz="1600" b="1"/>
+            <a:lvl9pPr marL="36567" indent="0">
+              <a:buNone/>
+              <a:defRPr sz="100" b="1"/>
             </a:lvl9pPr>
           </a:lstStyle>
           <a:p>
             <a:pPr lvl="0"/>
             <a:r>
-              <a:rPr lang="en-US" smtClean="0"/>
+              <a:rPr lang="en-US"/>
               <a:t>Click to edit Master text styles</a:t>
             </a:r>
           </a:p>
@@ -1671,7 +1932,13 @@
       </p:sp>
       <p:sp>
         <p:nvSpPr>
-          <p:cNvPr id="6" name="Content Placeholder 5"/>
+          <p:cNvPr id="6" name="Content Placeholder 5">
+            <a:extLst>
+              <a:ext uri="{FF2B5EF4-FFF2-40B4-BE49-F238E27FC236}">
+                <a16:creationId xmlns:a16="http://schemas.microsoft.com/office/drawing/2014/main" id="{49801491-098E-1BC0-724A-DDEF793CA877}"/>
+              </a:ext>
+            </a:extLst>
+          </p:cNvPr>
           <p:cNvSpPr>
             <a:spLocks noGrp="1"/>
           </p:cNvSpPr>
@@ -1681,97 +1948,74 @@
         </p:nvSpPr>
         <p:spPr>
           <a:xfrm>
-            <a:off x="4645025" y="2174875"/>
-            <a:ext cx="4041775" cy="3951288"/>
+            <a:off x="462916" y="334010"/>
+            <a:ext cx="388739" cy="491278"/>
           </a:xfrm>
         </p:spPr>
         <p:txBody>
           <a:bodyPr/>
-          <a:lstStyle>
-            <a:lvl1pPr>
-              <a:defRPr sz="2400"/>
-            </a:lvl1pPr>
-            <a:lvl2pPr>
-              <a:defRPr sz="2000"/>
-            </a:lvl2pPr>
-            <a:lvl3pPr>
-              <a:defRPr sz="1800"/>
-            </a:lvl3pPr>
-            <a:lvl4pPr>
-              <a:defRPr sz="1600"/>
-            </a:lvl4pPr>
-            <a:lvl5pPr>
-              <a:defRPr sz="1600"/>
-            </a:lvl5pPr>
-            <a:lvl6pPr>
-              <a:defRPr sz="1600"/>
-            </a:lvl6pPr>
-            <a:lvl7pPr>
-              <a:defRPr sz="1600"/>
-            </a:lvl7pPr>
-            <a:lvl8pPr>
-              <a:defRPr sz="1600"/>
-            </a:lvl8pPr>
-            <a:lvl9pPr>
-              <a:defRPr sz="1600"/>
-            </a:lvl9pPr>
-          </a:lstStyle>
+          <a:lstStyle/>
           <a:p>
             <a:pPr lvl="0"/>
             <a:r>
+              <a:rPr lang="en-US"/>
+              <a:t>Click to edit Master text styles</a:t>
+            </a:r>
+          </a:p>
+          <a:p>
+            <a:pPr lvl="1"/>
+            <a:r>
+              <a:rPr lang="en-US"/>
+              <a:t>Second level</a:t>
+            </a:r>
+          </a:p>
+          <a:p>
+            <a:pPr lvl="2"/>
+            <a:r>
+              <a:rPr lang="en-US"/>
+              <a:t>Third level</a:t>
+            </a:r>
+          </a:p>
+          <a:p>
+            <a:pPr lvl="3"/>
+            <a:r>
+              <a:rPr lang="en-US"/>
+              <a:t>Fourth level</a:t>
+            </a:r>
+          </a:p>
+          <a:p>
+            <a:pPr lvl="4"/>
+            <a:r>
+              <a:rPr lang="en-US"/>
+              <a:t>Fifth level</a:t>
+            </a:r>
+          </a:p>
+        </p:txBody>
+      </p:sp>
+      <p:sp>
+        <p:nvSpPr>
+          <p:cNvPr id="7" name="Date Placeholder 6">
+            <a:extLst>
+              <a:ext uri="{FF2B5EF4-FFF2-40B4-BE49-F238E27FC236}">
+                <a16:creationId xmlns:a16="http://schemas.microsoft.com/office/drawing/2014/main" id="{6949C87D-D7A5-FDFB-550F-605A4E0347CA}"/>
+              </a:ext>
+            </a:extLst>
+          </p:cNvPr>
+          <p:cNvSpPr>
+            <a:spLocks noGrp="1"/>
+          </p:cNvSpPr>
+          <p:nvPr>
+            <p:ph type="dt" sz="half" idx="10"/>
+          </p:nvPr>
+        </p:nvSpPr>
+        <p:spPr/>
+        <p:txBody>
+          <a:bodyPr/>
+          <a:lstStyle/>
+          <a:p>
+            <a:fld id="{8B95E3DC-E37F-4B4D-991A-1190A7C7BBE5}" type="datetimeFigureOut">
               <a:rPr lang="en-US" smtClean="0"/>
-              <a:t>Click to edit Master text styles</a:t>
-            </a:r>
-          </a:p>
-          <a:p>
-            <a:pPr lvl="1"/>
-            <a:r>
-              <a:rPr lang="en-US" smtClean="0"/>
-              <a:t>Second level</a:t>
-            </a:r>
-          </a:p>
-          <a:p>
-            <a:pPr lvl="2"/>
-            <a:r>
-              <a:rPr lang="en-US" smtClean="0"/>
-              <a:t>Third level</a:t>
-            </a:r>
-          </a:p>
-          <a:p>
-            <a:pPr lvl="3"/>
-            <a:r>
-              <a:rPr lang="en-US" smtClean="0"/>
-              <a:t>Fourth level</a:t>
-            </a:r>
-          </a:p>
-          <a:p>
-            <a:pPr lvl="4"/>
-            <a:r>
-              <a:rPr lang="en-US" smtClean="0"/>
-              <a:t>Fifth level</a:t>
-            </a:r>
-            <a:endParaRPr lang="en-US"/>
-          </a:p>
-        </p:txBody>
-      </p:sp>
-      <p:sp>
-        <p:nvSpPr>
-          <p:cNvPr id="7" name="Date Placeholder 6"/>
-          <p:cNvSpPr>
-            <a:spLocks noGrp="1"/>
-          </p:cNvSpPr>
-          <p:nvPr>
-            <p:ph type="dt" sz="half" idx="10"/>
-          </p:nvPr>
-        </p:nvSpPr>
-        <p:spPr/>
-        <p:txBody>
-          <a:bodyPr/>
-          <a:lstStyle/>
-          <a:p>
-            <a:fld id="{5BCAD085-E8A6-8845-BD4E-CB4CCA059FC4}" type="datetimeFigureOut">
-              <a:rPr lang="en-US" smtClean="0"/>
-              <a:t>1/27/13</a:t>
+              <a:t>8/2/2026</a:t>
             </a:fld>
             <a:endParaRPr lang="en-US"/>
           </a:p>
@@ -1779,7 +2023,13 @@
       </p:sp>
       <p:sp>
         <p:nvSpPr>
-          <p:cNvPr id="8" name="Footer Placeholder 7"/>
+          <p:cNvPr id="8" name="Footer Placeholder 7">
+            <a:extLst>
+              <a:ext uri="{FF2B5EF4-FFF2-40B4-BE49-F238E27FC236}">
+                <a16:creationId xmlns:a16="http://schemas.microsoft.com/office/drawing/2014/main" id="{D731DB01-5C21-E45F-FC62-7B217B8C9AE5}"/>
+              </a:ext>
+            </a:extLst>
+          </p:cNvPr>
           <p:cNvSpPr>
             <a:spLocks noGrp="1"/>
           </p:cNvSpPr>
@@ -1798,7 +2048,13 @@
       </p:sp>
       <p:sp>
         <p:nvSpPr>
-          <p:cNvPr id="9" name="Slide Number Placeholder 8"/>
+          <p:cNvPr id="9" name="Slide Number Placeholder 8">
+            <a:extLst>
+              <a:ext uri="{FF2B5EF4-FFF2-40B4-BE49-F238E27FC236}">
+                <a16:creationId xmlns:a16="http://schemas.microsoft.com/office/drawing/2014/main" id="{E59A0EF8-A174-884B-81CD-73558A311C3F}"/>
+              </a:ext>
+            </a:extLst>
+          </p:cNvPr>
           <p:cNvSpPr>
             <a:spLocks noGrp="1"/>
           </p:cNvSpPr>
@@ -1811,7 +2067,7 @@
           <a:bodyPr/>
           <a:lstStyle/>
           <a:p>
-            <a:fld id="{C1FF6DA9-008F-8B48-92A6-B652298478BF}" type="slidenum">
+            <a:fld id="{41FEF42D-5A65-4029-9F78-408BF3F9B145}" type="slidenum">
               <a:rPr lang="en-US" smtClean="0"/>
               <a:t>‹#›</a:t>
             </a:fld>
@@ -1822,7 +2078,7 @@
     </p:spTree>
     <p:extLst>
       <p:ext uri="{BB962C8B-B14F-4D97-AF65-F5344CB8AC3E}">
-        <p14:creationId xmlns:p14="http://schemas.microsoft.com/office/powerpoint/2010/main" val="990158736"/>
+        <p14:creationId xmlns:p14="http://schemas.microsoft.com/office/powerpoint/2010/main" val="1391230914"/>
       </p:ext>
     </p:extLst>
   </p:cSld>
@@ -1851,7 +2107,13 @@
       </p:grpSpPr>
       <p:sp>
         <p:nvSpPr>
-          <p:cNvPr id="2" name="Title 1"/>
+          <p:cNvPr id="2" name="Title 1">
+            <a:extLst>
+              <a:ext uri="{FF2B5EF4-FFF2-40B4-BE49-F238E27FC236}">
+                <a16:creationId xmlns:a16="http://schemas.microsoft.com/office/drawing/2014/main" id="{161E70C2-982E-F82A-CC37-85878F1EBDA7}"/>
+              </a:ext>
+            </a:extLst>
+          </p:cNvPr>
           <p:cNvSpPr>
             <a:spLocks noGrp="1"/>
           </p:cNvSpPr>
@@ -1865,31 +2127,36 @@
           <a:lstStyle/>
           <a:p>
             <a:r>
+              <a:rPr lang="en-US"/>
+              <a:t>Click to edit Master title style</a:t>
+            </a:r>
+          </a:p>
+        </p:txBody>
+      </p:sp>
+      <p:sp>
+        <p:nvSpPr>
+          <p:cNvPr id="3" name="Date Placeholder 2">
+            <a:extLst>
+              <a:ext uri="{FF2B5EF4-FFF2-40B4-BE49-F238E27FC236}">
+                <a16:creationId xmlns:a16="http://schemas.microsoft.com/office/drawing/2014/main" id="{57CA7514-6E50-62E1-D71F-49F37E9BADB7}"/>
+              </a:ext>
+            </a:extLst>
+          </p:cNvPr>
+          <p:cNvSpPr>
+            <a:spLocks noGrp="1"/>
+          </p:cNvSpPr>
+          <p:nvPr>
+            <p:ph type="dt" sz="half" idx="10"/>
+          </p:nvPr>
+        </p:nvSpPr>
+        <p:spPr/>
+        <p:txBody>
+          <a:bodyPr/>
+          <a:lstStyle/>
+          <a:p>
+            <a:fld id="{8B95E3DC-E37F-4B4D-991A-1190A7C7BBE5}" type="datetimeFigureOut">
               <a:rPr lang="en-US" smtClean="0"/>
-              <a:t>Click to edit Master title style</a:t>
-            </a:r>
-            <a:endParaRPr lang="en-US"/>
-          </a:p>
-        </p:txBody>
-      </p:sp>
-      <p:sp>
-        <p:nvSpPr>
-          <p:cNvPr id="3" name="Date Placeholder 2"/>
-          <p:cNvSpPr>
-            <a:spLocks noGrp="1"/>
-          </p:cNvSpPr>
-          <p:nvPr>
-            <p:ph type="dt" sz="half" idx="10"/>
-          </p:nvPr>
-        </p:nvSpPr>
-        <p:spPr/>
-        <p:txBody>
-          <a:bodyPr/>
-          <a:lstStyle/>
-          <a:p>
-            <a:fld id="{5BCAD085-E8A6-8845-BD4E-CB4CCA059FC4}" type="datetimeFigureOut">
-              <a:rPr lang="en-US" smtClean="0"/>
-              <a:t>1/27/13</a:t>
+              <a:t>8/2/2026</a:t>
             </a:fld>
             <a:endParaRPr lang="en-US"/>
           </a:p>
@@ -1897,7 +2164,13 @@
       </p:sp>
       <p:sp>
         <p:nvSpPr>
-          <p:cNvPr id="4" name="Footer Placeholder 3"/>
+          <p:cNvPr id="4" name="Footer Placeholder 3">
+            <a:extLst>
+              <a:ext uri="{FF2B5EF4-FFF2-40B4-BE49-F238E27FC236}">
+                <a16:creationId xmlns:a16="http://schemas.microsoft.com/office/drawing/2014/main" id="{E4ADE9DB-16FE-7B2B-D799-754E31AE4C7D}"/>
+              </a:ext>
+            </a:extLst>
+          </p:cNvPr>
           <p:cNvSpPr>
             <a:spLocks noGrp="1"/>
           </p:cNvSpPr>
@@ -1916,7 +2189,13 @@
       </p:sp>
       <p:sp>
         <p:nvSpPr>
-          <p:cNvPr id="5" name="Slide Number Placeholder 4"/>
+          <p:cNvPr id="5" name="Slide Number Placeholder 4">
+            <a:extLst>
+              <a:ext uri="{FF2B5EF4-FFF2-40B4-BE49-F238E27FC236}">
+                <a16:creationId xmlns:a16="http://schemas.microsoft.com/office/drawing/2014/main" id="{614B583C-AF21-45A7-ABE0-92A64B0E3450}"/>
+              </a:ext>
+            </a:extLst>
+          </p:cNvPr>
           <p:cNvSpPr>
             <a:spLocks noGrp="1"/>
           </p:cNvSpPr>
@@ -1929,7 +2208,7 @@
           <a:bodyPr/>
           <a:lstStyle/>
           <a:p>
-            <a:fld id="{C1FF6DA9-008F-8B48-92A6-B652298478BF}" type="slidenum">
+            <a:fld id="{41FEF42D-5A65-4029-9F78-408BF3F9B145}" type="slidenum">
               <a:rPr lang="en-US" smtClean="0"/>
               <a:t>‹#›</a:t>
             </a:fld>
@@ -1940,7 +2219,7 @@
     </p:spTree>
     <p:extLst>
       <p:ext uri="{BB962C8B-B14F-4D97-AF65-F5344CB8AC3E}">
-        <p14:creationId xmlns:p14="http://schemas.microsoft.com/office/powerpoint/2010/main" val="727027711"/>
+        <p14:creationId xmlns:p14="http://schemas.microsoft.com/office/powerpoint/2010/main" val="3806758085"/>
       </p:ext>
     </p:extLst>
   </p:cSld>
@@ -1969,7 +2248,13 @@
       </p:grpSpPr>
       <p:sp>
         <p:nvSpPr>
-          <p:cNvPr id="2" name="Date Placeholder 1"/>
+          <p:cNvPr id="2" name="Date Placeholder 1">
+            <a:extLst>
+              <a:ext uri="{FF2B5EF4-FFF2-40B4-BE49-F238E27FC236}">
+                <a16:creationId xmlns:a16="http://schemas.microsoft.com/office/drawing/2014/main" id="{78052CE2-5079-91EC-2D3F-792ECA3FC39E}"/>
+              </a:ext>
+            </a:extLst>
+          </p:cNvPr>
           <p:cNvSpPr>
             <a:spLocks noGrp="1"/>
           </p:cNvSpPr>
@@ -1982,9 +2267,9 @@
           <a:bodyPr/>
           <a:lstStyle/>
           <a:p>
-            <a:fld id="{5BCAD085-E8A6-8845-BD4E-CB4CCA059FC4}" type="datetimeFigureOut">
+            <a:fld id="{8B95E3DC-E37F-4B4D-991A-1190A7C7BBE5}" type="datetimeFigureOut">
               <a:rPr lang="en-US" smtClean="0"/>
-              <a:t>1/27/13</a:t>
+              <a:t>8/2/2026</a:t>
             </a:fld>
             <a:endParaRPr lang="en-US"/>
           </a:p>
@@ -1992,7 +2277,13 @@
       </p:sp>
       <p:sp>
         <p:nvSpPr>
-          <p:cNvPr id="3" name="Footer Placeholder 2"/>
+          <p:cNvPr id="3" name="Footer Placeholder 2">
+            <a:extLst>
+              <a:ext uri="{FF2B5EF4-FFF2-40B4-BE49-F238E27FC236}">
+                <a16:creationId xmlns:a16="http://schemas.microsoft.com/office/drawing/2014/main" id="{2036D71A-A2B6-16C7-E392-E46B01FDE065}"/>
+              </a:ext>
+            </a:extLst>
+          </p:cNvPr>
           <p:cNvSpPr>
             <a:spLocks noGrp="1"/>
           </p:cNvSpPr>
@@ -2011,7 +2302,13 @@
       </p:sp>
       <p:sp>
         <p:nvSpPr>
-          <p:cNvPr id="4" name="Slide Number Placeholder 3"/>
+          <p:cNvPr id="4" name="Slide Number Placeholder 3">
+            <a:extLst>
+              <a:ext uri="{FF2B5EF4-FFF2-40B4-BE49-F238E27FC236}">
+                <a16:creationId xmlns:a16="http://schemas.microsoft.com/office/drawing/2014/main" id="{DD83C810-8A80-FFA6-CBCD-EADD3BEEC605}"/>
+              </a:ext>
+            </a:extLst>
+          </p:cNvPr>
           <p:cNvSpPr>
             <a:spLocks noGrp="1"/>
           </p:cNvSpPr>
@@ -2024,7 +2321,7 @@
           <a:bodyPr/>
           <a:lstStyle/>
           <a:p>
-            <a:fld id="{C1FF6DA9-008F-8B48-92A6-B652298478BF}" type="slidenum">
+            <a:fld id="{41FEF42D-5A65-4029-9F78-408BF3F9B145}" type="slidenum">
               <a:rPr lang="en-US" smtClean="0"/>
               <a:t>‹#›</a:t>
             </a:fld>
@@ -2035,7 +2332,7 @@
     </p:spTree>
     <p:extLst>
       <p:ext uri="{BB962C8B-B14F-4D97-AF65-F5344CB8AC3E}">
-        <p14:creationId xmlns:p14="http://schemas.microsoft.com/office/powerpoint/2010/main" val="1212999818"/>
+        <p14:creationId xmlns:p14="http://schemas.microsoft.com/office/powerpoint/2010/main" val="1394961498"/>
       </p:ext>
     </p:extLst>
   </p:cSld>
@@ -2064,7 +2361,13 @@
       </p:grpSpPr>
       <p:sp>
         <p:nvSpPr>
-          <p:cNvPr id="2" name="Title 1"/>
+          <p:cNvPr id="2" name="Title 1">
+            <a:extLst>
+              <a:ext uri="{FF2B5EF4-FFF2-40B4-BE49-F238E27FC236}">
+                <a16:creationId xmlns:a16="http://schemas.microsoft.com/office/drawing/2014/main" id="{B8B62D9A-3A67-0689-DE49-0C89F9B7BF2E}"/>
+              </a:ext>
+            </a:extLst>
+          </p:cNvPr>
           <p:cNvSpPr>
             <a:spLocks noGrp="1"/>
           </p:cNvSpPr>
@@ -2074,29 +2377,34 @@
         </p:nvSpPr>
         <p:spPr>
           <a:xfrm>
-            <a:off x="457200" y="273050"/>
-            <a:ext cx="3008313" cy="1162050"/>
+            <a:off x="62984" y="60960"/>
+            <a:ext cx="294918" cy="213360"/>
           </a:xfrm>
         </p:spPr>
         <p:txBody>
           <a:bodyPr anchor="b"/>
           <a:lstStyle>
-            <a:lvl1pPr algn="l">
-              <a:defRPr sz="2000" b="1"/>
+            <a:lvl1pPr>
+              <a:defRPr sz="100"/>
             </a:lvl1pPr>
           </a:lstStyle>
           <a:p>
             <a:r>
-              <a:rPr lang="en-US" smtClean="0"/>
+              <a:rPr lang="en-US"/>
               <a:t>Click to edit Master title style</a:t>
             </a:r>
-            <a:endParaRPr lang="en-US"/>
-          </a:p>
-        </p:txBody>
-      </p:sp>
-      <p:sp>
-        <p:nvSpPr>
-          <p:cNvPr id="3" name="Content Placeholder 2"/>
+          </a:p>
+        </p:txBody>
+      </p:sp>
+      <p:sp>
+        <p:nvSpPr>
+          <p:cNvPr id="3" name="Content Placeholder 2">
+            <a:extLst>
+              <a:ext uri="{FF2B5EF4-FFF2-40B4-BE49-F238E27FC236}">
+                <a16:creationId xmlns:a16="http://schemas.microsoft.com/office/drawing/2014/main" id="{1116BBC4-8604-AE19-4648-A846FB6A050A}"/>
+              </a:ext>
+            </a:extLst>
+          </p:cNvPr>
           <p:cNvSpPr>
             <a:spLocks noGrp="1"/>
           </p:cNvSpPr>
@@ -2106,82 +2414,87 @@
         </p:nvSpPr>
         <p:spPr>
           <a:xfrm>
-            <a:off x="3575050" y="273050"/>
-            <a:ext cx="5111750" cy="5853113"/>
+            <a:off x="388740" y="131657"/>
+            <a:ext cx="462915" cy="649817"/>
           </a:xfrm>
         </p:spPr>
         <p:txBody>
           <a:bodyPr/>
           <a:lstStyle>
             <a:lvl1pPr>
-              <a:defRPr sz="3200"/>
+              <a:defRPr sz="100"/>
             </a:lvl1pPr>
             <a:lvl2pPr>
-              <a:defRPr sz="2800"/>
+              <a:defRPr sz="100"/>
             </a:lvl2pPr>
             <a:lvl3pPr>
-              <a:defRPr sz="2400"/>
+              <a:defRPr sz="100"/>
             </a:lvl3pPr>
             <a:lvl4pPr>
-              <a:defRPr sz="2000"/>
+              <a:defRPr sz="100"/>
             </a:lvl4pPr>
             <a:lvl5pPr>
-              <a:defRPr sz="2000"/>
+              <a:defRPr sz="100"/>
             </a:lvl5pPr>
             <a:lvl6pPr>
-              <a:defRPr sz="2000"/>
+              <a:defRPr sz="100"/>
             </a:lvl6pPr>
             <a:lvl7pPr>
-              <a:defRPr sz="2000"/>
+              <a:defRPr sz="100"/>
             </a:lvl7pPr>
             <a:lvl8pPr>
-              <a:defRPr sz="2000"/>
+              <a:defRPr sz="100"/>
             </a:lvl8pPr>
             <a:lvl9pPr>
-              <a:defRPr sz="2000"/>
+              <a:defRPr sz="100"/>
             </a:lvl9pPr>
           </a:lstStyle>
           <a:p>
             <a:pPr lvl="0"/>
             <a:r>
-              <a:rPr lang="en-US" smtClean="0"/>
+              <a:rPr lang="en-US"/>
               <a:t>Click to edit Master text styles</a:t>
             </a:r>
           </a:p>
           <a:p>
             <a:pPr lvl="1"/>
             <a:r>
-              <a:rPr lang="en-US" smtClean="0"/>
+              <a:rPr lang="en-US"/>
               <a:t>Second level</a:t>
             </a:r>
           </a:p>
           <a:p>
             <a:pPr lvl="2"/>
             <a:r>
-              <a:rPr lang="en-US" smtClean="0"/>
+              <a:rPr lang="en-US"/>
               <a:t>Third level</a:t>
             </a:r>
           </a:p>
           <a:p>
             <a:pPr lvl="3"/>
             <a:r>
-              <a:rPr lang="en-US" smtClean="0"/>
+              <a:rPr lang="en-US"/>
               <a:t>Fourth level</a:t>
             </a:r>
           </a:p>
           <a:p>
             <a:pPr lvl="4"/>
             <a:r>
-              <a:rPr lang="en-US" smtClean="0"/>
+              <a:rPr lang="en-US"/>
               <a:t>Fifth level</a:t>
             </a:r>
-            <a:endParaRPr lang="en-US"/>
-          </a:p>
-        </p:txBody>
-      </p:sp>
-      <p:sp>
-        <p:nvSpPr>
-          <p:cNvPr id="4" name="Text Placeholder 3"/>
+          </a:p>
+        </p:txBody>
+      </p:sp>
+      <p:sp>
+        <p:nvSpPr>
+          <p:cNvPr id="4" name="Text Placeholder 3">
+            <a:extLst>
+              <a:ext uri="{FF2B5EF4-FFF2-40B4-BE49-F238E27FC236}">
+                <a16:creationId xmlns:a16="http://schemas.microsoft.com/office/drawing/2014/main" id="{AC9BB85C-8CF1-1C8C-20B1-401C9A30B64A}"/>
+              </a:ext>
+            </a:extLst>
+          </p:cNvPr>
           <p:cNvSpPr>
             <a:spLocks noGrp="1"/>
           </p:cNvSpPr>
@@ -2191,8 +2504,8 @@
         </p:nvSpPr>
         <p:spPr>
           <a:xfrm>
-            <a:off x="457200" y="1435100"/>
-            <a:ext cx="3008313" cy="4691063"/>
+            <a:off x="62984" y="274320"/>
+            <a:ext cx="294918" cy="508212"/>
           </a:xfrm>
         </p:spPr>
         <p:txBody>
@@ -2200,68 +2513,74 @@
           <a:lstStyle>
             <a:lvl1pPr marL="0" indent="0">
               <a:buNone/>
-              <a:defRPr sz="1400"/>
+              <a:defRPr sz="100"/>
             </a:lvl1pPr>
-            <a:lvl2pPr marL="457200" indent="0">
-              <a:buNone/>
-              <a:defRPr sz="1200"/>
+            <a:lvl2pPr marL="4571" indent="0">
+              <a:buNone/>
+              <a:defRPr sz="100"/>
             </a:lvl2pPr>
-            <a:lvl3pPr marL="914400" indent="0">
-              <a:buNone/>
-              <a:defRPr sz="1000"/>
+            <a:lvl3pPr marL="9142" indent="0">
+              <a:buNone/>
+              <a:defRPr sz="100"/>
             </a:lvl3pPr>
-            <a:lvl4pPr marL="1371600" indent="0">
-              <a:buNone/>
-              <a:defRPr sz="900"/>
+            <a:lvl4pPr marL="13713" indent="0">
+              <a:buNone/>
+              <a:defRPr sz="100"/>
             </a:lvl4pPr>
-            <a:lvl5pPr marL="1828800" indent="0">
-              <a:buNone/>
-              <a:defRPr sz="900"/>
+            <a:lvl5pPr marL="18283" indent="0">
+              <a:buNone/>
+              <a:defRPr sz="100"/>
             </a:lvl5pPr>
-            <a:lvl6pPr marL="2286000" indent="0">
-              <a:buNone/>
-              <a:defRPr sz="900"/>
+            <a:lvl6pPr marL="22854" indent="0">
+              <a:buNone/>
+              <a:defRPr sz="100"/>
             </a:lvl6pPr>
-            <a:lvl7pPr marL="2743200" indent="0">
-              <a:buNone/>
-              <a:defRPr sz="900"/>
+            <a:lvl7pPr marL="27425" indent="0">
+              <a:buNone/>
+              <a:defRPr sz="100"/>
             </a:lvl7pPr>
-            <a:lvl8pPr marL="3200400" indent="0">
-              <a:buNone/>
-              <a:defRPr sz="900"/>
+            <a:lvl8pPr marL="31996" indent="0">
+              <a:buNone/>
+              <a:defRPr sz="100"/>
             </a:lvl8pPr>
-            <a:lvl9pPr marL="3657600" indent="0">
-              <a:buNone/>
-              <a:defRPr sz="900"/>
+            <a:lvl9pPr marL="36567" indent="0">
+              <a:buNone/>
+              <a:defRPr sz="100"/>
             </a:lvl9pPr>
           </a:lstStyle>
           <a:p>
             <a:pPr lvl="0"/>
             <a:r>
+              <a:rPr lang="en-US"/>
+              <a:t>Click to edit Master text styles</a:t>
+            </a:r>
+          </a:p>
+        </p:txBody>
+      </p:sp>
+      <p:sp>
+        <p:nvSpPr>
+          <p:cNvPr id="5" name="Date Placeholder 4">
+            <a:extLst>
+              <a:ext uri="{FF2B5EF4-FFF2-40B4-BE49-F238E27FC236}">
+                <a16:creationId xmlns:a16="http://schemas.microsoft.com/office/drawing/2014/main" id="{2FEAB780-83A8-4D31-F905-7BAD50E964A9}"/>
+              </a:ext>
+            </a:extLst>
+          </p:cNvPr>
+          <p:cNvSpPr>
+            <a:spLocks noGrp="1"/>
+          </p:cNvSpPr>
+          <p:nvPr>
+            <p:ph type="dt" sz="half" idx="10"/>
+          </p:nvPr>
+        </p:nvSpPr>
+        <p:spPr/>
+        <p:txBody>
+          <a:bodyPr/>
+          <a:lstStyle/>
+          <a:p>
+            <a:fld id="{8B95E3DC-E37F-4B4D-991A-1190A7C7BBE5}" type="datetimeFigureOut">
               <a:rPr lang="en-US" smtClean="0"/>
-              <a:t>Click to edit Master text styles</a:t>
-            </a:r>
-          </a:p>
-        </p:txBody>
-      </p:sp>
-      <p:sp>
-        <p:nvSpPr>
-          <p:cNvPr id="5" name="Date Placeholder 4"/>
-          <p:cNvSpPr>
-            <a:spLocks noGrp="1"/>
-          </p:cNvSpPr>
-          <p:nvPr>
-            <p:ph type="dt" sz="half" idx="10"/>
-          </p:nvPr>
-        </p:nvSpPr>
-        <p:spPr/>
-        <p:txBody>
-          <a:bodyPr/>
-          <a:lstStyle/>
-          <a:p>
-            <a:fld id="{5BCAD085-E8A6-8845-BD4E-CB4CCA059FC4}" type="datetimeFigureOut">
-              <a:rPr lang="en-US" smtClean="0"/>
-              <a:t>1/27/13</a:t>
+              <a:t>8/2/2026</a:t>
             </a:fld>
             <a:endParaRPr lang="en-US"/>
           </a:p>
@@ -2269,7 +2588,13 @@
       </p:sp>
       <p:sp>
         <p:nvSpPr>
-          <p:cNvPr id="6" name="Footer Placeholder 5"/>
+          <p:cNvPr id="6" name="Footer Placeholder 5">
+            <a:extLst>
+              <a:ext uri="{FF2B5EF4-FFF2-40B4-BE49-F238E27FC236}">
+                <a16:creationId xmlns:a16="http://schemas.microsoft.com/office/drawing/2014/main" id="{580FADED-67FD-0666-0FA5-F0FBCBD8FD05}"/>
+              </a:ext>
+            </a:extLst>
+          </p:cNvPr>
           <p:cNvSpPr>
             <a:spLocks noGrp="1"/>
           </p:cNvSpPr>
@@ -2288,7 +2613,13 @@
       </p:sp>
       <p:sp>
         <p:nvSpPr>
-          <p:cNvPr id="7" name="Slide Number Placeholder 6"/>
+          <p:cNvPr id="7" name="Slide Number Placeholder 6">
+            <a:extLst>
+              <a:ext uri="{FF2B5EF4-FFF2-40B4-BE49-F238E27FC236}">
+                <a16:creationId xmlns:a16="http://schemas.microsoft.com/office/drawing/2014/main" id="{AD21EB50-989D-45B9-EBE7-6888E23044E3}"/>
+              </a:ext>
+            </a:extLst>
+          </p:cNvPr>
           <p:cNvSpPr>
             <a:spLocks noGrp="1"/>
           </p:cNvSpPr>
@@ -2301,7 +2632,7 @@
           <a:bodyPr/>
           <a:lstStyle/>
           <a:p>
-            <a:fld id="{C1FF6DA9-008F-8B48-92A6-B652298478BF}" type="slidenum">
+            <a:fld id="{41FEF42D-5A65-4029-9F78-408BF3F9B145}" type="slidenum">
               <a:rPr lang="en-US" smtClean="0"/>
               <a:t>‹#›</a:t>
             </a:fld>
@@ -2312,7 +2643,7 @@
     </p:spTree>
     <p:extLst>
       <p:ext uri="{BB962C8B-B14F-4D97-AF65-F5344CB8AC3E}">
-        <p14:creationId xmlns:p14="http://schemas.microsoft.com/office/powerpoint/2010/main" val="1840726560"/>
+        <p14:creationId xmlns:p14="http://schemas.microsoft.com/office/powerpoint/2010/main" val="1562605405"/>
       </p:ext>
     </p:extLst>
   </p:cSld>
@@ -2341,7 +2672,13 @@
       </p:grpSpPr>
       <p:sp>
         <p:nvSpPr>
-          <p:cNvPr id="2" name="Title 1"/>
+          <p:cNvPr id="2" name="Title 1">
+            <a:extLst>
+              <a:ext uri="{FF2B5EF4-FFF2-40B4-BE49-F238E27FC236}">
+                <a16:creationId xmlns:a16="http://schemas.microsoft.com/office/drawing/2014/main" id="{0F3EE2C9-F917-330C-5E4D-75F4A9524C89}"/>
+              </a:ext>
+            </a:extLst>
+          </p:cNvPr>
           <p:cNvSpPr>
             <a:spLocks noGrp="1"/>
           </p:cNvSpPr>
@@ -2351,29 +2688,34 @@
         </p:nvSpPr>
         <p:spPr>
           <a:xfrm>
-            <a:off x="1792288" y="4800600"/>
-            <a:ext cx="5486400" cy="566738"/>
+            <a:off x="62984" y="60960"/>
+            <a:ext cx="294918" cy="213360"/>
           </a:xfrm>
         </p:spPr>
         <p:txBody>
           <a:bodyPr anchor="b"/>
           <a:lstStyle>
-            <a:lvl1pPr algn="l">
-              <a:defRPr sz="2000" b="1"/>
+            <a:lvl1pPr>
+              <a:defRPr sz="100"/>
             </a:lvl1pPr>
           </a:lstStyle>
           <a:p>
             <a:r>
-              <a:rPr lang="en-US" smtClean="0"/>
+              <a:rPr lang="en-US"/>
               <a:t>Click to edit Master title style</a:t>
             </a:r>
-            <a:endParaRPr lang="en-US"/>
-          </a:p>
-        </p:txBody>
-      </p:sp>
-      <p:sp>
-        <p:nvSpPr>
-          <p:cNvPr id="3" name="Picture Placeholder 2"/>
+          </a:p>
+        </p:txBody>
+      </p:sp>
+      <p:sp>
+        <p:nvSpPr>
+          <p:cNvPr id="3" name="Picture Placeholder 2">
+            <a:extLst>
+              <a:ext uri="{FF2B5EF4-FFF2-40B4-BE49-F238E27FC236}">
+                <a16:creationId xmlns:a16="http://schemas.microsoft.com/office/drawing/2014/main" id="{A11E2703-12BF-CDAB-3CB4-A8F87FB0CC66}"/>
+              </a:ext>
+            </a:extLst>
+          </p:cNvPr>
           <p:cNvSpPr>
             <a:spLocks noGrp="1"/>
           </p:cNvSpPr>
@@ -2383,8 +2725,8 @@
         </p:nvSpPr>
         <p:spPr>
           <a:xfrm>
-            <a:off x="1792288" y="612775"/>
-            <a:ext cx="5486400" cy="4114800"/>
+            <a:off x="388740" y="131657"/>
+            <a:ext cx="462915" cy="649817"/>
           </a:xfrm>
         </p:spPr>
         <p:txBody>
@@ -2392,39 +2734,39 @@
           <a:lstStyle>
             <a:lvl1pPr marL="0" indent="0">
               <a:buNone/>
-              <a:defRPr sz="3200"/>
+              <a:defRPr sz="100"/>
             </a:lvl1pPr>
-            <a:lvl2pPr marL="457200" indent="0">
-              <a:buNone/>
-              <a:defRPr sz="2800"/>
+            <a:lvl2pPr marL="4571" indent="0">
+              <a:buNone/>
+              <a:defRPr sz="100"/>
             </a:lvl2pPr>
-            <a:lvl3pPr marL="914400" indent="0">
-              <a:buNone/>
-              <a:defRPr sz="2400"/>
+            <a:lvl3pPr marL="9142" indent="0">
+              <a:buNone/>
+              <a:defRPr sz="100"/>
             </a:lvl3pPr>
-            <a:lvl4pPr marL="1371600" indent="0">
-              <a:buNone/>
-              <a:defRPr sz="2000"/>
+            <a:lvl4pPr marL="13713" indent="0">
+              <a:buNone/>
+              <a:defRPr sz="100"/>
             </a:lvl4pPr>
-            <a:lvl5pPr marL="1828800" indent="0">
-              <a:buNone/>
-              <a:defRPr sz="2000"/>
+            <a:lvl5pPr marL="18283" indent="0">
+              <a:buNone/>
+              <a:defRPr sz="100"/>
             </a:lvl5pPr>
-            <a:lvl6pPr marL="2286000" indent="0">
-              <a:buNone/>
-              <a:defRPr sz="2000"/>
+            <a:lvl6pPr marL="22854" indent="0">
+              <a:buNone/>
+              <a:defRPr sz="100"/>
             </a:lvl6pPr>
-            <a:lvl7pPr marL="2743200" indent="0">
-              <a:buNone/>
-              <a:defRPr sz="2000"/>
+            <a:lvl7pPr marL="27425" indent="0">
+              <a:buNone/>
+              <a:defRPr sz="100"/>
             </a:lvl7pPr>
-            <a:lvl8pPr marL="3200400" indent="0">
-              <a:buNone/>
-              <a:defRPr sz="2000"/>
+            <a:lvl8pPr marL="31996" indent="0">
+              <a:buNone/>
+              <a:defRPr sz="100"/>
             </a:lvl8pPr>
-            <a:lvl9pPr marL="3657600" indent="0">
-              <a:buNone/>
-              <a:defRPr sz="2000"/>
+            <a:lvl9pPr marL="36567" indent="0">
+              <a:buNone/>
+              <a:defRPr sz="100"/>
             </a:lvl9pPr>
           </a:lstStyle>
           <a:p>
@@ -2434,7 +2776,13 @@
       </p:sp>
       <p:sp>
         <p:nvSpPr>
-          <p:cNvPr id="4" name="Text Placeholder 3"/>
+          <p:cNvPr id="4" name="Text Placeholder 3">
+            <a:extLst>
+              <a:ext uri="{FF2B5EF4-FFF2-40B4-BE49-F238E27FC236}">
+                <a16:creationId xmlns:a16="http://schemas.microsoft.com/office/drawing/2014/main" id="{1D9132C7-BF47-080D-4F3C-3EC35D4110DE}"/>
+              </a:ext>
+            </a:extLst>
+          </p:cNvPr>
           <p:cNvSpPr>
             <a:spLocks noGrp="1"/>
           </p:cNvSpPr>
@@ -2444,8 +2792,8 @@
         </p:nvSpPr>
         <p:spPr>
           <a:xfrm>
-            <a:off x="1792288" y="5367338"/>
-            <a:ext cx="5486400" cy="804862"/>
+            <a:off x="62984" y="274320"/>
+            <a:ext cx="294918" cy="508212"/>
           </a:xfrm>
         </p:spPr>
         <p:txBody>
@@ -2453,68 +2801,74 @@
           <a:lstStyle>
             <a:lvl1pPr marL="0" indent="0">
               <a:buNone/>
-              <a:defRPr sz="1400"/>
+              <a:defRPr sz="100"/>
             </a:lvl1pPr>
-            <a:lvl2pPr marL="457200" indent="0">
-              <a:buNone/>
-              <a:defRPr sz="1200"/>
+            <a:lvl2pPr marL="4571" indent="0">
+              <a:buNone/>
+              <a:defRPr sz="100"/>
             </a:lvl2pPr>
-            <a:lvl3pPr marL="914400" indent="0">
-              <a:buNone/>
-              <a:defRPr sz="1000"/>
+            <a:lvl3pPr marL="9142" indent="0">
+              <a:buNone/>
+              <a:defRPr sz="100"/>
             </a:lvl3pPr>
-            <a:lvl4pPr marL="1371600" indent="0">
-              <a:buNone/>
-              <a:defRPr sz="900"/>
+            <a:lvl4pPr marL="13713" indent="0">
+              <a:buNone/>
+              <a:defRPr sz="100"/>
             </a:lvl4pPr>
-            <a:lvl5pPr marL="1828800" indent="0">
-              <a:buNone/>
-              <a:defRPr sz="900"/>
+            <a:lvl5pPr marL="18283" indent="0">
+              <a:buNone/>
+              <a:defRPr sz="100"/>
             </a:lvl5pPr>
-            <a:lvl6pPr marL="2286000" indent="0">
-              <a:buNone/>
-              <a:defRPr sz="900"/>
+            <a:lvl6pPr marL="22854" indent="0">
+              <a:buNone/>
+              <a:defRPr sz="100"/>
             </a:lvl6pPr>
-            <a:lvl7pPr marL="2743200" indent="0">
-              <a:buNone/>
-              <a:defRPr sz="900"/>
+            <a:lvl7pPr marL="27425" indent="0">
+              <a:buNone/>
+              <a:defRPr sz="100"/>
             </a:lvl7pPr>
-            <a:lvl8pPr marL="3200400" indent="0">
-              <a:buNone/>
-              <a:defRPr sz="900"/>
+            <a:lvl8pPr marL="31996" indent="0">
+              <a:buNone/>
+              <a:defRPr sz="100"/>
             </a:lvl8pPr>
-            <a:lvl9pPr marL="3657600" indent="0">
-              <a:buNone/>
-              <a:defRPr sz="900"/>
+            <a:lvl9pPr marL="36567" indent="0">
+              <a:buNone/>
+              <a:defRPr sz="100"/>
             </a:lvl9pPr>
           </a:lstStyle>
           <a:p>
             <a:pPr lvl="0"/>
             <a:r>
+              <a:rPr lang="en-US"/>
+              <a:t>Click to edit Master text styles</a:t>
+            </a:r>
+          </a:p>
+        </p:txBody>
+      </p:sp>
+      <p:sp>
+        <p:nvSpPr>
+          <p:cNvPr id="5" name="Date Placeholder 4">
+            <a:extLst>
+              <a:ext uri="{FF2B5EF4-FFF2-40B4-BE49-F238E27FC236}">
+                <a16:creationId xmlns:a16="http://schemas.microsoft.com/office/drawing/2014/main" id="{A7998600-8B10-E364-1820-5E2FDA50188D}"/>
+              </a:ext>
+            </a:extLst>
+          </p:cNvPr>
+          <p:cNvSpPr>
+            <a:spLocks noGrp="1"/>
+          </p:cNvSpPr>
+          <p:nvPr>
+            <p:ph type="dt" sz="half" idx="10"/>
+          </p:nvPr>
+        </p:nvSpPr>
+        <p:spPr/>
+        <p:txBody>
+          <a:bodyPr/>
+          <a:lstStyle/>
+          <a:p>
+            <a:fld id="{8B95E3DC-E37F-4B4D-991A-1190A7C7BBE5}" type="datetimeFigureOut">
               <a:rPr lang="en-US" smtClean="0"/>
-              <a:t>Click to edit Master text styles</a:t>
-            </a:r>
-          </a:p>
-        </p:txBody>
-      </p:sp>
-      <p:sp>
-        <p:nvSpPr>
-          <p:cNvPr id="5" name="Date Placeholder 4"/>
-          <p:cNvSpPr>
-            <a:spLocks noGrp="1"/>
-          </p:cNvSpPr>
-          <p:nvPr>
-            <p:ph type="dt" sz="half" idx="10"/>
-          </p:nvPr>
-        </p:nvSpPr>
-        <p:spPr/>
-        <p:txBody>
-          <a:bodyPr/>
-          <a:lstStyle/>
-          <a:p>
-            <a:fld id="{5BCAD085-E8A6-8845-BD4E-CB4CCA059FC4}" type="datetimeFigureOut">
-              <a:rPr lang="en-US" smtClean="0"/>
-              <a:t>1/27/13</a:t>
+              <a:t>8/2/2026</a:t>
             </a:fld>
             <a:endParaRPr lang="en-US"/>
           </a:p>
@@ -2522,7 +2876,13 @@
       </p:sp>
       <p:sp>
         <p:nvSpPr>
-          <p:cNvPr id="6" name="Footer Placeholder 5"/>
+          <p:cNvPr id="6" name="Footer Placeholder 5">
+            <a:extLst>
+              <a:ext uri="{FF2B5EF4-FFF2-40B4-BE49-F238E27FC236}">
+                <a16:creationId xmlns:a16="http://schemas.microsoft.com/office/drawing/2014/main" id="{C38E3162-2CB4-3213-566B-D1A16679B9A5}"/>
+              </a:ext>
+            </a:extLst>
+          </p:cNvPr>
           <p:cNvSpPr>
             <a:spLocks noGrp="1"/>
           </p:cNvSpPr>
@@ -2541,7 +2901,13 @@
       </p:sp>
       <p:sp>
         <p:nvSpPr>
-          <p:cNvPr id="7" name="Slide Number Placeholder 6"/>
+          <p:cNvPr id="7" name="Slide Number Placeholder 6">
+            <a:extLst>
+              <a:ext uri="{FF2B5EF4-FFF2-40B4-BE49-F238E27FC236}">
+                <a16:creationId xmlns:a16="http://schemas.microsoft.com/office/drawing/2014/main" id="{81643A24-B126-16DC-F8D1-0B7A2DCDF0F8}"/>
+              </a:ext>
+            </a:extLst>
+          </p:cNvPr>
           <p:cNvSpPr>
             <a:spLocks noGrp="1"/>
           </p:cNvSpPr>
@@ -2554,7 +2920,7 @@
           <a:bodyPr/>
           <a:lstStyle/>
           <a:p>
-            <a:fld id="{C1FF6DA9-008F-8B48-92A6-B652298478BF}" type="slidenum">
+            <a:fld id="{41FEF42D-5A65-4029-9F78-408BF3F9B145}" type="slidenum">
               <a:rPr lang="en-US" smtClean="0"/>
               <a:t>‹#›</a:t>
             </a:fld>
@@ -2565,7 +2931,7 @@
     </p:spTree>
     <p:extLst>
       <p:ext uri="{BB962C8B-B14F-4D97-AF65-F5344CB8AC3E}">
-        <p14:creationId xmlns:p14="http://schemas.microsoft.com/office/powerpoint/2010/main" val="3889236939"/>
+        <p14:creationId xmlns:p14="http://schemas.microsoft.com/office/powerpoint/2010/main" val="1755982446"/>
       </p:ext>
     </p:extLst>
   </p:cSld>
@@ -2599,7 +2965,13 @@
       </p:grpSpPr>
       <p:sp>
         <p:nvSpPr>
-          <p:cNvPr id="2" name="Title Placeholder 1"/>
+          <p:cNvPr id="2" name="Title Placeholder 1">
+            <a:extLst>
+              <a:ext uri="{FF2B5EF4-FFF2-40B4-BE49-F238E27FC236}">
+                <a16:creationId xmlns:a16="http://schemas.microsoft.com/office/drawing/2014/main" id="{F5908B8C-801A-B4DA-7D81-7DBACC935AFF}"/>
+              </a:ext>
+            </a:extLst>
+          </p:cNvPr>
           <p:cNvSpPr>
             <a:spLocks noGrp="1"/>
           </p:cNvSpPr>
@@ -2609,8 +2981,8 @@
         </p:nvSpPr>
         <p:spPr>
           <a:xfrm>
-            <a:off x="457200" y="274638"/>
-            <a:ext cx="8229600" cy="1143000"/>
+            <a:off x="62865" y="48683"/>
+            <a:ext cx="788670" cy="176742"/>
           </a:xfrm>
           <a:prstGeom prst="rect">
             <a:avLst/>
@@ -2623,16 +2995,21 @@
           <a:lstStyle/>
           <a:p>
             <a:r>
-              <a:rPr lang="en-US" smtClean="0"/>
+              <a:rPr lang="en-US"/>
               <a:t>Click to edit Master title style</a:t>
             </a:r>
-            <a:endParaRPr lang="en-US"/>
-          </a:p>
-        </p:txBody>
-      </p:sp>
-      <p:sp>
-        <p:nvSpPr>
-          <p:cNvPr id="3" name="Text Placeholder 2"/>
+          </a:p>
+        </p:txBody>
+      </p:sp>
+      <p:sp>
+        <p:nvSpPr>
+          <p:cNvPr id="3" name="Text Placeholder 2">
+            <a:extLst>
+              <a:ext uri="{FF2B5EF4-FFF2-40B4-BE49-F238E27FC236}">
+                <a16:creationId xmlns:a16="http://schemas.microsoft.com/office/drawing/2014/main" id="{32C1F7BF-C0D8-61C8-1943-966DEF4511EB}"/>
+              </a:ext>
+            </a:extLst>
+          </p:cNvPr>
           <p:cNvSpPr>
             <a:spLocks noGrp="1"/>
           </p:cNvSpPr>
@@ -2642,8 +3019,8 @@
         </p:nvSpPr>
         <p:spPr>
           <a:xfrm>
-            <a:off x="457200" y="1600200"/>
-            <a:ext cx="8229600" cy="4525963"/>
+            <a:off x="62865" y="243417"/>
+            <a:ext cx="788670" cy="580178"/>
           </a:xfrm>
           <a:prstGeom prst="rect">
             <a:avLst/>
@@ -2657,44 +3034,49 @@
           <a:p>
             <a:pPr lvl="0"/>
             <a:r>
-              <a:rPr lang="en-US" smtClean="0"/>
+              <a:rPr lang="en-US"/>
               <a:t>Click to edit Master text styles</a:t>
             </a:r>
           </a:p>
           <a:p>
             <a:pPr lvl="1"/>
             <a:r>
-              <a:rPr lang="en-US" smtClean="0"/>
+              <a:rPr lang="en-US"/>
               <a:t>Second level</a:t>
             </a:r>
           </a:p>
           <a:p>
             <a:pPr lvl="2"/>
             <a:r>
-              <a:rPr lang="en-US" smtClean="0"/>
+              <a:rPr lang="en-US"/>
               <a:t>Third level</a:t>
             </a:r>
           </a:p>
           <a:p>
             <a:pPr lvl="3"/>
             <a:r>
-              <a:rPr lang="en-US" smtClean="0"/>
+              <a:rPr lang="en-US"/>
               <a:t>Fourth level</a:t>
             </a:r>
           </a:p>
           <a:p>
             <a:pPr lvl="4"/>
             <a:r>
-              <a:rPr lang="en-US" smtClean="0"/>
+              <a:rPr lang="en-US"/>
               <a:t>Fifth level</a:t>
             </a:r>
-            <a:endParaRPr lang="en-US"/>
-          </a:p>
-        </p:txBody>
-      </p:sp>
-      <p:sp>
-        <p:nvSpPr>
-          <p:cNvPr id="4" name="Date Placeholder 3"/>
+          </a:p>
+        </p:txBody>
+      </p:sp>
+      <p:sp>
+        <p:nvSpPr>
+          <p:cNvPr id="4" name="Date Placeholder 3">
+            <a:extLst>
+              <a:ext uri="{FF2B5EF4-FFF2-40B4-BE49-F238E27FC236}">
+                <a16:creationId xmlns:a16="http://schemas.microsoft.com/office/drawing/2014/main" id="{E1FAEC6E-E9D0-B4EA-42FB-881FEC1DCE00}"/>
+              </a:ext>
+            </a:extLst>
+          </p:cNvPr>
           <p:cNvSpPr>
             <a:spLocks noGrp="1"/>
           </p:cNvSpPr>
@@ -2704,8 +3086,8 @@
         </p:nvSpPr>
         <p:spPr>
           <a:xfrm>
-            <a:off x="457200" y="6356350"/>
-            <a:ext cx="2133600" cy="365125"/>
+            <a:off x="62865" y="847514"/>
+            <a:ext cx="205740" cy="48683"/>
           </a:xfrm>
           <a:prstGeom prst="rect">
             <a:avLst/>
@@ -2715,19 +3097,19 @@
           <a:bodyPr vert="horz" lIns="91440" tIns="45720" rIns="91440" bIns="45720" rtlCol="0" anchor="ctr"/>
           <a:lstStyle>
             <a:lvl1pPr algn="l">
-              <a:defRPr sz="1200">
+              <a:defRPr sz="100">
                 <a:solidFill>
                   <a:schemeClr val="tx1">
-                    <a:tint val="75000"/>
+                    <a:tint val="82000"/>
                   </a:schemeClr>
                 </a:solidFill>
               </a:defRPr>
             </a:lvl1pPr>
           </a:lstStyle>
           <a:p>
-            <a:fld id="{5BCAD085-E8A6-8845-BD4E-CB4CCA059FC4}" type="datetimeFigureOut">
+            <a:fld id="{8B95E3DC-E37F-4B4D-991A-1190A7C7BBE5}" type="datetimeFigureOut">
               <a:rPr lang="en-US" smtClean="0"/>
-              <a:t>1/27/13</a:t>
+              <a:t>8/2/2026</a:t>
             </a:fld>
             <a:endParaRPr lang="en-US"/>
           </a:p>
@@ -2735,7 +3117,13 @@
       </p:sp>
       <p:sp>
         <p:nvSpPr>
-          <p:cNvPr id="5" name="Footer Placeholder 4"/>
+          <p:cNvPr id="5" name="Footer Placeholder 4">
+            <a:extLst>
+              <a:ext uri="{FF2B5EF4-FFF2-40B4-BE49-F238E27FC236}">
+                <a16:creationId xmlns:a16="http://schemas.microsoft.com/office/drawing/2014/main" id="{962A47D8-8CD0-2FEB-8A42-C72D086EDB53}"/>
+              </a:ext>
+            </a:extLst>
+          </p:cNvPr>
           <p:cNvSpPr>
             <a:spLocks noGrp="1"/>
           </p:cNvSpPr>
@@ -2745,8 +3133,8 @@
         </p:nvSpPr>
         <p:spPr>
           <a:xfrm>
-            <a:off x="3124200" y="6356350"/>
-            <a:ext cx="2895600" cy="365125"/>
+            <a:off x="302895" y="847514"/>
+            <a:ext cx="308610" cy="48683"/>
           </a:xfrm>
           <a:prstGeom prst="rect">
             <a:avLst/>
@@ -2756,10 +3144,10 @@
           <a:bodyPr vert="horz" lIns="91440" tIns="45720" rIns="91440" bIns="45720" rtlCol="0" anchor="ctr"/>
           <a:lstStyle>
             <a:lvl1pPr algn="ctr">
-              <a:defRPr sz="1200">
+              <a:defRPr sz="100">
                 <a:solidFill>
                   <a:schemeClr val="tx1">
-                    <a:tint val="75000"/>
+                    <a:tint val="82000"/>
                   </a:schemeClr>
                 </a:solidFill>
               </a:defRPr>
@@ -2772,7 +3160,13 @@
       </p:sp>
       <p:sp>
         <p:nvSpPr>
-          <p:cNvPr id="6" name="Slide Number Placeholder 5"/>
+          <p:cNvPr id="6" name="Slide Number Placeholder 5">
+            <a:extLst>
+              <a:ext uri="{FF2B5EF4-FFF2-40B4-BE49-F238E27FC236}">
+                <a16:creationId xmlns:a16="http://schemas.microsoft.com/office/drawing/2014/main" id="{B41C019C-2751-16F6-A518-FA800579279E}"/>
+              </a:ext>
+            </a:extLst>
+          </p:cNvPr>
           <p:cNvSpPr>
             <a:spLocks noGrp="1"/>
           </p:cNvSpPr>
@@ -2782,8 +3176,8 @@
         </p:nvSpPr>
         <p:spPr>
           <a:xfrm>
-            <a:off x="6553200" y="6356350"/>
-            <a:ext cx="2133600" cy="365125"/>
+            <a:off x="645795" y="847514"/>
+            <a:ext cx="205740" cy="48683"/>
           </a:xfrm>
           <a:prstGeom prst="rect">
             <a:avLst/>
@@ -2793,17 +3187,17 @@
           <a:bodyPr vert="horz" lIns="91440" tIns="45720" rIns="91440" bIns="45720" rtlCol="0" anchor="ctr"/>
           <a:lstStyle>
             <a:lvl1pPr algn="r">
-              <a:defRPr sz="1200">
+              <a:defRPr sz="100">
                 <a:solidFill>
                   <a:schemeClr val="tx1">
-                    <a:tint val="75000"/>
+                    <a:tint val="82000"/>
                   </a:schemeClr>
                 </a:solidFill>
               </a:defRPr>
             </a:lvl1pPr>
           </a:lstStyle>
           <a:p>
-            <a:fld id="{C1FF6DA9-008F-8B48-92A6-B652298478BF}" type="slidenum">
+            <a:fld id="{41FEF42D-5A65-4029-9F78-408BF3F9B145}" type="slidenum">
               <a:rPr lang="en-US" smtClean="0"/>
               <a:t>‹#›</a:t>
             </a:fld>
@@ -2814,7 +3208,7 @@
     </p:spTree>
     <p:extLst>
       <p:ext uri="{BB962C8B-B14F-4D97-AF65-F5344CB8AC3E}">
-        <p14:creationId xmlns:p14="http://schemas.microsoft.com/office/powerpoint/2010/main" val="2209977519"/>
+        <p14:creationId xmlns:p14="http://schemas.microsoft.com/office/powerpoint/2010/main" val="574242683"/>
       </p:ext>
     </p:extLst>
   </p:cSld>
@@ -2831,15 +3225,19 @@
     <p:sldLayoutId id="2147483657" r:id="rId9"/>
     <p:sldLayoutId id="2147483658" r:id="rId10"/>
     <p:sldLayoutId id="2147483659" r:id="rId11"/>
+    <p:sldLayoutId id="2147483660" r:id="rId12"/>
   </p:sldLayoutIdLst>
   <p:txStyles>
     <p:titleStyle>
-      <a:lvl1pPr algn="ctr" defTabSz="457200" rtl="0" eaLnBrk="1" latinLnBrk="0" hangingPunct="1">
+      <a:lvl1pPr algn="l" defTabSz="9142" rtl="0" eaLnBrk="1" latinLnBrk="0" hangingPunct="1">
+        <a:lnSpc>
+          <a:spcPct val="90000"/>
+        </a:lnSpc>
         <a:spcBef>
           <a:spcPct val="0"/>
         </a:spcBef>
         <a:buNone/>
-        <a:defRPr sz="4400" kern="1200">
+        <a:defRPr sz="100" kern="1200">
           <a:solidFill>
             <a:schemeClr val="tx1"/>
           </a:solidFill>
@@ -2850,13 +3248,16 @@
       </a:lvl1pPr>
     </p:titleStyle>
     <p:bodyStyle>
-      <a:lvl1pPr marL="342900" indent="-342900" algn="l" defTabSz="457200" rtl="0" eaLnBrk="1" latinLnBrk="0" hangingPunct="1">
+      <a:lvl1pPr marL="2285" indent="-2285" algn="l" defTabSz="9142" rtl="0" eaLnBrk="1" latinLnBrk="0" hangingPunct="1">
+        <a:lnSpc>
+          <a:spcPct val="90000"/>
+        </a:lnSpc>
         <a:spcBef>
-          <a:spcPct val="20000"/>
+          <a:spcPts val="10"/>
         </a:spcBef>
-        <a:buFont typeface="Arial"/>
+        <a:buFont typeface="Arial" panose="020B0604020202020204" pitchFamily="34" charset="0"/>
         <a:buChar char="•"/>
-        <a:defRPr sz="3200" kern="1200">
+        <a:defRPr sz="100" kern="1200">
           <a:solidFill>
             <a:schemeClr val="tx1"/>
           </a:solidFill>
@@ -2865,13 +3266,16 @@
           <a:cs typeface="+mn-cs"/>
         </a:defRPr>
       </a:lvl1pPr>
-      <a:lvl2pPr marL="742950" indent="-285750" algn="l" defTabSz="457200" rtl="0" eaLnBrk="1" latinLnBrk="0" hangingPunct="1">
+      <a:lvl2pPr marL="6856" indent="-2285" algn="l" defTabSz="9142" rtl="0" eaLnBrk="1" latinLnBrk="0" hangingPunct="1">
+        <a:lnSpc>
+          <a:spcPct val="90000"/>
+        </a:lnSpc>
         <a:spcBef>
-          <a:spcPct val="20000"/>
+          <a:spcPts val="5"/>
         </a:spcBef>
-        <a:buFont typeface="Arial"/>
-        <a:buChar char="–"/>
-        <a:defRPr sz="2800" kern="1200">
+        <a:buFont typeface="Arial" panose="020B0604020202020204" pitchFamily="34" charset="0"/>
+        <a:buChar char="•"/>
+        <a:defRPr sz="100" kern="1200">
           <a:solidFill>
             <a:schemeClr val="tx1"/>
           </a:solidFill>
@@ -2880,13 +3284,16 @@
           <a:cs typeface="+mn-cs"/>
         </a:defRPr>
       </a:lvl2pPr>
-      <a:lvl3pPr marL="1143000" indent="-228600" algn="l" defTabSz="457200" rtl="0" eaLnBrk="1" latinLnBrk="0" hangingPunct="1">
+      <a:lvl3pPr marL="11427" indent="-2285" algn="l" defTabSz="9142" rtl="0" eaLnBrk="1" latinLnBrk="0" hangingPunct="1">
+        <a:lnSpc>
+          <a:spcPct val="90000"/>
+        </a:lnSpc>
         <a:spcBef>
-          <a:spcPct val="20000"/>
+          <a:spcPts val="5"/>
         </a:spcBef>
-        <a:buFont typeface="Arial"/>
+        <a:buFont typeface="Arial" panose="020B0604020202020204" pitchFamily="34" charset="0"/>
         <a:buChar char="•"/>
-        <a:defRPr sz="2400" kern="1200">
+        <a:defRPr sz="100" kern="1200">
           <a:solidFill>
             <a:schemeClr val="tx1"/>
           </a:solidFill>
@@ -2895,13 +3302,16 @@
           <a:cs typeface="+mn-cs"/>
         </a:defRPr>
       </a:lvl3pPr>
-      <a:lvl4pPr marL="1600200" indent="-228600" algn="l" defTabSz="457200" rtl="0" eaLnBrk="1" latinLnBrk="0" hangingPunct="1">
+      <a:lvl4pPr marL="15998" indent="-2285" algn="l" defTabSz="9142" rtl="0" eaLnBrk="1" latinLnBrk="0" hangingPunct="1">
+        <a:lnSpc>
+          <a:spcPct val="90000"/>
+        </a:lnSpc>
         <a:spcBef>
-          <a:spcPct val="20000"/>
+          <a:spcPts val="5"/>
         </a:spcBef>
-        <a:buFont typeface="Arial"/>
-        <a:buChar char="–"/>
-        <a:defRPr sz="2000" kern="1200">
+        <a:buFont typeface="Arial" panose="020B0604020202020204" pitchFamily="34" charset="0"/>
+        <a:buChar char="•"/>
+        <a:defRPr sz="100" kern="1200">
           <a:solidFill>
             <a:schemeClr val="tx1"/>
           </a:solidFill>
@@ -2910,13 +3320,16 @@
           <a:cs typeface="+mn-cs"/>
         </a:defRPr>
       </a:lvl4pPr>
-      <a:lvl5pPr marL="2057400" indent="-228600" algn="l" defTabSz="457200" rtl="0" eaLnBrk="1" latinLnBrk="0" hangingPunct="1">
+      <a:lvl5pPr marL="20569" indent="-2285" algn="l" defTabSz="9142" rtl="0" eaLnBrk="1" latinLnBrk="0" hangingPunct="1">
+        <a:lnSpc>
+          <a:spcPct val="90000"/>
+        </a:lnSpc>
         <a:spcBef>
-          <a:spcPct val="20000"/>
+          <a:spcPts val="5"/>
         </a:spcBef>
-        <a:buFont typeface="Arial"/>
-        <a:buChar char="»"/>
-        <a:defRPr sz="2000" kern="1200">
+        <a:buFont typeface="Arial" panose="020B0604020202020204" pitchFamily="34" charset="0"/>
+        <a:buChar char="•"/>
+        <a:defRPr sz="100" kern="1200">
           <a:solidFill>
             <a:schemeClr val="tx1"/>
           </a:solidFill>
@@ -2925,13 +3338,16 @@
           <a:cs typeface="+mn-cs"/>
         </a:defRPr>
       </a:lvl5pPr>
-      <a:lvl6pPr marL="2514600" indent="-228600" algn="l" defTabSz="457200" rtl="0" eaLnBrk="1" latinLnBrk="0" hangingPunct="1">
+      <a:lvl6pPr marL="25140" indent="-2285" algn="l" defTabSz="9142" rtl="0" eaLnBrk="1" latinLnBrk="0" hangingPunct="1">
+        <a:lnSpc>
+          <a:spcPct val="90000"/>
+        </a:lnSpc>
         <a:spcBef>
-          <a:spcPct val="20000"/>
+          <a:spcPts val="5"/>
         </a:spcBef>
-        <a:buFont typeface="Arial"/>
+        <a:buFont typeface="Arial" panose="020B0604020202020204" pitchFamily="34" charset="0"/>
         <a:buChar char="•"/>
-        <a:defRPr sz="2000" kern="1200">
+        <a:defRPr sz="100" kern="1200">
           <a:solidFill>
             <a:schemeClr val="tx1"/>
           </a:solidFill>
@@ -2940,13 +3356,16 @@
           <a:cs typeface="+mn-cs"/>
         </a:defRPr>
       </a:lvl6pPr>
-      <a:lvl7pPr marL="2971800" indent="-228600" algn="l" defTabSz="457200" rtl="0" eaLnBrk="1" latinLnBrk="0" hangingPunct="1">
+      <a:lvl7pPr marL="29711" indent="-2285" algn="l" defTabSz="9142" rtl="0" eaLnBrk="1" latinLnBrk="0" hangingPunct="1">
+        <a:lnSpc>
+          <a:spcPct val="90000"/>
+        </a:lnSpc>
         <a:spcBef>
-          <a:spcPct val="20000"/>
+          <a:spcPts val="5"/>
         </a:spcBef>
-        <a:buFont typeface="Arial"/>
+        <a:buFont typeface="Arial" panose="020B0604020202020204" pitchFamily="34" charset="0"/>
         <a:buChar char="•"/>
-        <a:defRPr sz="2000" kern="1200">
+        <a:defRPr sz="100" kern="1200">
           <a:solidFill>
             <a:schemeClr val="tx1"/>
           </a:solidFill>
@@ -2955,13 +3374,16 @@
           <a:cs typeface="+mn-cs"/>
         </a:defRPr>
       </a:lvl7pPr>
-      <a:lvl8pPr marL="3429000" indent="-228600" algn="l" defTabSz="457200" rtl="0" eaLnBrk="1" latinLnBrk="0" hangingPunct="1">
+      <a:lvl8pPr marL="34281" indent="-2285" algn="l" defTabSz="9142" rtl="0" eaLnBrk="1" latinLnBrk="0" hangingPunct="1">
+        <a:lnSpc>
+          <a:spcPct val="90000"/>
+        </a:lnSpc>
         <a:spcBef>
-          <a:spcPct val="20000"/>
+          <a:spcPts val="5"/>
         </a:spcBef>
-        <a:buFont typeface="Arial"/>
+        <a:buFont typeface="Arial" panose="020B0604020202020204" pitchFamily="34" charset="0"/>
         <a:buChar char="•"/>
-        <a:defRPr sz="2000" kern="1200">
+        <a:defRPr sz="100" kern="1200">
           <a:solidFill>
             <a:schemeClr val="tx1"/>
           </a:solidFill>
@@ -2970,13 +3392,16 @@
           <a:cs typeface="+mn-cs"/>
         </a:defRPr>
       </a:lvl8pPr>
-      <a:lvl9pPr marL="3886200" indent="-228600" algn="l" defTabSz="457200" rtl="0" eaLnBrk="1" latinLnBrk="0" hangingPunct="1">
+      <a:lvl9pPr marL="38852" indent="-2285" algn="l" defTabSz="9142" rtl="0" eaLnBrk="1" latinLnBrk="0" hangingPunct="1">
+        <a:lnSpc>
+          <a:spcPct val="90000"/>
+        </a:lnSpc>
         <a:spcBef>
-          <a:spcPct val="20000"/>
+          <a:spcPts val="5"/>
         </a:spcBef>
-        <a:buFont typeface="Arial"/>
+        <a:buFont typeface="Arial" panose="020B0604020202020204" pitchFamily="34" charset="0"/>
         <a:buChar char="•"/>
-        <a:defRPr sz="2000" kern="1200">
+        <a:defRPr sz="100" kern="1200">
           <a:solidFill>
             <a:schemeClr val="tx1"/>
           </a:solidFill>
@@ -2990,8 +3415,8 @@
       <a:defPPr>
         <a:defRPr lang="en-US"/>
       </a:defPPr>
-      <a:lvl1pPr marL="0" algn="l" defTabSz="457200" rtl="0" eaLnBrk="1" latinLnBrk="0" hangingPunct="1">
-        <a:defRPr sz="1800" kern="1200">
+      <a:lvl1pPr marL="0" algn="l" defTabSz="9142" rtl="0" eaLnBrk="1" latinLnBrk="0" hangingPunct="1">
+        <a:defRPr sz="100" kern="1200">
           <a:solidFill>
             <a:schemeClr val="tx1"/>
           </a:solidFill>
@@ -3000,8 +3425,8 @@
           <a:cs typeface="+mn-cs"/>
         </a:defRPr>
       </a:lvl1pPr>
-      <a:lvl2pPr marL="457200" algn="l" defTabSz="457200" rtl="0" eaLnBrk="1" latinLnBrk="0" hangingPunct="1">
-        <a:defRPr sz="1800" kern="1200">
+      <a:lvl2pPr marL="4571" algn="l" defTabSz="9142" rtl="0" eaLnBrk="1" latinLnBrk="0" hangingPunct="1">
+        <a:defRPr sz="100" kern="1200">
           <a:solidFill>
             <a:schemeClr val="tx1"/>
           </a:solidFill>
@@ -3010,8 +3435,8 @@
           <a:cs typeface="+mn-cs"/>
         </a:defRPr>
       </a:lvl2pPr>
-      <a:lvl3pPr marL="914400" algn="l" defTabSz="457200" rtl="0" eaLnBrk="1" latinLnBrk="0" hangingPunct="1">
-        <a:defRPr sz="1800" kern="1200">
+      <a:lvl3pPr marL="9142" algn="l" defTabSz="9142" rtl="0" eaLnBrk="1" latinLnBrk="0" hangingPunct="1">
+        <a:defRPr sz="100" kern="1200">
           <a:solidFill>
             <a:schemeClr val="tx1"/>
           </a:solidFill>
@@ -3020,8 +3445,8 @@
           <a:cs typeface="+mn-cs"/>
         </a:defRPr>
       </a:lvl3pPr>
-      <a:lvl4pPr marL="1371600" algn="l" defTabSz="457200" rtl="0" eaLnBrk="1" latinLnBrk="0" hangingPunct="1">
-        <a:defRPr sz="1800" kern="1200">
+      <a:lvl4pPr marL="13713" algn="l" defTabSz="9142" rtl="0" eaLnBrk="1" latinLnBrk="0" hangingPunct="1">
+        <a:defRPr sz="100" kern="1200">
           <a:solidFill>
             <a:schemeClr val="tx1"/>
           </a:solidFill>
@@ -3030,8 +3455,8 @@
           <a:cs typeface="+mn-cs"/>
         </a:defRPr>
       </a:lvl4pPr>
-      <a:lvl5pPr marL="1828800" algn="l" defTabSz="457200" rtl="0" eaLnBrk="1" latinLnBrk="0" hangingPunct="1">
-        <a:defRPr sz="1800" kern="1200">
+      <a:lvl5pPr marL="18283" algn="l" defTabSz="9142" rtl="0" eaLnBrk="1" latinLnBrk="0" hangingPunct="1">
+        <a:defRPr sz="100" kern="1200">
           <a:solidFill>
             <a:schemeClr val="tx1"/>
           </a:solidFill>
@@ -3040,8 +3465,8 @@
           <a:cs typeface="+mn-cs"/>
         </a:defRPr>
       </a:lvl5pPr>
-      <a:lvl6pPr marL="2286000" algn="l" defTabSz="457200" rtl="0" eaLnBrk="1" latinLnBrk="0" hangingPunct="1">
-        <a:defRPr sz="1800" kern="1200">
+      <a:lvl6pPr marL="22854" algn="l" defTabSz="9142" rtl="0" eaLnBrk="1" latinLnBrk="0" hangingPunct="1">
+        <a:defRPr sz="100" kern="1200">
           <a:solidFill>
             <a:schemeClr val="tx1"/>
           </a:solidFill>
@@ -3050,8 +3475,8 @@
           <a:cs typeface="+mn-cs"/>
         </a:defRPr>
       </a:lvl6pPr>
-      <a:lvl7pPr marL="2743200" algn="l" defTabSz="457200" rtl="0" eaLnBrk="1" latinLnBrk="0" hangingPunct="1">
-        <a:defRPr sz="1800" kern="1200">
+      <a:lvl7pPr marL="27425" algn="l" defTabSz="9142" rtl="0" eaLnBrk="1" latinLnBrk="0" hangingPunct="1">
+        <a:defRPr sz="100" kern="1200">
           <a:solidFill>
             <a:schemeClr val="tx1"/>
           </a:solidFill>
@@ -3060,8 +3485,8 @@
           <a:cs typeface="+mn-cs"/>
         </a:defRPr>
       </a:lvl7pPr>
-      <a:lvl8pPr marL="3200400" algn="l" defTabSz="457200" rtl="0" eaLnBrk="1" latinLnBrk="0" hangingPunct="1">
-        <a:defRPr sz="1800" kern="1200">
+      <a:lvl8pPr marL="31996" algn="l" defTabSz="9142" rtl="0" eaLnBrk="1" latinLnBrk="0" hangingPunct="1">
+        <a:defRPr sz="100" kern="1200">
           <a:solidFill>
             <a:schemeClr val="tx1"/>
           </a:solidFill>
@@ -3070,8 +3495,8 @@
           <a:cs typeface="+mn-cs"/>
         </a:defRPr>
       </a:lvl8pPr>
-      <a:lvl9pPr marL="3657600" algn="l" defTabSz="457200" rtl="0" eaLnBrk="1" latinLnBrk="0" hangingPunct="1">
-        <a:defRPr sz="1800" kern="1200">
+      <a:lvl9pPr marL="36567" algn="l" defTabSz="9142" rtl="0" eaLnBrk="1" latinLnBrk="0" hangingPunct="1">
+        <a:defRPr sz="100" kern="1200">
           <a:solidFill>
             <a:schemeClr val="tx1"/>
           </a:solidFill>
@@ -3086,7 +3511,7 @@
 </file>
 
 <file path=ppt/slides/slide1.xml><?xml version="1.0" encoding="utf-8"?>
-<p:sld xmlns:a="http://schemas.openxmlformats.org/drawingml/2006/main" xmlns:p="http://schemas.openxmlformats.org/presentationml/2006/main" xmlns:r="http://schemas.openxmlformats.org/officeDocument/2006/relationships">
+<p:sld xmlns:a="http://schemas.openxmlformats.org/drawingml/2006/main" xmlns:r="http://schemas.openxmlformats.org/officeDocument/2006/relationships" xmlns:p="http://schemas.openxmlformats.org/presentationml/2006/main">
   <p:cSld>
     <p:spTree>
       <p:nvGrpSpPr>
@@ -3094,10 +3519,23 @@
         <p:cNvGrpSpPr/>
         <p:nvPr/>
       </p:nvGrpSpPr>
-      <p:grpSpPr/>
-      <p:sp>
-        <p:nvSpPr>
-          <p:cNvPr id="2" name="Title 1"/>
+      <p:grpSpPr>
+        <a:xfrm>
+          <a:off x="0" y="0"/>
+          <a:ext cx="0" cy="0"/>
+          <a:chOff x="0" y="0"/>
+          <a:chExt cx="0" cy="0"/>
+        </a:xfrm>
+      </p:grpSpPr>
+      <p:sp>
+        <p:nvSpPr>
+          <p:cNvPr id="2" name="Title 1">
+            <a:extLst>
+              <a:ext uri="{FF2B5EF4-FFF2-40B4-BE49-F238E27FC236}">
+                <a16:creationId xmlns:a16="http://schemas.microsoft.com/office/drawing/2014/main" id="{CFA98851-C0DD-DF70-FF8D-4A1B995497F1}"/>
+              </a:ext>
+            </a:extLst>
+          </p:cNvPr>
           <p:cNvSpPr>
             <a:spLocks noGrp="1"/>
           </p:cNvSpPr>
@@ -3111,68 +3549,64 @@
           <a:lstStyle/>
           <a:p>
             <a:r>
-              <a:t>Auditing Stored Procedures &amp; Database Objects</a:t>
-            </a:r>
-          </a:p>
-        </p:txBody>
-      </p:sp>
-      <p:sp>
-        <p:nvSpPr>
-          <p:cNvPr id="3" name="Content Placeholder 2"/>
-          <p:cNvSpPr>
-            <a:spLocks noGrp="1"/>
-          </p:cNvSpPr>
-          <p:nvPr>
-            <p:ph idx="1"/>
-          </p:nvPr>
-        </p:nvSpPr>
-        <p:spPr/>
-        <p:txBody>
-          <a:bodyPr/>
-          <a:lstStyle/>
-          <a:p>
-            <a:pPr>
-              <a:defRPr sz="2400"/>
-            </a:pPr>
-            <a:r>
+              <a:rPr lang="en-US"/>
+              <a:t>Blue Team: Auditing Stored Procedures &amp; Database Objects</a:t>
+            </a:r>
+          </a:p>
+        </p:txBody>
+      </p:sp>
+      <p:sp>
+        <p:nvSpPr>
+          <p:cNvPr id="3" name="Text Placeholder 2">
+            <a:extLst>
+              <a:ext uri="{FF2B5EF4-FFF2-40B4-BE49-F238E27FC236}">
+                <a16:creationId xmlns:a16="http://schemas.microsoft.com/office/drawing/2014/main" id="{6B66B186-E24E-0619-B092-A615A9AA6883}"/>
+              </a:ext>
+            </a:extLst>
+          </p:cNvPr>
+          <p:cNvSpPr>
+            <a:spLocks noGrp="1"/>
+          </p:cNvSpPr>
+          <p:nvPr>
+            <p:ph type="body" idx="1"/>
+          </p:nvPr>
+        </p:nvSpPr>
+        <p:spPr/>
+        <p:txBody>
+          <a:bodyPr/>
+          <a:lstStyle/>
+          <a:p>
+            <a:r>
+              <a:rPr lang="en-US"/>
               <a:t>CY376 — Network Monitoring, Security and Auditing</a:t>
             </a:r>
           </a:p>
           <a:p>
-            <a:pPr>
-              <a:defRPr sz="2400"/>
-            </a:pPr>
-            <a:r>
-              <a:t>Blue Team End-of-Semester Project</a:t>
-            </a:r>
-          </a:p>
-          <a:p>
-            <a:pPr>
-              <a:defRPr sz="2400"/>
-            </a:pPr>
-            <a:r>
-              <a:t>Veronica Okyere | FCM.41,018.206.23</a:t>
-            </a:r>
-          </a:p>
-          <a:p>
-            <a:pPr>
-              <a:defRPr sz="2400"/>
-            </a:pPr>
-            <a:r>
-              <a:t>Problem: unsafe procedures, weak permissions, missing audit</a:t>
-            </a:r>
-          </a:p>
-          <a:p>
-            <a:pPr>
-              <a:defRPr sz="2400"/>
-            </a:pPr>
-            <a:r>
-              <a:t>Goal: detect → document → remediate → verify</a:t>
+            <a:r>
+              <a:rPr lang="en-US"/>
+              <a:t>Veronica Okyere</a:t>
+            </a:r>
+          </a:p>
+          <a:p>
+            <a:r>
+              <a:rPr lang="en-US"/>
+              <a:t>Index: FCM.41.018.206.23</a:t>
+            </a:r>
+          </a:p>
+          <a:p>
+            <a:r>
+              <a:rPr lang="en-US"/>
+              <a:t>GitHub: cy-vokyere3623-hash/blue-team-stored-procedure-audit</a:t>
             </a:r>
           </a:p>
         </p:txBody>
       </p:sp>
     </p:spTree>
+    <p:extLst>
+      <p:ext uri="{BB962C8B-B14F-4D97-AF65-F5344CB8AC3E}">
+        <p14:creationId xmlns:p14="http://schemas.microsoft.com/office/powerpoint/2010/main" val="231896549"/>
+      </p:ext>
+    </p:extLst>
   </p:cSld>
   <p:clrMapOvr>
     <a:masterClrMapping/>
@@ -3181,7 +3615,7 @@
 </file>
 
 <file path=ppt/slides/slide2.xml><?xml version="1.0" encoding="utf-8"?>
-<p:sld xmlns:a="http://schemas.openxmlformats.org/drawingml/2006/main" xmlns:p="http://schemas.openxmlformats.org/presentationml/2006/main" xmlns:r="http://schemas.openxmlformats.org/officeDocument/2006/relationships">
+<p:sld xmlns:a="http://schemas.openxmlformats.org/drawingml/2006/main" xmlns:r="http://schemas.openxmlformats.org/officeDocument/2006/relationships" xmlns:p="http://schemas.openxmlformats.org/presentationml/2006/main">
   <p:cSld>
     <p:spTree>
       <p:nvGrpSpPr>
@@ -3189,10 +3623,23 @@
         <p:cNvGrpSpPr/>
         <p:nvPr/>
       </p:nvGrpSpPr>
-      <p:grpSpPr/>
-      <p:sp>
-        <p:nvSpPr>
-          <p:cNvPr id="2" name="Title 1"/>
+      <p:grpSpPr>
+        <a:xfrm>
+          <a:off x="0" y="0"/>
+          <a:ext cx="0" cy="0"/>
+          <a:chOff x="0" y="0"/>
+          <a:chExt cx="0" cy="0"/>
+        </a:xfrm>
+      </p:grpSpPr>
+      <p:sp>
+        <p:nvSpPr>
+          <p:cNvPr id="2" name="Title 1">
+            <a:extLst>
+              <a:ext uri="{FF2B5EF4-FFF2-40B4-BE49-F238E27FC236}">
+                <a16:creationId xmlns:a16="http://schemas.microsoft.com/office/drawing/2014/main" id="{AE367EBF-09F9-D09D-C84D-81BC393389A3}"/>
+              </a:ext>
+            </a:extLst>
+          </p:cNvPr>
           <p:cNvSpPr>
             <a:spLocks noGrp="1"/>
           </p:cNvSpPr>
@@ -3206,6 +3653,7 @@
           <a:lstStyle/>
           <a:p>
             <a:r>
+              <a:rPr lang="en-US"/>
               <a:t>Lab Setup</a:t>
             </a:r>
           </a:p>
@@ -3213,61 +3661,56 @@
       </p:sp>
       <p:sp>
         <p:nvSpPr>
-          <p:cNvPr id="3" name="Content Placeholder 2"/>
-          <p:cNvSpPr>
-            <a:spLocks noGrp="1"/>
-          </p:cNvSpPr>
-          <p:nvPr>
-            <p:ph idx="1"/>
-          </p:nvPr>
-        </p:nvSpPr>
-        <p:spPr/>
-        <p:txBody>
-          <a:bodyPr/>
-          <a:lstStyle/>
-          <a:p>
-            <a:pPr>
-              <a:defRPr sz="2400"/>
-            </a:pPr>
-            <a:r>
-              <a:t>SQL Server 2022 Express: localhost\SQLEXPRESS</a:t>
-            </a:r>
-          </a:p>
-          <a:p>
-            <a:pPr>
-              <a:defRPr sz="2400"/>
-            </a:pPr>
-            <a:r>
+          <p:cNvPr id="3" name="Text Placeholder 2">
+            <a:extLst>
+              <a:ext uri="{FF2B5EF4-FFF2-40B4-BE49-F238E27FC236}">
+                <a16:creationId xmlns:a16="http://schemas.microsoft.com/office/drawing/2014/main" id="{CD12E296-8DDF-3B34-039F-255EB9D38FA3}"/>
+              </a:ext>
+            </a:extLst>
+          </p:cNvPr>
+          <p:cNvSpPr>
+            <a:spLocks noGrp="1"/>
+          </p:cNvSpPr>
+          <p:nvPr>
+            <p:ph type="body" idx="1"/>
+          </p:nvPr>
+        </p:nvSpPr>
+        <p:spPr/>
+        <p:txBody>
+          <a:bodyPr/>
+          <a:lstStyle/>
+          <a:p>
+            <a:r>
+              <a:rPr lang="en-US"/>
+              <a:t>SQL Server 2022 Express — localhost\SQLEXPRESS</a:t>
+            </a:r>
+          </a:p>
+          <a:p>
+            <a:r>
+              <a:rPr lang="en-US"/>
               <a:t>SSMS 21 + AdventureWorks2022</a:t>
             </a:r>
           </a:p>
           <a:p>
-            <a:pPr>
-              <a:defRPr sz="2400"/>
-            </a:pPr>
-            <a:r>
-              <a:t>Isolated academic lab only</a:t>
-            </a:r>
-          </a:p>
-          <a:p>
-            <a:pPr>
-              <a:defRPr sz="2400"/>
-            </a:pPr>
-            <a:r>
-              <a:t>Windows Authentication for auditor access</a:t>
-            </a:r>
-          </a:p>
-          <a:p>
-            <a:pPr>
-              <a:defRPr sz="2400"/>
-            </a:pPr>
-            <a:r>
-              <a:t>No unauthorized external targets</a:t>
+            <a:r>
+              <a:rPr lang="en-US"/>
+              <a:t>Isolated lab only — no production targets</a:t>
+            </a:r>
+          </a:p>
+          <a:p>
+            <a:r>
+              <a:rPr lang="en-US"/>
+              <a:t>Intentionally vulnerable procedures for blue-team practice</a:t>
             </a:r>
           </a:p>
         </p:txBody>
       </p:sp>
     </p:spTree>
+    <p:extLst>
+      <p:ext uri="{BB962C8B-B14F-4D97-AF65-F5344CB8AC3E}">
+        <p14:creationId xmlns:p14="http://schemas.microsoft.com/office/powerpoint/2010/main" val="3123040877"/>
+      </p:ext>
+    </p:extLst>
   </p:cSld>
   <p:clrMapOvr>
     <a:masterClrMapping/>
@@ -3276,7 +3719,7 @@
 </file>
 
 <file path=ppt/slides/slide3.xml><?xml version="1.0" encoding="utf-8"?>
-<p:sld xmlns:a="http://schemas.openxmlformats.org/drawingml/2006/main" xmlns:p="http://schemas.openxmlformats.org/presentationml/2006/main" xmlns:r="http://schemas.openxmlformats.org/officeDocument/2006/relationships">
+<p:sld xmlns:a="http://schemas.openxmlformats.org/drawingml/2006/main" xmlns:r="http://schemas.openxmlformats.org/officeDocument/2006/relationships" xmlns:p="http://schemas.openxmlformats.org/presentationml/2006/main">
   <p:cSld>
     <p:spTree>
       <p:nvGrpSpPr>
@@ -3284,10 +3727,23 @@
         <p:cNvGrpSpPr/>
         <p:nvPr/>
       </p:nvGrpSpPr>
-      <p:grpSpPr/>
-      <p:sp>
-        <p:nvSpPr>
-          <p:cNvPr id="2" name="Title 1"/>
+      <p:grpSpPr>
+        <a:xfrm>
+          <a:off x="0" y="0"/>
+          <a:ext cx="0" cy="0"/>
+          <a:chOff x="0" y="0"/>
+          <a:chExt cx="0" cy="0"/>
+        </a:xfrm>
+      </p:grpSpPr>
+      <p:sp>
+        <p:nvSpPr>
+          <p:cNvPr id="2" name="Title 1">
+            <a:extLst>
+              <a:ext uri="{FF2B5EF4-FFF2-40B4-BE49-F238E27FC236}">
+                <a16:creationId xmlns:a16="http://schemas.microsoft.com/office/drawing/2014/main" id="{F1A8E0E5-3EEA-82DF-BD74-7C2FA54468F5}"/>
+              </a:ext>
+            </a:extLst>
+          </p:cNvPr>
           <p:cNvSpPr>
             <a:spLocks noGrp="1"/>
           </p:cNvSpPr>
@@ -3301,6 +3757,7 @@
           <a:lstStyle/>
           <a:p>
             <a:r>
+              <a:rPr lang="en-US"/>
               <a:t>Methodology</a:t>
             </a:r>
           </a:p>
@@ -3308,61 +3765,68 @@
       </p:sp>
       <p:sp>
         <p:nvSpPr>
-          <p:cNvPr id="3" name="Content Placeholder 2"/>
-          <p:cNvSpPr>
-            <a:spLocks noGrp="1"/>
-          </p:cNvSpPr>
-          <p:nvPr>
-            <p:ph idx="1"/>
-          </p:nvPr>
-        </p:nvSpPr>
-        <p:spPr/>
-        <p:txBody>
-          <a:bodyPr/>
-          <a:lstStyle/>
-          <a:p>
-            <a:pPr>
-              <a:defRPr sz="2400"/>
-            </a:pPr>
-            <a:r>
-              <a:t>1. Prepare environment</a:t>
-            </a:r>
-          </a:p>
-          <a:p>
-            <a:pPr>
-              <a:defRPr sz="2400"/>
-            </a:pPr>
-            <a:r>
-              <a:t>2. Seed vulnerable procedures</a:t>
-            </a:r>
-          </a:p>
-          <a:p>
-            <a:pPr>
-              <a:defRPr sz="2400"/>
-            </a:pPr>
-            <a:r>
-              <a:t>3. Detect with audit scripts 01–05</a:t>
-            </a:r>
-          </a:p>
-          <a:p>
-            <a:pPr>
-              <a:defRPr sz="2400"/>
-            </a:pPr>
-            <a:r>
-              <a:t>4. Document findings with severity</a:t>
-            </a:r>
-          </a:p>
-          <a:p>
-            <a:pPr>
-              <a:defRPr sz="2400"/>
-            </a:pPr>
-            <a:r>
-              <a:t>5. Remediate and re-verify</a:t>
+          <p:cNvPr id="3" name="Text Placeholder 2">
+            <a:extLst>
+              <a:ext uri="{FF2B5EF4-FFF2-40B4-BE49-F238E27FC236}">
+                <a16:creationId xmlns:a16="http://schemas.microsoft.com/office/drawing/2014/main" id="{DC197AEE-C999-8B47-C5F5-21D42179C5F6}"/>
+              </a:ext>
+            </a:extLst>
+          </p:cNvPr>
+          <p:cNvSpPr>
+            <a:spLocks noGrp="1"/>
+          </p:cNvSpPr>
+          <p:nvPr>
+            <p:ph type="body" idx="1"/>
+          </p:nvPr>
+        </p:nvSpPr>
+        <p:spPr/>
+        <p:txBody>
+          <a:bodyPr/>
+          <a:lstStyle/>
+          <a:p>
+            <a:r>
+              <a:rPr lang="en-US"/>
+              <a:t>1. Inventory database modules</a:t>
+            </a:r>
+          </a:p>
+          <a:p>
+            <a:r>
+              <a:rPr lang="en-US"/>
+              <a:t>2. Hunt dangerous code patterns (OWASP / STIG)</a:t>
+            </a:r>
+          </a:p>
+          <a:p>
+            <a:r>
+              <a:rPr lang="en-US"/>
+              <a:t>3. Review permissions (public / EXECUTE)</a:t>
+            </a:r>
+          </a:p>
+          <a:p>
+            <a:r>
+              <a:rPr lang="en-US"/>
+              <a:t>4. Check CIS surface-area configuration</a:t>
+            </a:r>
+          </a:p>
+          <a:p>
+            <a:r>
+              <a:rPr lang="en-US"/>
+              <a:t>5. Verify SQL Server Audit controls</a:t>
+            </a:r>
+          </a:p>
+          <a:p>
+            <a:r>
+              <a:rPr lang="en-US"/>
+              <a:t>6. Remediate and re-verify</a:t>
             </a:r>
           </a:p>
         </p:txBody>
       </p:sp>
     </p:spTree>
+    <p:extLst>
+      <p:ext uri="{BB962C8B-B14F-4D97-AF65-F5344CB8AC3E}">
+        <p14:creationId xmlns:p14="http://schemas.microsoft.com/office/powerpoint/2010/main" val="1650157091"/>
+      </p:ext>
+    </p:extLst>
   </p:cSld>
   <p:clrMapOvr>
     <a:masterClrMapping/>
@@ -3371,7 +3835,7 @@
 </file>
 
 <file path=ppt/slides/slide4.xml><?xml version="1.0" encoding="utf-8"?>
-<p:sld xmlns:a="http://schemas.openxmlformats.org/drawingml/2006/main" xmlns:p="http://schemas.openxmlformats.org/presentationml/2006/main" xmlns:r="http://schemas.openxmlformats.org/officeDocument/2006/relationships">
+<p:sld xmlns:a="http://schemas.openxmlformats.org/drawingml/2006/main" xmlns:r="http://schemas.openxmlformats.org/officeDocument/2006/relationships" xmlns:p="http://schemas.openxmlformats.org/presentationml/2006/main">
   <p:cSld>
     <p:spTree>
       <p:nvGrpSpPr>
@@ -3379,10 +3843,23 @@
         <p:cNvGrpSpPr/>
         <p:nvPr/>
       </p:nvGrpSpPr>
-      <p:grpSpPr/>
-      <p:sp>
-        <p:nvSpPr>
-          <p:cNvPr id="2" name="Title 1"/>
+      <p:grpSpPr>
+        <a:xfrm>
+          <a:off x="0" y="0"/>
+          <a:ext cx="0" cy="0"/>
+          <a:chOff x="0" y="0"/>
+          <a:chExt cx="0" cy="0"/>
+        </a:xfrm>
+      </p:grpSpPr>
+      <p:sp>
+        <p:nvSpPr>
+          <p:cNvPr id="2" name="Title 1">
+            <a:extLst>
+              <a:ext uri="{FF2B5EF4-FFF2-40B4-BE49-F238E27FC236}">
+                <a16:creationId xmlns:a16="http://schemas.microsoft.com/office/drawing/2014/main" id="{43AE956A-0029-93CA-CD61-826063197E16}"/>
+              </a:ext>
+            </a:extLst>
+          </p:cNvPr>
           <p:cNvSpPr>
             <a:spLocks noGrp="1"/>
           </p:cNvSpPr>
@@ -3396,68 +3873,64 @@
           <a:lstStyle/>
           <a:p>
             <a:r>
-              <a:t>What Was Built</a:t>
-            </a:r>
-          </a:p>
-        </p:txBody>
-      </p:sp>
-      <p:sp>
-        <p:nvSpPr>
-          <p:cNvPr id="3" name="Content Placeholder 2"/>
-          <p:cNvSpPr>
-            <a:spLocks noGrp="1"/>
-          </p:cNvSpPr>
-          <p:nvPr>
-            <p:ph idx="1"/>
-          </p:nvPr>
-        </p:nvSpPr>
-        <p:spPr/>
-        <p:txBody>
-          <a:bodyPr/>
-          <a:lstStyle/>
-          <a:p>
-            <a:pPr>
-              <a:defRPr sz="2400"/>
-            </a:pPr>
-            <a:r>
-              <a:t>lab/setup-vulnerable-procs.sql</a:t>
-            </a:r>
-          </a:p>
-          <a:p>
-            <a:pPr>
-              <a:defRPr sz="2400"/>
-            </a:pPr>
-            <a:r>
-              <a:t>scripts/01-inventory.sql … 05-audit-check.sql</a:t>
-            </a:r>
-          </a:p>
-          <a:p>
-            <a:pPr>
-              <a:defRPr sz="2400"/>
-            </a:pPr>
-            <a:r>
-              <a:t>lab/remediate-findings.sql</a:t>
-            </a:r>
-          </a:p>
-          <a:p>
-            <a:pPr>
-              <a:defRPr sz="2400"/>
-            </a:pPr>
-            <a:r>
-              <a:t>SQL Server Audit: BlueTeamLabAudit</a:t>
-            </a:r>
-          </a:p>
-          <a:p>
-            <a:pPr>
-              <a:defRPr sz="2400"/>
-            </a:pPr>
-            <a:r>
-              <a:t>Findings sheet + final report package</a:t>
+              <a:rPr lang="en-US"/>
+              <a:t>Critical Findings</a:t>
+            </a:r>
+          </a:p>
+        </p:txBody>
+      </p:sp>
+      <p:sp>
+        <p:nvSpPr>
+          <p:cNvPr id="3" name="Text Placeholder 2">
+            <a:extLst>
+              <a:ext uri="{FF2B5EF4-FFF2-40B4-BE49-F238E27FC236}">
+                <a16:creationId xmlns:a16="http://schemas.microsoft.com/office/drawing/2014/main" id="{EA7A356B-E021-8E3E-F83C-06A98012A261}"/>
+              </a:ext>
+            </a:extLst>
+          </p:cNvPr>
+          <p:cNvSpPr>
+            <a:spLocks noGrp="1"/>
+          </p:cNvSpPr>
+          <p:nvPr>
+            <p:ph type="body" idx="1"/>
+          </p:nvPr>
+        </p:nvSpPr>
+        <p:spPr/>
+        <p:txBody>
+          <a:bodyPr/>
+          <a:lstStyle/>
+          <a:p>
+            <a:r>
+              <a:rPr lang="en-US"/>
+              <a:t>F-001: SQL injection via dynamic SQL concatenation</a:t>
+            </a:r>
+          </a:p>
+          <a:p>
+            <a:r>
+              <a:rPr lang="en-US"/>
+              <a:t>F-003: xp_cmdshell wrapper procedure</a:t>
+            </a:r>
+          </a:p>
+          <a:p>
+            <a:r>
+              <a:rPr lang="en-US"/>
+              <a:t>Evidence: before screenshots in evidence/screenshots</a:t>
+            </a:r>
+          </a:p>
+          <a:p>
+            <a:r>
+              <a:rPr lang="en-US"/>
+              <a:t>Standards: OWASP SQLi + CIS SQL Server</a:t>
             </a:r>
           </a:p>
         </p:txBody>
       </p:sp>
     </p:spTree>
+    <p:extLst>
+      <p:ext uri="{BB962C8B-B14F-4D97-AF65-F5344CB8AC3E}">
+        <p14:creationId xmlns:p14="http://schemas.microsoft.com/office/powerpoint/2010/main" val="1940768961"/>
+      </p:ext>
+    </p:extLst>
   </p:cSld>
   <p:clrMapOvr>
     <a:masterClrMapping/>
@@ -3466,7 +3939,7 @@
 </file>
 
 <file path=ppt/slides/slide5.xml><?xml version="1.0" encoding="utf-8"?>
-<p:sld xmlns:a="http://schemas.openxmlformats.org/drawingml/2006/main" xmlns:p="http://schemas.openxmlformats.org/presentationml/2006/main" xmlns:r="http://schemas.openxmlformats.org/officeDocument/2006/relationships">
+<p:sld xmlns:a="http://schemas.openxmlformats.org/drawingml/2006/main" xmlns:r="http://schemas.openxmlformats.org/officeDocument/2006/relationships" xmlns:p="http://schemas.openxmlformats.org/presentationml/2006/main">
   <p:cSld>
     <p:spTree>
       <p:nvGrpSpPr>
@@ -3474,10 +3947,23 @@
         <p:cNvGrpSpPr/>
         <p:nvPr/>
       </p:nvGrpSpPr>
-      <p:grpSpPr/>
-      <p:sp>
-        <p:nvSpPr>
-          <p:cNvPr id="2" name="Title 1"/>
+      <p:grpSpPr>
+        <a:xfrm>
+          <a:off x="0" y="0"/>
+          <a:ext cx="0" cy="0"/>
+          <a:chOff x="0" y="0"/>
+          <a:chExt cx="0" cy="0"/>
+        </a:xfrm>
+      </p:grpSpPr>
+      <p:sp>
+        <p:nvSpPr>
+          <p:cNvPr id="2" name="Title 1">
+            <a:extLst>
+              <a:ext uri="{FF2B5EF4-FFF2-40B4-BE49-F238E27FC236}">
+                <a16:creationId xmlns:a16="http://schemas.microsoft.com/office/drawing/2014/main" id="{F3CADD82-9265-53E1-995B-633A39E61976}"/>
+              </a:ext>
+            </a:extLst>
+          </p:cNvPr>
           <p:cNvSpPr>
             <a:spLocks noGrp="1"/>
           </p:cNvSpPr>
@@ -3491,68 +3977,64 @@
           <a:lstStyle/>
           <a:p>
             <a:r>
-              <a:t>Critical &amp; High Findings</a:t>
-            </a:r>
-          </a:p>
-        </p:txBody>
-      </p:sp>
-      <p:sp>
-        <p:nvSpPr>
-          <p:cNvPr id="3" name="Content Placeholder 2"/>
-          <p:cNvSpPr>
-            <a:spLocks noGrp="1"/>
-          </p:cNvSpPr>
-          <p:nvPr>
-            <p:ph idx="1"/>
-          </p:nvPr>
-        </p:nvSpPr>
-        <p:spPr/>
-        <p:txBody>
-          <a:bodyPr/>
-          <a:lstStyle/>
-          <a:p>
-            <a:pPr>
-              <a:defRPr sz="2400"/>
-            </a:pPr>
-            <a:r>
-              <a:t>F-001 Critical: SQL injection via dynamic SQL</a:t>
-            </a:r>
-          </a:p>
-          <a:p>
-            <a:pPr>
-              <a:defRPr sz="2400"/>
-            </a:pPr>
-            <a:r>
+              <a:rPr lang="en-US"/>
+              <a:t>High / Medium / Low Findings</a:t>
+            </a:r>
+          </a:p>
+        </p:txBody>
+      </p:sp>
+      <p:sp>
+        <p:nvSpPr>
+          <p:cNvPr id="3" name="Text Placeholder 2">
+            <a:extLst>
+              <a:ext uri="{FF2B5EF4-FFF2-40B4-BE49-F238E27FC236}">
+                <a16:creationId xmlns:a16="http://schemas.microsoft.com/office/drawing/2014/main" id="{5031F14C-173F-C7B1-8074-F731F342B23A}"/>
+              </a:ext>
+            </a:extLst>
+          </p:cNvPr>
+          <p:cNvSpPr>
+            <a:spLocks noGrp="1"/>
+          </p:cNvSpPr>
+          <p:nvPr>
+            <p:ph type="body" idx="1"/>
+          </p:nvPr>
+        </p:nvSpPr>
+        <p:spPr/>
+        <p:txBody>
+          <a:bodyPr/>
+          <a:lstStyle/>
+          <a:p>
+            <a:r>
+              <a:rPr lang="en-US"/>
               <a:t>F-002 High: EXECUTE AS OWNER privilege escalation</a:t>
             </a:r>
           </a:p>
           <a:p>
-            <a:pPr>
-              <a:defRPr sz="2400"/>
-            </a:pPr>
-            <a:r>
-              <a:t>F-003 Critical: xp_cmdshell wrapper</a:t>
-            </a:r>
-          </a:p>
-          <a:p>
-            <a:pPr>
-              <a:defRPr sz="2400"/>
-            </a:pPr>
-            <a:r>
+            <a:r>
+              <a:rPr lang="en-US"/>
               <a:t>F-004 High: EXECUTE granted to public</a:t>
             </a:r>
           </a:p>
           <a:p>
-            <a:pPr>
-              <a:defRPr sz="2400"/>
-            </a:pPr>
-            <a:r>
-              <a:t>Evidence: code-pattern + permission audits</a:t>
+            <a:r>
+              <a:rPr lang="en-US"/>
+              <a:t>F-005 Medium: SQL Server Audit missing</a:t>
+            </a:r>
+          </a:p>
+          <a:p>
+            <a:r>
+              <a:rPr lang="en-US"/>
+              <a:t>F-006 Low: remote access enabled</a:t>
             </a:r>
           </a:p>
         </p:txBody>
       </p:sp>
     </p:spTree>
+    <p:extLst>
+      <p:ext uri="{BB962C8B-B14F-4D97-AF65-F5344CB8AC3E}">
+        <p14:creationId xmlns:p14="http://schemas.microsoft.com/office/powerpoint/2010/main" val="2725804343"/>
+      </p:ext>
+    </p:extLst>
   </p:cSld>
   <p:clrMapOvr>
     <a:masterClrMapping/>
@@ -3561,7 +4043,7 @@
 </file>
 
 <file path=ppt/slides/slide6.xml><?xml version="1.0" encoding="utf-8"?>
-<p:sld xmlns:a="http://schemas.openxmlformats.org/drawingml/2006/main" xmlns:p="http://schemas.openxmlformats.org/presentationml/2006/main" xmlns:r="http://schemas.openxmlformats.org/officeDocument/2006/relationships">
+<p:sld xmlns:a="http://schemas.openxmlformats.org/drawingml/2006/main" xmlns:r="http://schemas.openxmlformats.org/officeDocument/2006/relationships" xmlns:p="http://schemas.openxmlformats.org/presentationml/2006/main">
   <p:cSld>
     <p:spTree>
       <p:nvGrpSpPr>
@@ -3569,10 +4051,23 @@
         <p:cNvGrpSpPr/>
         <p:nvPr/>
       </p:nvGrpSpPr>
-      <p:grpSpPr/>
-      <p:sp>
-        <p:nvSpPr>
-          <p:cNvPr id="2" name="Title 1"/>
+      <p:grpSpPr>
+        <a:xfrm>
+          <a:off x="0" y="0"/>
+          <a:ext cx="0" cy="0"/>
+          <a:chOff x="0" y="0"/>
+          <a:chExt cx="0" cy="0"/>
+        </a:xfrm>
+      </p:grpSpPr>
+      <p:sp>
+        <p:nvSpPr>
+          <p:cNvPr id="2" name="Title 1">
+            <a:extLst>
+              <a:ext uri="{FF2B5EF4-FFF2-40B4-BE49-F238E27FC236}">
+                <a16:creationId xmlns:a16="http://schemas.microsoft.com/office/drawing/2014/main" id="{1E9359ED-74BB-3F99-F14F-F4D2D6CE86A8}"/>
+              </a:ext>
+            </a:extLst>
+          </p:cNvPr>
           <p:cNvSpPr>
             <a:spLocks noGrp="1"/>
           </p:cNvSpPr>
@@ -3586,68 +4081,70 @@
           <a:lstStyle/>
           <a:p>
             <a:r>
-              <a:t>Medium/Low Findings &amp; Positives</a:t>
-            </a:r>
-          </a:p>
-        </p:txBody>
-      </p:sp>
-      <p:sp>
-        <p:nvSpPr>
-          <p:cNvPr id="3" name="Content Placeholder 2"/>
-          <p:cNvSpPr>
-            <a:spLocks noGrp="1"/>
-          </p:cNvSpPr>
-          <p:nvPr>
-            <p:ph idx="1"/>
-          </p:nvPr>
-        </p:nvSpPr>
-        <p:spPr/>
-        <p:txBody>
-          <a:bodyPr/>
-          <a:lstStyle/>
-          <a:p>
-            <a:pPr>
-              <a:defRPr sz="2400"/>
-            </a:pPr>
-            <a:r>
-              <a:t>F-005 Medium: SQL Server Audit missing</a:t>
-            </a:r>
-          </a:p>
-          <a:p>
-            <a:pPr>
-              <a:defRPr sz="2400"/>
-            </a:pPr>
-            <a:r>
-              <a:t>F-006 Low: remote access enabled</a:t>
-            </a:r>
-          </a:p>
-          <a:p>
-            <a:pPr>
-              <a:defRPr sz="2400"/>
-            </a:pPr>
-            <a:r>
-              <a:t>Already good: xp_cmdshell/OLE/CLR off</a:t>
-            </a:r>
-          </a:p>
-          <a:p>
-            <a:pPr>
-              <a:defRPr sz="2400"/>
-            </a:pPr>
-            <a:r>
-              <a:t>sa login disabled</a:t>
-            </a:r>
-          </a:p>
-          <a:p>
-            <a:pPr>
-              <a:defRPr sz="2400"/>
-            </a:pPr>
-            <a:r>
-              <a:t>Ad Hoc Distributed Queries disabled</a:t>
+              <a:rPr lang="en-US"/>
+              <a:t>Remediation &amp; Verification</a:t>
+            </a:r>
+          </a:p>
+        </p:txBody>
+      </p:sp>
+      <p:sp>
+        <p:nvSpPr>
+          <p:cNvPr id="3" name="Text Placeholder 2">
+            <a:extLst>
+              <a:ext uri="{FF2B5EF4-FFF2-40B4-BE49-F238E27FC236}">
+                <a16:creationId xmlns:a16="http://schemas.microsoft.com/office/drawing/2014/main" id="{47FF6FB3-33A9-F12C-640E-FEE7C482050D}"/>
+              </a:ext>
+            </a:extLst>
+          </p:cNvPr>
+          <p:cNvSpPr>
+            <a:spLocks noGrp="1"/>
+          </p:cNvSpPr>
+          <p:nvPr>
+            <p:ph type="body" idx="1"/>
+          </p:nvPr>
+        </p:nvSpPr>
+        <p:spPr/>
+        <p:txBody>
+          <a:bodyPr/>
+          <a:lstStyle/>
+          <a:p>
+            <a:r>
+              <a:rPr lang="en-US"/>
+              <a:t>Dropped unsafe procedures; created safe replacements</a:t>
+            </a:r>
+          </a:p>
+          <a:p>
+            <a:r>
+              <a:rPr lang="en-US"/>
+              <a:t>Revoked public EXECUTE on lab procedures</a:t>
+            </a:r>
+          </a:p>
+          <a:p>
+            <a:r>
+              <a:rPr lang="en-US"/>
+              <a:t>Started BlueTeamLabAudit + audit specs</a:t>
+            </a:r>
+          </a:p>
+          <a:p>
+            <a:r>
+              <a:rPr lang="en-US"/>
+              <a:t>Disabled remote access</a:t>
+            </a:r>
+          </a:p>
+          <a:p>
+            <a:r>
+              <a:rPr lang="en-US"/>
+              <a:t>Re-ran scripts 02–05: risky patterns = 0 rows</a:t>
             </a:r>
           </a:p>
         </p:txBody>
       </p:sp>
     </p:spTree>
+    <p:extLst>
+      <p:ext uri="{BB962C8B-B14F-4D97-AF65-F5344CB8AC3E}">
+        <p14:creationId xmlns:p14="http://schemas.microsoft.com/office/powerpoint/2010/main" val="291910538"/>
+      </p:ext>
+    </p:extLst>
   </p:cSld>
   <p:clrMapOvr>
     <a:masterClrMapping/>
@@ -3656,7 +4153,7 @@
 </file>
 
 <file path=ppt/slides/slide7.xml><?xml version="1.0" encoding="utf-8"?>
-<p:sld xmlns:a="http://schemas.openxmlformats.org/drawingml/2006/main" xmlns:p="http://schemas.openxmlformats.org/presentationml/2006/main" xmlns:r="http://schemas.openxmlformats.org/officeDocument/2006/relationships">
+<p:sld xmlns:a="http://schemas.openxmlformats.org/drawingml/2006/main" xmlns:r="http://schemas.openxmlformats.org/officeDocument/2006/relationships" xmlns:p="http://schemas.openxmlformats.org/presentationml/2006/main">
   <p:cSld>
     <p:spTree>
       <p:nvGrpSpPr>
@@ -3664,10 +4161,23 @@
         <p:cNvGrpSpPr/>
         <p:nvPr/>
       </p:nvGrpSpPr>
-      <p:grpSpPr/>
-      <p:sp>
-        <p:nvSpPr>
-          <p:cNvPr id="2" name="Title 1"/>
+      <p:grpSpPr>
+        <a:xfrm>
+          <a:off x="0" y="0"/>
+          <a:ext cx="0" cy="0"/>
+          <a:chOff x="0" y="0"/>
+          <a:chExt cx="0" cy="0"/>
+        </a:xfrm>
+      </p:grpSpPr>
+      <p:sp>
+        <p:nvSpPr>
+          <p:cNvPr id="2" name="Title 1">
+            <a:extLst>
+              <a:ext uri="{FF2B5EF4-FFF2-40B4-BE49-F238E27FC236}">
+                <a16:creationId xmlns:a16="http://schemas.microsoft.com/office/drawing/2014/main" id="{05A8F407-BF3A-804E-9CCE-652588B2B5DC}"/>
+              </a:ext>
+            </a:extLst>
+          </p:cNvPr>
           <p:cNvSpPr>
             <a:spLocks noGrp="1"/>
           </p:cNvSpPr>
@@ -3681,68 +4191,70 @@
           <a:lstStyle/>
           <a:p>
             <a:r>
-              <a:t>Remediation &amp; Verification</a:t>
-            </a:r>
-          </a:p>
-        </p:txBody>
-      </p:sp>
-      <p:sp>
-        <p:nvSpPr>
-          <p:cNvPr id="3" name="Content Placeholder 2"/>
-          <p:cNvSpPr>
-            <a:spLocks noGrp="1"/>
-          </p:cNvSpPr>
-          <p:nvPr>
-            <p:ph idx="1"/>
-          </p:nvPr>
-        </p:nvSpPr>
-        <p:spPr/>
-        <p:txBody>
-          <a:bodyPr/>
-          <a:lstStyle/>
-          <a:p>
-            <a:pPr>
-              <a:defRPr sz="2400"/>
-            </a:pPr>
-            <a:r>
-              <a:t>Replaced/removed unsafe procedures</a:t>
-            </a:r>
-          </a:p>
-          <a:p>
-            <a:pPr>
-              <a:defRPr sz="2400"/>
-            </a:pPr>
-            <a:r>
-              <a:t>Revoked public EXECUTE grants</a:t>
-            </a:r>
-          </a:p>
-          <a:p>
-            <a:pPr>
-              <a:defRPr sz="2400"/>
-            </a:pPr>
-            <a:r>
-              <a:t>Enabled BlueTeamLabAudit</a:t>
-            </a:r>
-          </a:p>
-          <a:p>
-            <a:pPr>
-              <a:defRPr sz="2400"/>
-            </a:pPr>
-            <a:r>
-              <a:t>remote access = 0 | 0</a:t>
-            </a:r>
-          </a:p>
-          <a:p>
-            <a:pPr>
-              <a:defRPr sz="2400"/>
-            </a:pPr>
-            <a:r>
-              <a:t>Re-run scripts → 0 risky rows</a:t>
+              <a:rPr lang="en-US"/>
+              <a:t>Recommendations</a:t>
+            </a:r>
+          </a:p>
+        </p:txBody>
+      </p:sp>
+      <p:sp>
+        <p:nvSpPr>
+          <p:cNvPr id="3" name="Text Placeholder 2">
+            <a:extLst>
+              <a:ext uri="{FF2B5EF4-FFF2-40B4-BE49-F238E27FC236}">
+                <a16:creationId xmlns:a16="http://schemas.microsoft.com/office/drawing/2014/main" id="{B3630A60-24D6-A8D9-9C84-E2FB7D7587EA}"/>
+              </a:ext>
+            </a:extLst>
+          </p:cNvPr>
+          <p:cNvSpPr>
+            <a:spLocks noGrp="1"/>
+          </p:cNvSpPr>
+          <p:nvPr>
+            <p:ph type="body" idx="1"/>
+          </p:nvPr>
+        </p:nvSpPr>
+        <p:spPr/>
+        <p:txBody>
+          <a:bodyPr/>
+          <a:lstStyle/>
+          <a:p>
+            <a:r>
+              <a:rPr lang="en-US"/>
+              <a:t>Use parameterized SQL / avoid string-concat EXEC</a:t>
+            </a:r>
+          </a:p>
+          <a:p>
+            <a:r>
+              <a:rPr lang="en-US"/>
+              <a:t>Avoid EXECUTE AS OWNER unless justified</a:t>
+            </a:r>
+          </a:p>
+          <a:p>
+            <a:r>
+              <a:rPr lang="en-US"/>
+              <a:t>Never grant sensitive EXECUTE to public</a:t>
+            </a:r>
+          </a:p>
+          <a:p>
+            <a:r>
+              <a:rPr lang="en-US"/>
+              <a:t>Keep xp_cmdshell and high-risk features disabled</a:t>
+            </a:r>
+          </a:p>
+          <a:p>
+            <a:r>
+              <a:rPr lang="en-US"/>
+              <a:t>Enable SQL Server Audit and review regularly</a:t>
             </a:r>
           </a:p>
         </p:txBody>
       </p:sp>
     </p:spTree>
+    <p:extLst>
+      <p:ext uri="{BB962C8B-B14F-4D97-AF65-F5344CB8AC3E}">
+        <p14:creationId xmlns:p14="http://schemas.microsoft.com/office/powerpoint/2010/main" val="3585367994"/>
+      </p:ext>
+    </p:extLst>
   </p:cSld>
   <p:clrMapOvr>
     <a:masterClrMapping/>
@@ -3751,7 +4263,7 @@
 </file>
 
 <file path=ppt/slides/slide8.xml><?xml version="1.0" encoding="utf-8"?>
-<p:sld xmlns:a="http://schemas.openxmlformats.org/drawingml/2006/main" xmlns:p="http://schemas.openxmlformats.org/presentationml/2006/main" xmlns:r="http://schemas.openxmlformats.org/officeDocument/2006/relationships">
+<p:sld xmlns:a="http://schemas.openxmlformats.org/drawingml/2006/main" xmlns:r="http://schemas.openxmlformats.org/officeDocument/2006/relationships" xmlns:p="http://schemas.openxmlformats.org/presentationml/2006/main">
   <p:cSld>
     <p:spTree>
       <p:nvGrpSpPr>
@@ -3759,10 +4271,23 @@
         <p:cNvGrpSpPr/>
         <p:nvPr/>
       </p:nvGrpSpPr>
-      <p:grpSpPr/>
-      <p:sp>
-        <p:nvSpPr>
-          <p:cNvPr id="2" name="Title 1"/>
+      <p:grpSpPr>
+        <a:xfrm>
+          <a:off x="0" y="0"/>
+          <a:ext cx="0" cy="0"/>
+          <a:chOff x="0" y="0"/>
+          <a:chExt cx="0" cy="0"/>
+        </a:xfrm>
+      </p:grpSpPr>
+      <p:sp>
+        <p:nvSpPr>
+          <p:cNvPr id="2" name="Title 1">
+            <a:extLst>
+              <a:ext uri="{FF2B5EF4-FFF2-40B4-BE49-F238E27FC236}">
+                <a16:creationId xmlns:a16="http://schemas.microsoft.com/office/drawing/2014/main" id="{19B605D7-6298-BE29-3538-391A147577CE}"/>
+              </a:ext>
+            </a:extLst>
+          </p:cNvPr>
           <p:cNvSpPr>
             <a:spLocks noGrp="1"/>
           </p:cNvSpPr>
@@ -3776,68 +4301,64 @@
           <a:lstStyle/>
           <a:p>
             <a:r>
-              <a:t>Recommendations &amp; Close</a:t>
-            </a:r>
-          </a:p>
-        </p:txBody>
-      </p:sp>
-      <p:sp>
-        <p:nvSpPr>
-          <p:cNvPr id="3" name="Content Placeholder 2"/>
-          <p:cNvSpPr>
-            <a:spLocks noGrp="1"/>
-          </p:cNvSpPr>
-          <p:nvPr>
-            <p:ph idx="1"/>
-          </p:nvPr>
-        </p:nvSpPr>
-        <p:spPr/>
-        <p:txBody>
-          <a:bodyPr/>
-          <a:lstStyle/>
-          <a:p>
-            <a:pPr>
-              <a:defRPr sz="2400"/>
-            </a:pPr>
-            <a:r>
-              <a:t>Parameterize; avoid unsafe dynamic SQL</a:t>
-            </a:r>
-          </a:p>
-          <a:p>
-            <a:pPr>
-              <a:defRPr sz="2400"/>
-            </a:pPr>
-            <a:r>
-              <a:t>Least privilege; no sensitive public grants</a:t>
-            </a:r>
-          </a:p>
-          <a:p>
-            <a:pPr>
-              <a:defRPr sz="2400"/>
-            </a:pPr>
-            <a:r>
-              <a:t>Keep dangerous features disabled</a:t>
-            </a:r>
-          </a:p>
-          <a:p>
-            <a:pPr>
-              <a:defRPr sz="2400"/>
-            </a:pPr>
-            <a:r>
-              <a:t>Continuous audit + scheduled re-checks</a:t>
-            </a:r>
-          </a:p>
-          <a:p>
-            <a:pPr>
-              <a:defRPr sz="2400"/>
-            </a:pPr>
-            <a:r>
+              <a:rPr lang="en-US"/>
+              <a:t>Conclusion</a:t>
+            </a:r>
+          </a:p>
+        </p:txBody>
+      </p:sp>
+      <p:sp>
+        <p:nvSpPr>
+          <p:cNvPr id="3" name="Text Placeholder 2">
+            <a:extLst>
+              <a:ext uri="{FF2B5EF4-FFF2-40B4-BE49-F238E27FC236}">
+                <a16:creationId xmlns:a16="http://schemas.microsoft.com/office/drawing/2014/main" id="{7EFE5159-A466-674D-9E75-4AD86A0EF14B}"/>
+              </a:ext>
+            </a:extLst>
+          </p:cNvPr>
+          <p:cNvSpPr>
+            <a:spLocks noGrp="1"/>
+          </p:cNvSpPr>
+          <p:nvPr>
+            <p:ph type="body" idx="1"/>
+          </p:nvPr>
+        </p:nvSpPr>
+        <p:spPr/>
+        <p:txBody>
+          <a:bodyPr/>
+          <a:lstStyle/>
+          <a:p>
+            <a:r>
+              <a:rPr lang="en-US"/>
+              <a:t>6 findings identified, remediated, and verified</a:t>
+            </a:r>
+          </a:p>
+          <a:p>
+            <a:r>
+              <a:rPr lang="en-US"/>
+              <a:t>Full report, scripts, and evidence in GitHub</a:t>
+            </a:r>
+          </a:p>
+          <a:p>
+            <a:r>
+              <a:rPr lang="en-US"/>
               <a:t>Thank you — questions welcome</a:t>
             </a:r>
           </a:p>
+          <a:p>
+            <a:r>
+              <a:rPr lang="en-US"/>
+              <a:t>Repo: github.com/cy-vokyere3623-hash/blue-team-stored-procedure-audit</a:t>
+            </a:r>
+          </a:p>
         </p:txBody>
       </p:sp>
     </p:spTree>
+    <p:extLst>
+      <p:ext uri="{BB962C8B-B14F-4D97-AF65-F5344CB8AC3E}">
+        <p14:creationId xmlns:p14="http://schemas.microsoft.com/office/powerpoint/2010/main" val="3610002508"/>
+      </p:ext>
+    </p:extLst>
   </p:cSld>
   <p:clrMapOvr>
     <a:masterClrMapping/>
@@ -3856,44 +4377,44 @@
         <a:sysClr val="window" lastClr="FFFFFF"/>
       </a:lt1>
       <a:dk2>
-        <a:srgbClr val="1F497D"/>
+        <a:srgbClr val="0E2841"/>
       </a:dk2>
       <a:lt2>
-        <a:srgbClr val="EEECE1"/>
+        <a:srgbClr val="E8E8E8"/>
       </a:lt2>
       <a:accent1>
-        <a:srgbClr val="4F81BD"/>
+        <a:srgbClr val="156082"/>
       </a:accent1>
       <a:accent2>
-        <a:srgbClr val="C0504D"/>
+        <a:srgbClr val="E97132"/>
       </a:accent2>
       <a:accent3>
-        <a:srgbClr val="9BBB59"/>
+        <a:srgbClr val="196B24"/>
       </a:accent3>
       <a:accent4>
-        <a:srgbClr val="8064A2"/>
+        <a:srgbClr val="0F9ED5"/>
       </a:accent4>
       <a:accent5>
-        <a:srgbClr val="4BACC6"/>
+        <a:srgbClr val="A02B93"/>
       </a:accent5>
       <a:accent6>
-        <a:srgbClr val="F79646"/>
+        <a:srgbClr val="4EA72E"/>
       </a:accent6>
       <a:hlink>
-        <a:srgbClr val="0000FF"/>
+        <a:srgbClr val="467886"/>
       </a:hlink>
       <a:folHlink>
-        <a:srgbClr val="800080"/>
+        <a:srgbClr val="96607D"/>
       </a:folHlink>
     </a:clrScheme>
     <a:fontScheme name="Office">
       <a:majorFont>
-        <a:latin typeface="Calibri"/>
+        <a:latin typeface="Aptos Display" panose="02110004020202020204"/>
         <a:ea typeface=""/>
         <a:cs typeface=""/>
-        <a:font script="Jpan" typeface="ＭＳ Ｐゴシック"/>
+        <a:font script="Jpan" typeface="游ゴシック Light"/>
         <a:font script="Hang" typeface="맑은 고딕"/>
-        <a:font script="Hans" typeface="宋体"/>
+        <a:font script="Hans" typeface="等线 Light"/>
         <a:font script="Hant" typeface="新細明體"/>
         <a:font script="Arab" typeface="Times New Roman"/>
         <a:font script="Hebr" typeface="Times New Roman"/>
@@ -3921,14 +4442,31 @@
         <a:font script="Viet" typeface="Times New Roman"/>
         <a:font script="Uigh" typeface="Microsoft Uighur"/>
         <a:font script="Geor" typeface="Sylfaen"/>
+        <a:font script="Armn" typeface="Arial"/>
+        <a:font script="Bugi" typeface="Leelawadee UI"/>
+        <a:font script="Bopo" typeface="Microsoft JhengHei"/>
+        <a:font script="Java" typeface="Javanese Text"/>
+        <a:font script="Lisu" typeface="Segoe UI"/>
+        <a:font script="Mymr" typeface="Myanmar Text"/>
+        <a:font script="Nkoo" typeface="Ebrima"/>
+        <a:font script="Olck" typeface="Nirmala UI"/>
+        <a:font script="Osma" typeface="Ebrima"/>
+        <a:font script="Phag" typeface="Phagspa"/>
+        <a:font script="Syrn" typeface="Estrangelo Edessa"/>
+        <a:font script="Syrj" typeface="Estrangelo Edessa"/>
+        <a:font script="Syre" typeface="Estrangelo Edessa"/>
+        <a:font script="Sora" typeface="Nirmala UI"/>
+        <a:font script="Tale" typeface="Microsoft Tai Le"/>
+        <a:font script="Talu" typeface="Microsoft New Tai Lue"/>
+        <a:font script="Tfng" typeface="Ebrima"/>
       </a:majorFont>
       <a:minorFont>
-        <a:latin typeface="Calibri"/>
+        <a:latin typeface="Aptos" panose="02110004020202020204"/>
         <a:ea typeface=""/>
         <a:cs typeface=""/>
-        <a:font script="Jpan" typeface="ＭＳ Ｐゴシック"/>
+        <a:font script="Jpan" typeface="游ゴシック"/>
         <a:font script="Hang" typeface="맑은 고딕"/>
-        <a:font script="Hans" typeface="宋体"/>
+        <a:font script="Hans" typeface="等线"/>
         <a:font script="Hant" typeface="新細明體"/>
         <a:font script="Arab" typeface="Arial"/>
         <a:font script="Hebr" typeface="Arial"/>
@@ -3956,6 +4494,23 @@
         <a:font script="Viet" typeface="Arial"/>
         <a:font script="Uigh" typeface="Microsoft Uighur"/>
         <a:font script="Geor" typeface="Sylfaen"/>
+        <a:font script="Armn" typeface="Arial"/>
+        <a:font script="Bugi" typeface="Leelawadee UI"/>
+        <a:font script="Bopo" typeface="Microsoft JhengHei"/>
+        <a:font script="Java" typeface="Javanese Text"/>
+        <a:font script="Lisu" typeface="Segoe UI"/>
+        <a:font script="Mymr" typeface="Myanmar Text"/>
+        <a:font script="Nkoo" typeface="Ebrima"/>
+        <a:font script="Olck" typeface="Nirmala UI"/>
+        <a:font script="Osma" typeface="Ebrima"/>
+        <a:font script="Phag" typeface="Phagspa"/>
+        <a:font script="Syrn" typeface="Estrangelo Edessa"/>
+        <a:font script="Syrj" typeface="Estrangelo Edessa"/>
+        <a:font script="Syre" typeface="Estrangelo Edessa"/>
+        <a:font script="Sora" typeface="Nirmala UI"/>
+        <a:font script="Tale" typeface="Microsoft Tai Le"/>
+        <a:font script="Talu" typeface="Microsoft New Tai Lue"/>
+        <a:font script="Tfng" typeface="Ebrima"/>
       </a:minorFont>
     </a:fontScheme>
     <a:fmtScheme name="Office">
@@ -3967,180 +4522,136 @@
           <a:gsLst>
             <a:gs pos="0">
               <a:schemeClr val="phClr">
-                <a:tint val="50000"/>
-                <a:satMod val="300000"/>
+                <a:lumMod val="110000"/>
+                <a:satMod val="105000"/>
+                <a:tint val="67000"/>
               </a:schemeClr>
             </a:gs>
-            <a:gs pos="35000">
+            <a:gs pos="50000">
               <a:schemeClr val="phClr">
-                <a:tint val="37000"/>
-                <a:satMod val="300000"/>
+                <a:lumMod val="105000"/>
+                <a:satMod val="103000"/>
+                <a:tint val="73000"/>
               </a:schemeClr>
             </a:gs>
             <a:gs pos="100000">
               <a:schemeClr val="phClr">
-                <a:tint val="15000"/>
-                <a:satMod val="350000"/>
+                <a:lumMod val="105000"/>
+                <a:satMod val="109000"/>
+                <a:tint val="81000"/>
               </a:schemeClr>
             </a:gs>
           </a:gsLst>
-          <a:lin ang="16200000" scaled="1"/>
+          <a:lin ang="5400000" scaled="0"/>
         </a:gradFill>
         <a:gradFill rotWithShape="1">
           <a:gsLst>
             <a:gs pos="0">
               <a:schemeClr val="phClr">
-                <a:tint val="100000"/>
+                <a:satMod val="103000"/>
+                <a:lumMod val="102000"/>
+                <a:tint val="94000"/>
+              </a:schemeClr>
+            </a:gs>
+            <a:gs pos="50000">
+              <a:schemeClr val="phClr">
+                <a:satMod val="110000"/>
+                <a:lumMod val="100000"/>
                 <a:shade val="100000"/>
-                <a:satMod val="130000"/>
               </a:schemeClr>
             </a:gs>
             <a:gs pos="100000">
               <a:schemeClr val="phClr">
-                <a:tint val="50000"/>
-                <a:shade val="100000"/>
-                <a:satMod val="350000"/>
+                <a:lumMod val="99000"/>
+                <a:satMod val="120000"/>
+                <a:shade val="78000"/>
               </a:schemeClr>
             </a:gs>
           </a:gsLst>
-          <a:lin ang="16200000" scaled="0"/>
+          <a:lin ang="5400000" scaled="0"/>
         </a:gradFill>
       </a:fillStyleLst>
       <a:lnStyleLst>
-        <a:ln w="9525" cap="flat" cmpd="sng" algn="ctr">
+        <a:ln w="12700" cap="flat" cmpd="sng" algn="ctr">
           <a:solidFill>
-            <a:schemeClr val="phClr">
-              <a:shade val="95000"/>
-              <a:satMod val="105000"/>
-            </a:schemeClr>
+            <a:schemeClr val="phClr"/>
           </a:solidFill>
           <a:prstDash val="solid"/>
+          <a:miter lim="800000"/>
+        </a:ln>
+        <a:ln w="19050" cap="flat" cmpd="sng" algn="ctr">
+          <a:solidFill>
+            <a:schemeClr val="phClr"/>
+          </a:solidFill>
+          <a:prstDash val="solid"/>
+          <a:miter lim="800000"/>
         </a:ln>
         <a:ln w="25400" cap="flat" cmpd="sng" algn="ctr">
           <a:solidFill>
             <a:schemeClr val="phClr"/>
           </a:solidFill>
           <a:prstDash val="solid"/>
-        </a:ln>
-        <a:ln w="38100" cap="flat" cmpd="sng" algn="ctr">
-          <a:solidFill>
-            <a:schemeClr val="phClr"/>
-          </a:solidFill>
-          <a:prstDash val="solid"/>
+          <a:miter lim="800000"/>
         </a:ln>
       </a:lnStyleLst>
       <a:effectStyleLst>
         <a:effectStyle>
+          <a:effectLst/>
+        </a:effectStyle>
+        <a:effectStyle>
+          <a:effectLst/>
+        </a:effectStyle>
+        <a:effectStyle>
           <a:effectLst>
-            <a:outerShdw blurRad="40000" dist="20000" dir="5400000" rotWithShape="0">
+            <a:outerShdw blurRad="57150" dist="19050" dir="5400000" algn="ctr" rotWithShape="0">
               <a:srgbClr val="000000">
-                <a:alpha val="38000"/>
+                <a:alpha val="63000"/>
               </a:srgbClr>
             </a:outerShdw>
           </a:effectLst>
-        </a:effectStyle>
-        <a:effectStyle>
-          <a:effectLst>
-            <a:outerShdw blurRad="40000" dist="23000" dir="5400000" rotWithShape="0">
-              <a:srgbClr val="000000">
-                <a:alpha val="35000"/>
-              </a:srgbClr>
-            </a:outerShdw>
-          </a:effectLst>
-        </a:effectStyle>
-        <a:effectStyle>
-          <a:effectLst>
-            <a:outerShdw blurRad="40000" dist="23000" dir="5400000" rotWithShape="0">
-              <a:srgbClr val="000000">
-                <a:alpha val="35000"/>
-              </a:srgbClr>
-            </a:outerShdw>
-          </a:effectLst>
-          <a:scene3d>
-            <a:camera prst="orthographicFront">
-              <a:rot lat="0" lon="0" rev="0"/>
-            </a:camera>
-            <a:lightRig rig="threePt" dir="t">
-              <a:rot lat="0" lon="0" rev="1200000"/>
-            </a:lightRig>
-          </a:scene3d>
-          <a:sp3d>
-            <a:bevelT w="63500" h="25400"/>
-          </a:sp3d>
         </a:effectStyle>
       </a:effectStyleLst>
       <a:bgFillStyleLst>
         <a:solidFill>
           <a:schemeClr val="phClr"/>
         </a:solidFill>
+        <a:solidFill>
+          <a:schemeClr val="phClr">
+            <a:tint val="95000"/>
+            <a:satMod val="170000"/>
+          </a:schemeClr>
+        </a:solidFill>
         <a:gradFill rotWithShape="1">
           <a:gsLst>
             <a:gs pos="0">
               <a:schemeClr val="phClr">
-                <a:tint val="40000"/>
-                <a:satMod val="350000"/>
+                <a:tint val="93000"/>
+                <a:satMod val="150000"/>
+                <a:shade val="98000"/>
+                <a:lumMod val="102000"/>
               </a:schemeClr>
             </a:gs>
-            <a:gs pos="40000">
+            <a:gs pos="50000">
               <a:schemeClr val="phClr">
-                <a:tint val="45000"/>
-                <a:shade val="99000"/>
-                <a:satMod val="350000"/>
+                <a:tint val="98000"/>
+                <a:satMod val="130000"/>
+                <a:shade val="90000"/>
+                <a:lumMod val="103000"/>
               </a:schemeClr>
             </a:gs>
             <a:gs pos="100000">
               <a:schemeClr val="phClr">
-                <a:shade val="20000"/>
-                <a:satMod val="255000"/>
+                <a:shade val="63000"/>
+                <a:satMod val="120000"/>
               </a:schemeClr>
             </a:gs>
           </a:gsLst>
-          <a:path path="circle">
-            <a:fillToRect l="50000" t="-80000" r="50000" b="180000"/>
-          </a:path>
-        </a:gradFill>
-        <a:gradFill rotWithShape="1">
-          <a:gsLst>
-            <a:gs pos="0">
-              <a:schemeClr val="phClr">
-                <a:tint val="80000"/>
-                <a:satMod val="300000"/>
-              </a:schemeClr>
-            </a:gs>
-            <a:gs pos="100000">
-              <a:schemeClr val="phClr">
-                <a:shade val="30000"/>
-                <a:satMod val="200000"/>
-              </a:schemeClr>
-            </a:gs>
-          </a:gsLst>
-          <a:path path="circle">
-            <a:fillToRect l="50000" t="50000" r="50000" b="50000"/>
-          </a:path>
+          <a:lin ang="5400000" scaled="0"/>
         </a:gradFill>
       </a:bgFillStyleLst>
     </a:fmtScheme>
   </a:themeElements>
   <a:objectDefaults>
-    <a:spDef>
-      <a:spPr/>
-      <a:bodyPr/>
-      <a:lstStyle/>
-      <a:style>
-        <a:lnRef idx="1">
-          <a:schemeClr val="accent1"/>
-        </a:lnRef>
-        <a:fillRef idx="3">
-          <a:schemeClr val="accent1"/>
-        </a:fillRef>
-        <a:effectRef idx="2">
-          <a:schemeClr val="accent1"/>
-        </a:effectRef>
-        <a:fontRef idx="minor">
-          <a:schemeClr val="lt1"/>
-        </a:fontRef>
-      </a:style>
-    </a:spDef>
     <a:lnDef>
       <a:spPr/>
       <a:bodyPr/>
@@ -4162,5 +4673,10 @@
     </a:lnDef>
   </a:objectDefaults>
   <a:extraClrSchemeLst/>
+  <a:extLst>
+    <a:ext uri="{05A4C25C-085E-4340-85A3-A5531E510DB2}">
+      <thm15:themeFamily xmlns:thm15="http://schemas.microsoft.com/office/thememl/2012/main" name="Office Theme" id="{2E142A2C-CD16-42D6-873A-C26D2A0506FA}" vid="{1BDDFF52-6CD6-40A5-AB3C-68EB2F1E4D0A}"/>
+    </a:ext>
+  </a:extLst>
 </a:theme>
 </file>